--- a/exports/pptx/lessons/middle-module-12-movement-of-sun/day-02-axial-tilt.pptx
+++ b/exports/pptx/lessons/middle-module-12-movement-of-sun/day-02-axial-tilt.pptx
@@ -16,9 +16,18 @@
     <p:sldId id="264" r:id="rId10"/>
     <p:sldId id="265" r:id="rId11"/>
     <p:sldId id="266" r:id="rId12"/>
+    <p:sldId id="267" r:id="rId13"/>
+    <p:sldId id="268" r:id="rId14"/>
+    <p:sldId id="269" r:id="rId15"/>
+    <p:sldId id="270" r:id="rId16"/>
+    <p:sldId id="271" r:id="rId17"/>
+    <p:sldId id="272" r:id="rId18"/>
+    <p:sldId id="273" r:id="rId19"/>
+    <p:sldId id="274" r:id="rId20"/>
+    <p:sldId id="275" r:id="rId21"/>
   </p:sldIdLst>
   <p:notesMasterIdLst>
-    <p:notesMasterId r:id="rId13"/>
+    <p:notesMasterId r:id="rId22"/>
   </p:notesMasterIdLst>
   <p:sldSz cx="9144000" cy="5143500"/>
   <p:notesSz cx="5143500" cy="9144000"/>
@@ -730,6 +739,710 @@
 </p:notes>
 </file>
 
+<file path=ppt/notesSlides/notesSlide12.xml><?xml version="1.0" encoding="utf-8"?>
+<p:notes xmlns:a="http://schemas.openxmlformats.org/drawingml/2006/main" xmlns:r="http://schemas.openxmlformats.org/officeDocument/2006/relationships" xmlns:p="http://schemas.openxmlformats.org/presentationml/2006/main">
+  <p:cSld>
+    <p:spTree>
+      <p:nvGrpSpPr>
+        <p:cNvPr id="1" name=""/>
+        <p:cNvGrpSpPr/>
+        <p:nvPr/>
+      </p:nvGrpSpPr>
+      <p:grpSpPr>
+        <a:xfrm>
+          <a:off x="0" y="0"/>
+          <a:ext cx="0" cy="0"/>
+          <a:chOff x="0" y="0"/>
+          <a:chExt cx="0" cy="0"/>
+        </a:xfrm>
+      </p:grpSpPr>
+      <p:sp>
+        <p:nvSpPr>
+          <p:cNvPr id="2" name="Slide Image Placeholder 1"/>
+          <p:cNvSpPr>
+            <a:spLocks noGrp="1" noRot="1" noChangeAspect="1"/>
+          </p:cNvSpPr>
+          <p:nvPr>
+            <p:ph type="sldImg"/>
+          </p:nvPr>
+        </p:nvSpPr>
+        <p:spPr/>
+      </p:sp>
+      <p:sp>
+        <p:nvSpPr>
+          <p:cNvPr id="3" name="Notes Placeholder 2"/>
+          <p:cNvSpPr>
+            <a:spLocks noGrp="1"/>
+          </p:cNvSpPr>
+          <p:nvPr>
+            <p:ph type="body" idx="1"/>
+          </p:nvPr>
+        </p:nvSpPr>
+        <p:spPr/>
+        <p:txBody>
+          <a:bodyPr/>
+          <a:lstStyle/>
+          <a:p>
+            <a:r>
+              <a:rPr lang="en-US" dirty="0"/>
+              <a:t/>
+            </a:r>
+            <a:endParaRPr lang="en-US" dirty="0"/>
+          </a:p>
+        </p:txBody>
+      </p:sp>
+      <p:sp>
+        <p:nvSpPr>
+          <p:cNvPr id="4" name="Slide Number Placeholder 3"/>
+          <p:cNvSpPr>
+            <a:spLocks noGrp="1"/>
+          </p:cNvSpPr>
+          <p:nvPr>
+            <p:ph type="sldNum" sz="quarter" idx="10"/>
+          </p:nvPr>
+        </p:nvSpPr>
+        <p:spPr/>
+        <p:txBody>
+          <a:bodyPr/>
+          <a:lstStyle/>
+          <a:p>
+            <a:fld id="{F7021451-1387-4CA6-816F-3879F97B5CBC}" type="slidenum">
+              <a:rPr lang="en-US"/>
+              <a:t>12</a:t>
+            </a:fld>
+            <a:endParaRPr lang="en-US"/>
+          </a:p>
+        </p:txBody>
+      </p:sp>
+    </p:spTree>
+    <p:extLst>
+      <p:ext uri="{BB962C8B-B14F-4D97-AF65-F5344CB8AC3E}">
+        <p14:creationId xmlns:p14="http://schemas.microsoft.com/office/powerpoint/2010/main" val="1024086991"/>
+      </p:ext>
+    </p:extLst>
+  </p:cSld>
+  <p:clrMapOvr>
+    <a:masterClrMapping/>
+  </p:clrMapOvr>
+</p:notes>
+</file>
+
+<file path=ppt/notesSlides/notesSlide13.xml><?xml version="1.0" encoding="utf-8"?>
+<p:notes xmlns:a="http://schemas.openxmlformats.org/drawingml/2006/main" xmlns:r="http://schemas.openxmlformats.org/officeDocument/2006/relationships" xmlns:p="http://schemas.openxmlformats.org/presentationml/2006/main">
+  <p:cSld>
+    <p:spTree>
+      <p:nvGrpSpPr>
+        <p:cNvPr id="1" name=""/>
+        <p:cNvGrpSpPr/>
+        <p:nvPr/>
+      </p:nvGrpSpPr>
+      <p:grpSpPr>
+        <a:xfrm>
+          <a:off x="0" y="0"/>
+          <a:ext cx="0" cy="0"/>
+          <a:chOff x="0" y="0"/>
+          <a:chExt cx="0" cy="0"/>
+        </a:xfrm>
+      </p:grpSpPr>
+      <p:sp>
+        <p:nvSpPr>
+          <p:cNvPr id="2" name="Slide Image Placeholder 1"/>
+          <p:cNvSpPr>
+            <a:spLocks noGrp="1" noRot="1" noChangeAspect="1"/>
+          </p:cNvSpPr>
+          <p:nvPr>
+            <p:ph type="sldImg"/>
+          </p:nvPr>
+        </p:nvSpPr>
+        <p:spPr/>
+      </p:sp>
+      <p:sp>
+        <p:nvSpPr>
+          <p:cNvPr id="3" name="Notes Placeholder 2"/>
+          <p:cNvSpPr>
+            <a:spLocks noGrp="1"/>
+          </p:cNvSpPr>
+          <p:nvPr>
+            <p:ph type="body" idx="1"/>
+          </p:nvPr>
+        </p:nvSpPr>
+        <p:spPr/>
+        <p:txBody>
+          <a:bodyPr/>
+          <a:lstStyle/>
+          <a:p>
+            <a:r>
+              <a:rPr lang="en-US" dirty="0"/>
+              <a:t/>
+            </a:r>
+            <a:endParaRPr lang="en-US" dirty="0"/>
+          </a:p>
+        </p:txBody>
+      </p:sp>
+      <p:sp>
+        <p:nvSpPr>
+          <p:cNvPr id="4" name="Slide Number Placeholder 3"/>
+          <p:cNvSpPr>
+            <a:spLocks noGrp="1"/>
+          </p:cNvSpPr>
+          <p:nvPr>
+            <p:ph type="sldNum" sz="quarter" idx="10"/>
+          </p:nvPr>
+        </p:nvSpPr>
+        <p:spPr/>
+        <p:txBody>
+          <a:bodyPr/>
+          <a:lstStyle/>
+          <a:p>
+            <a:fld id="{F7021451-1387-4CA6-816F-3879F97B5CBC}" type="slidenum">
+              <a:rPr lang="en-US"/>
+              <a:t>13</a:t>
+            </a:fld>
+            <a:endParaRPr lang="en-US"/>
+          </a:p>
+        </p:txBody>
+      </p:sp>
+    </p:spTree>
+    <p:extLst>
+      <p:ext uri="{BB962C8B-B14F-4D97-AF65-F5344CB8AC3E}">
+        <p14:creationId xmlns:p14="http://schemas.microsoft.com/office/powerpoint/2010/main" val="1024086991"/>
+      </p:ext>
+    </p:extLst>
+  </p:cSld>
+  <p:clrMapOvr>
+    <a:masterClrMapping/>
+  </p:clrMapOvr>
+</p:notes>
+</file>
+
+<file path=ppt/notesSlides/notesSlide14.xml><?xml version="1.0" encoding="utf-8"?>
+<p:notes xmlns:a="http://schemas.openxmlformats.org/drawingml/2006/main" xmlns:r="http://schemas.openxmlformats.org/officeDocument/2006/relationships" xmlns:p="http://schemas.openxmlformats.org/presentationml/2006/main">
+  <p:cSld>
+    <p:spTree>
+      <p:nvGrpSpPr>
+        <p:cNvPr id="1" name=""/>
+        <p:cNvGrpSpPr/>
+        <p:nvPr/>
+      </p:nvGrpSpPr>
+      <p:grpSpPr>
+        <a:xfrm>
+          <a:off x="0" y="0"/>
+          <a:ext cx="0" cy="0"/>
+          <a:chOff x="0" y="0"/>
+          <a:chExt cx="0" cy="0"/>
+        </a:xfrm>
+      </p:grpSpPr>
+      <p:sp>
+        <p:nvSpPr>
+          <p:cNvPr id="2" name="Slide Image Placeholder 1"/>
+          <p:cNvSpPr>
+            <a:spLocks noGrp="1" noRot="1" noChangeAspect="1"/>
+          </p:cNvSpPr>
+          <p:nvPr>
+            <p:ph type="sldImg"/>
+          </p:nvPr>
+        </p:nvSpPr>
+        <p:spPr/>
+      </p:sp>
+      <p:sp>
+        <p:nvSpPr>
+          <p:cNvPr id="3" name="Notes Placeholder 2"/>
+          <p:cNvSpPr>
+            <a:spLocks noGrp="1"/>
+          </p:cNvSpPr>
+          <p:nvPr>
+            <p:ph type="body" idx="1"/>
+          </p:nvPr>
+        </p:nvSpPr>
+        <p:spPr/>
+        <p:txBody>
+          <a:bodyPr/>
+          <a:lstStyle/>
+          <a:p>
+            <a:r>
+              <a:rPr lang="en-US" dirty="0"/>
+              <a:t/>
+            </a:r>
+            <a:endParaRPr lang="en-US" dirty="0"/>
+          </a:p>
+        </p:txBody>
+      </p:sp>
+      <p:sp>
+        <p:nvSpPr>
+          <p:cNvPr id="4" name="Slide Number Placeholder 3"/>
+          <p:cNvSpPr>
+            <a:spLocks noGrp="1"/>
+          </p:cNvSpPr>
+          <p:nvPr>
+            <p:ph type="sldNum" sz="quarter" idx="10"/>
+          </p:nvPr>
+        </p:nvSpPr>
+        <p:spPr/>
+        <p:txBody>
+          <a:bodyPr/>
+          <a:lstStyle/>
+          <a:p>
+            <a:fld id="{F7021451-1387-4CA6-816F-3879F97B5CBC}" type="slidenum">
+              <a:rPr lang="en-US"/>
+              <a:t>14</a:t>
+            </a:fld>
+            <a:endParaRPr lang="en-US"/>
+          </a:p>
+        </p:txBody>
+      </p:sp>
+    </p:spTree>
+    <p:extLst>
+      <p:ext uri="{BB962C8B-B14F-4D97-AF65-F5344CB8AC3E}">
+        <p14:creationId xmlns:p14="http://schemas.microsoft.com/office/powerpoint/2010/main" val="1024086991"/>
+      </p:ext>
+    </p:extLst>
+  </p:cSld>
+  <p:clrMapOvr>
+    <a:masterClrMapping/>
+  </p:clrMapOvr>
+</p:notes>
+</file>
+
+<file path=ppt/notesSlides/notesSlide15.xml><?xml version="1.0" encoding="utf-8"?>
+<p:notes xmlns:a="http://schemas.openxmlformats.org/drawingml/2006/main" xmlns:r="http://schemas.openxmlformats.org/officeDocument/2006/relationships" xmlns:p="http://schemas.openxmlformats.org/presentationml/2006/main">
+  <p:cSld>
+    <p:spTree>
+      <p:nvGrpSpPr>
+        <p:cNvPr id="1" name=""/>
+        <p:cNvGrpSpPr/>
+        <p:nvPr/>
+      </p:nvGrpSpPr>
+      <p:grpSpPr>
+        <a:xfrm>
+          <a:off x="0" y="0"/>
+          <a:ext cx="0" cy="0"/>
+          <a:chOff x="0" y="0"/>
+          <a:chExt cx="0" cy="0"/>
+        </a:xfrm>
+      </p:grpSpPr>
+      <p:sp>
+        <p:nvSpPr>
+          <p:cNvPr id="2" name="Slide Image Placeholder 1"/>
+          <p:cNvSpPr>
+            <a:spLocks noGrp="1" noRot="1" noChangeAspect="1"/>
+          </p:cNvSpPr>
+          <p:nvPr>
+            <p:ph type="sldImg"/>
+          </p:nvPr>
+        </p:nvSpPr>
+        <p:spPr/>
+      </p:sp>
+      <p:sp>
+        <p:nvSpPr>
+          <p:cNvPr id="3" name="Notes Placeholder 2"/>
+          <p:cNvSpPr>
+            <a:spLocks noGrp="1"/>
+          </p:cNvSpPr>
+          <p:nvPr>
+            <p:ph type="body" idx="1"/>
+          </p:nvPr>
+        </p:nvSpPr>
+        <p:spPr/>
+        <p:txBody>
+          <a:bodyPr/>
+          <a:lstStyle/>
+          <a:p>
+            <a:r>
+              <a:rPr lang="en-US" dirty="0"/>
+              <a:t/>
+            </a:r>
+            <a:endParaRPr lang="en-US" dirty="0"/>
+          </a:p>
+        </p:txBody>
+      </p:sp>
+      <p:sp>
+        <p:nvSpPr>
+          <p:cNvPr id="4" name="Slide Number Placeholder 3"/>
+          <p:cNvSpPr>
+            <a:spLocks noGrp="1"/>
+          </p:cNvSpPr>
+          <p:nvPr>
+            <p:ph type="sldNum" sz="quarter" idx="10"/>
+          </p:nvPr>
+        </p:nvSpPr>
+        <p:spPr/>
+        <p:txBody>
+          <a:bodyPr/>
+          <a:lstStyle/>
+          <a:p>
+            <a:fld id="{F7021451-1387-4CA6-816F-3879F97B5CBC}" type="slidenum">
+              <a:rPr lang="en-US"/>
+              <a:t>15</a:t>
+            </a:fld>
+            <a:endParaRPr lang="en-US"/>
+          </a:p>
+        </p:txBody>
+      </p:sp>
+    </p:spTree>
+    <p:extLst>
+      <p:ext uri="{BB962C8B-B14F-4D97-AF65-F5344CB8AC3E}">
+        <p14:creationId xmlns:p14="http://schemas.microsoft.com/office/powerpoint/2010/main" val="1024086991"/>
+      </p:ext>
+    </p:extLst>
+  </p:cSld>
+  <p:clrMapOvr>
+    <a:masterClrMapping/>
+  </p:clrMapOvr>
+</p:notes>
+</file>
+
+<file path=ppt/notesSlides/notesSlide16.xml><?xml version="1.0" encoding="utf-8"?>
+<p:notes xmlns:a="http://schemas.openxmlformats.org/drawingml/2006/main" xmlns:r="http://schemas.openxmlformats.org/officeDocument/2006/relationships" xmlns:p="http://schemas.openxmlformats.org/presentationml/2006/main">
+  <p:cSld>
+    <p:spTree>
+      <p:nvGrpSpPr>
+        <p:cNvPr id="1" name=""/>
+        <p:cNvGrpSpPr/>
+        <p:nvPr/>
+      </p:nvGrpSpPr>
+      <p:grpSpPr>
+        <a:xfrm>
+          <a:off x="0" y="0"/>
+          <a:ext cx="0" cy="0"/>
+          <a:chOff x="0" y="0"/>
+          <a:chExt cx="0" cy="0"/>
+        </a:xfrm>
+      </p:grpSpPr>
+      <p:sp>
+        <p:nvSpPr>
+          <p:cNvPr id="2" name="Slide Image Placeholder 1"/>
+          <p:cNvSpPr>
+            <a:spLocks noGrp="1" noRot="1" noChangeAspect="1"/>
+          </p:cNvSpPr>
+          <p:nvPr>
+            <p:ph type="sldImg"/>
+          </p:nvPr>
+        </p:nvSpPr>
+        <p:spPr/>
+      </p:sp>
+      <p:sp>
+        <p:nvSpPr>
+          <p:cNvPr id="3" name="Notes Placeholder 2"/>
+          <p:cNvSpPr>
+            <a:spLocks noGrp="1"/>
+          </p:cNvSpPr>
+          <p:nvPr>
+            <p:ph type="body" idx="1"/>
+          </p:nvPr>
+        </p:nvSpPr>
+        <p:spPr/>
+        <p:txBody>
+          <a:bodyPr/>
+          <a:lstStyle/>
+          <a:p>
+            <a:r>
+              <a:rPr lang="en-US" dirty="0"/>
+              <a:t/>
+            </a:r>
+            <a:endParaRPr lang="en-US" dirty="0"/>
+          </a:p>
+        </p:txBody>
+      </p:sp>
+      <p:sp>
+        <p:nvSpPr>
+          <p:cNvPr id="4" name="Slide Number Placeholder 3"/>
+          <p:cNvSpPr>
+            <a:spLocks noGrp="1"/>
+          </p:cNvSpPr>
+          <p:nvPr>
+            <p:ph type="sldNum" sz="quarter" idx="10"/>
+          </p:nvPr>
+        </p:nvSpPr>
+        <p:spPr/>
+        <p:txBody>
+          <a:bodyPr/>
+          <a:lstStyle/>
+          <a:p>
+            <a:fld id="{F7021451-1387-4CA6-816F-3879F97B5CBC}" type="slidenum">
+              <a:rPr lang="en-US"/>
+              <a:t>16</a:t>
+            </a:fld>
+            <a:endParaRPr lang="en-US"/>
+          </a:p>
+        </p:txBody>
+      </p:sp>
+    </p:spTree>
+    <p:extLst>
+      <p:ext uri="{BB962C8B-B14F-4D97-AF65-F5344CB8AC3E}">
+        <p14:creationId xmlns:p14="http://schemas.microsoft.com/office/powerpoint/2010/main" val="1024086991"/>
+      </p:ext>
+    </p:extLst>
+  </p:cSld>
+  <p:clrMapOvr>
+    <a:masterClrMapping/>
+  </p:clrMapOvr>
+</p:notes>
+</file>
+
+<file path=ppt/notesSlides/notesSlide17.xml><?xml version="1.0" encoding="utf-8"?>
+<p:notes xmlns:a="http://schemas.openxmlformats.org/drawingml/2006/main" xmlns:r="http://schemas.openxmlformats.org/officeDocument/2006/relationships" xmlns:p="http://schemas.openxmlformats.org/presentationml/2006/main">
+  <p:cSld>
+    <p:spTree>
+      <p:nvGrpSpPr>
+        <p:cNvPr id="1" name=""/>
+        <p:cNvGrpSpPr/>
+        <p:nvPr/>
+      </p:nvGrpSpPr>
+      <p:grpSpPr>
+        <a:xfrm>
+          <a:off x="0" y="0"/>
+          <a:ext cx="0" cy="0"/>
+          <a:chOff x="0" y="0"/>
+          <a:chExt cx="0" cy="0"/>
+        </a:xfrm>
+      </p:grpSpPr>
+      <p:sp>
+        <p:nvSpPr>
+          <p:cNvPr id="2" name="Slide Image Placeholder 1"/>
+          <p:cNvSpPr>
+            <a:spLocks noGrp="1" noRot="1" noChangeAspect="1"/>
+          </p:cNvSpPr>
+          <p:nvPr>
+            <p:ph type="sldImg"/>
+          </p:nvPr>
+        </p:nvSpPr>
+        <p:spPr/>
+      </p:sp>
+      <p:sp>
+        <p:nvSpPr>
+          <p:cNvPr id="3" name="Notes Placeholder 2"/>
+          <p:cNvSpPr>
+            <a:spLocks noGrp="1"/>
+          </p:cNvSpPr>
+          <p:nvPr>
+            <p:ph type="body" idx="1"/>
+          </p:nvPr>
+        </p:nvSpPr>
+        <p:spPr/>
+        <p:txBody>
+          <a:bodyPr/>
+          <a:lstStyle/>
+          <a:p>
+            <a:r>
+              <a:rPr lang="en-US" dirty="0"/>
+              <a:t/>
+            </a:r>
+            <a:endParaRPr lang="en-US" dirty="0"/>
+          </a:p>
+        </p:txBody>
+      </p:sp>
+      <p:sp>
+        <p:nvSpPr>
+          <p:cNvPr id="4" name="Slide Number Placeholder 3"/>
+          <p:cNvSpPr>
+            <a:spLocks noGrp="1"/>
+          </p:cNvSpPr>
+          <p:nvPr>
+            <p:ph type="sldNum" sz="quarter" idx="10"/>
+          </p:nvPr>
+        </p:nvSpPr>
+        <p:spPr/>
+        <p:txBody>
+          <a:bodyPr/>
+          <a:lstStyle/>
+          <a:p>
+            <a:fld id="{F7021451-1387-4CA6-816F-3879F97B5CBC}" type="slidenum">
+              <a:rPr lang="en-US"/>
+              <a:t>17</a:t>
+            </a:fld>
+            <a:endParaRPr lang="en-US"/>
+          </a:p>
+        </p:txBody>
+      </p:sp>
+    </p:spTree>
+    <p:extLst>
+      <p:ext uri="{BB962C8B-B14F-4D97-AF65-F5344CB8AC3E}">
+        <p14:creationId xmlns:p14="http://schemas.microsoft.com/office/powerpoint/2010/main" val="1024086991"/>
+      </p:ext>
+    </p:extLst>
+  </p:cSld>
+  <p:clrMapOvr>
+    <a:masterClrMapping/>
+  </p:clrMapOvr>
+</p:notes>
+</file>
+
+<file path=ppt/notesSlides/notesSlide18.xml><?xml version="1.0" encoding="utf-8"?>
+<p:notes xmlns:a="http://schemas.openxmlformats.org/drawingml/2006/main" xmlns:r="http://schemas.openxmlformats.org/officeDocument/2006/relationships" xmlns:p="http://schemas.openxmlformats.org/presentationml/2006/main">
+  <p:cSld>
+    <p:spTree>
+      <p:nvGrpSpPr>
+        <p:cNvPr id="1" name=""/>
+        <p:cNvGrpSpPr/>
+        <p:nvPr/>
+      </p:nvGrpSpPr>
+      <p:grpSpPr>
+        <a:xfrm>
+          <a:off x="0" y="0"/>
+          <a:ext cx="0" cy="0"/>
+          <a:chOff x="0" y="0"/>
+          <a:chExt cx="0" cy="0"/>
+        </a:xfrm>
+      </p:grpSpPr>
+      <p:sp>
+        <p:nvSpPr>
+          <p:cNvPr id="2" name="Slide Image Placeholder 1"/>
+          <p:cNvSpPr>
+            <a:spLocks noGrp="1" noRot="1" noChangeAspect="1"/>
+          </p:cNvSpPr>
+          <p:nvPr>
+            <p:ph type="sldImg"/>
+          </p:nvPr>
+        </p:nvSpPr>
+        <p:spPr/>
+      </p:sp>
+      <p:sp>
+        <p:nvSpPr>
+          <p:cNvPr id="3" name="Notes Placeholder 2"/>
+          <p:cNvSpPr>
+            <a:spLocks noGrp="1"/>
+          </p:cNvSpPr>
+          <p:nvPr>
+            <p:ph type="body" idx="1"/>
+          </p:nvPr>
+        </p:nvSpPr>
+        <p:spPr/>
+        <p:txBody>
+          <a:bodyPr/>
+          <a:lstStyle/>
+          <a:p>
+            <a:r>
+              <a:rPr lang="en-US" dirty="0"/>
+              <a:t/>
+            </a:r>
+            <a:endParaRPr lang="en-US" dirty="0"/>
+          </a:p>
+        </p:txBody>
+      </p:sp>
+      <p:sp>
+        <p:nvSpPr>
+          <p:cNvPr id="4" name="Slide Number Placeholder 3"/>
+          <p:cNvSpPr>
+            <a:spLocks noGrp="1"/>
+          </p:cNvSpPr>
+          <p:nvPr>
+            <p:ph type="sldNum" sz="quarter" idx="10"/>
+          </p:nvPr>
+        </p:nvSpPr>
+        <p:spPr/>
+        <p:txBody>
+          <a:bodyPr/>
+          <a:lstStyle/>
+          <a:p>
+            <a:fld id="{F7021451-1387-4CA6-816F-3879F97B5CBC}" type="slidenum">
+              <a:rPr lang="en-US"/>
+              <a:t>18</a:t>
+            </a:fld>
+            <a:endParaRPr lang="en-US"/>
+          </a:p>
+        </p:txBody>
+      </p:sp>
+    </p:spTree>
+    <p:extLst>
+      <p:ext uri="{BB962C8B-B14F-4D97-AF65-F5344CB8AC3E}">
+        <p14:creationId xmlns:p14="http://schemas.microsoft.com/office/powerpoint/2010/main" val="1024086991"/>
+      </p:ext>
+    </p:extLst>
+  </p:cSld>
+  <p:clrMapOvr>
+    <a:masterClrMapping/>
+  </p:clrMapOvr>
+</p:notes>
+</file>
+
+<file path=ppt/notesSlides/notesSlide19.xml><?xml version="1.0" encoding="utf-8"?>
+<p:notes xmlns:a="http://schemas.openxmlformats.org/drawingml/2006/main" xmlns:r="http://schemas.openxmlformats.org/officeDocument/2006/relationships" xmlns:p="http://schemas.openxmlformats.org/presentationml/2006/main">
+  <p:cSld>
+    <p:spTree>
+      <p:nvGrpSpPr>
+        <p:cNvPr id="1" name=""/>
+        <p:cNvGrpSpPr/>
+        <p:nvPr/>
+      </p:nvGrpSpPr>
+      <p:grpSpPr>
+        <a:xfrm>
+          <a:off x="0" y="0"/>
+          <a:ext cx="0" cy="0"/>
+          <a:chOff x="0" y="0"/>
+          <a:chExt cx="0" cy="0"/>
+        </a:xfrm>
+      </p:grpSpPr>
+      <p:sp>
+        <p:nvSpPr>
+          <p:cNvPr id="2" name="Slide Image Placeholder 1"/>
+          <p:cNvSpPr>
+            <a:spLocks noGrp="1" noRot="1" noChangeAspect="1"/>
+          </p:cNvSpPr>
+          <p:nvPr>
+            <p:ph type="sldImg"/>
+          </p:nvPr>
+        </p:nvSpPr>
+        <p:spPr/>
+      </p:sp>
+      <p:sp>
+        <p:nvSpPr>
+          <p:cNvPr id="3" name="Notes Placeholder 2"/>
+          <p:cNvSpPr>
+            <a:spLocks noGrp="1"/>
+          </p:cNvSpPr>
+          <p:nvPr>
+            <p:ph type="body" idx="1"/>
+          </p:nvPr>
+        </p:nvSpPr>
+        <p:spPr/>
+        <p:txBody>
+          <a:bodyPr/>
+          <a:lstStyle/>
+          <a:p>
+            <a:r>
+              <a:rPr lang="en-US" dirty="0"/>
+              <a:t/>
+            </a:r>
+            <a:endParaRPr lang="en-US" dirty="0"/>
+          </a:p>
+        </p:txBody>
+      </p:sp>
+      <p:sp>
+        <p:nvSpPr>
+          <p:cNvPr id="4" name="Slide Number Placeholder 3"/>
+          <p:cNvSpPr>
+            <a:spLocks noGrp="1"/>
+          </p:cNvSpPr>
+          <p:nvPr>
+            <p:ph type="sldNum" sz="quarter" idx="10"/>
+          </p:nvPr>
+        </p:nvSpPr>
+        <p:spPr/>
+        <p:txBody>
+          <a:bodyPr/>
+          <a:lstStyle/>
+          <a:p>
+            <a:fld id="{F7021451-1387-4CA6-816F-3879F97B5CBC}" type="slidenum">
+              <a:rPr lang="en-US"/>
+              <a:t>19</a:t>
+            </a:fld>
+            <a:endParaRPr lang="en-US"/>
+          </a:p>
+        </p:txBody>
+      </p:sp>
+    </p:spTree>
+    <p:extLst>
+      <p:ext uri="{BB962C8B-B14F-4D97-AF65-F5344CB8AC3E}">
+        <p14:creationId xmlns:p14="http://schemas.microsoft.com/office/powerpoint/2010/main" val="1024086991"/>
+      </p:ext>
+    </p:extLst>
+  </p:cSld>
+  <p:clrMapOvr>
+    <a:masterClrMapping/>
+  </p:clrMapOvr>
+</p:notes>
+</file>
+
 <file path=ppt/notesSlides/notesSlide2.xml><?xml version="1.0" encoding="utf-8"?>
 <p:notes xmlns:a="http://schemas.openxmlformats.org/drawingml/2006/main" xmlns:r="http://schemas.openxmlformats.org/officeDocument/2006/relationships" xmlns:p="http://schemas.openxmlformats.org/presentationml/2006/main">
   <p:cSld>
@@ -800,6 +1513,94 @@
             <a:fld id="{F7021451-1387-4CA6-816F-3879F97B5CBC}" type="slidenum">
               <a:rPr lang="en-US"/>
               <a:t>2</a:t>
+            </a:fld>
+            <a:endParaRPr lang="en-US"/>
+          </a:p>
+        </p:txBody>
+      </p:sp>
+    </p:spTree>
+    <p:extLst>
+      <p:ext uri="{BB962C8B-B14F-4D97-AF65-F5344CB8AC3E}">
+        <p14:creationId xmlns:p14="http://schemas.microsoft.com/office/powerpoint/2010/main" val="1024086991"/>
+      </p:ext>
+    </p:extLst>
+  </p:cSld>
+  <p:clrMapOvr>
+    <a:masterClrMapping/>
+  </p:clrMapOvr>
+</p:notes>
+</file>
+
+<file path=ppt/notesSlides/notesSlide20.xml><?xml version="1.0" encoding="utf-8"?>
+<p:notes xmlns:a="http://schemas.openxmlformats.org/drawingml/2006/main" xmlns:r="http://schemas.openxmlformats.org/officeDocument/2006/relationships" xmlns:p="http://schemas.openxmlformats.org/presentationml/2006/main">
+  <p:cSld>
+    <p:spTree>
+      <p:nvGrpSpPr>
+        <p:cNvPr id="1" name=""/>
+        <p:cNvGrpSpPr/>
+        <p:nvPr/>
+      </p:nvGrpSpPr>
+      <p:grpSpPr>
+        <a:xfrm>
+          <a:off x="0" y="0"/>
+          <a:ext cx="0" cy="0"/>
+          <a:chOff x="0" y="0"/>
+          <a:chExt cx="0" cy="0"/>
+        </a:xfrm>
+      </p:grpSpPr>
+      <p:sp>
+        <p:nvSpPr>
+          <p:cNvPr id="2" name="Slide Image Placeholder 1"/>
+          <p:cNvSpPr>
+            <a:spLocks noGrp="1" noRot="1" noChangeAspect="1"/>
+          </p:cNvSpPr>
+          <p:nvPr>
+            <p:ph type="sldImg"/>
+          </p:nvPr>
+        </p:nvSpPr>
+        <p:spPr/>
+      </p:sp>
+      <p:sp>
+        <p:nvSpPr>
+          <p:cNvPr id="3" name="Notes Placeholder 2"/>
+          <p:cNvSpPr>
+            <a:spLocks noGrp="1"/>
+          </p:cNvSpPr>
+          <p:nvPr>
+            <p:ph type="body" idx="1"/>
+          </p:nvPr>
+        </p:nvSpPr>
+        <p:spPr/>
+        <p:txBody>
+          <a:bodyPr/>
+          <a:lstStyle/>
+          <a:p>
+            <a:r>
+              <a:rPr lang="en-US" dirty="0"/>
+              <a:t/>
+            </a:r>
+            <a:endParaRPr lang="en-US" dirty="0"/>
+          </a:p>
+        </p:txBody>
+      </p:sp>
+      <p:sp>
+        <p:nvSpPr>
+          <p:cNvPr id="4" name="Slide Number Placeholder 3"/>
+          <p:cNvSpPr>
+            <a:spLocks noGrp="1"/>
+          </p:cNvSpPr>
+          <p:nvPr>
+            <p:ph type="sldNum" sz="quarter" idx="10"/>
+          </p:nvPr>
+        </p:nvSpPr>
+        <p:spPr/>
+        <p:txBody>
+          <a:bodyPr/>
+          <a:lstStyle/>
+          <a:p>
+            <a:fld id="{F7021451-1387-4CA6-816F-3879F97B5CBC}" type="slidenum">
+              <a:rPr lang="en-US"/>
+              <a:t>20</a:t>
             </a:fld>
             <a:endParaRPr lang="en-US"/>
           </a:p>
@@ -2011,102 +2812,6 @@
         </p:nvSpPr>
         <p:spPr>
           <a:xfrm>
-            <a:off x="406301" y="1223963"/>
-            <a:ext cx="8498026" cy="274290"/>
-          </a:xfrm>
-          <a:prstGeom prst="rect">
-            <a:avLst/>
-          </a:prstGeom>
-          <a:noFill/>
-          <a:ln/>
-        </p:spPr>
-        <p:txBody>
-          <a:bodyPr wrap="square" lIns="0" tIns="0" rIns="0" bIns="0" rtlCol="0" anchor="t"/>
-          <a:lstStyle/>
-          <a:p>
-            <a:pPr algn="l" indent="0" marL="0">
-              <a:lnSpc>
-                <a:spcPts val="2160"/>
-              </a:lnSpc>
-              <a:spcBef>
-                <a:spcPts val="600"/>
-              </a:spcBef>
-              <a:spcAft>
-                <a:spcPts val="800"/>
-              </a:spcAft>
-              <a:buNone/>
-            </a:pPr>
-            <a:r>
-              <a:rPr lang="en-US" sz="1800" b="1" dirty="0">
-                <a:solidFill>
-                  <a:srgbClr val="FE4447"/>
-                </a:solidFill>
-                <a:latin typeface="Georgia" pitchFamily="34" charset="0"/>
-                <a:ea typeface="Georgia" pitchFamily="34" charset="-122"/>
-                <a:cs typeface="Georgia" pitchFamily="34" charset="-120"/>
-              </a:rPr>
-              <a:t>Learning objective</a:t>
-            </a:r>
-            <a:endParaRPr lang="en-US" sz="1800" dirty="0"/>
-          </a:p>
-        </p:txBody>
-      </p:sp>
-      <p:sp>
-        <p:nvSpPr>
-          <p:cNvPr id="6" name="Text 4"/>
-          <p:cNvSpPr/>
-          <p:nvPr/>
-        </p:nvSpPr>
-        <p:spPr>
-          <a:xfrm>
-            <a:off x="406301" y="1637854"/>
-            <a:ext cx="8498026" cy="426541"/>
-          </a:xfrm>
-          <a:prstGeom prst="rect">
-            <a:avLst/>
-          </a:prstGeom>
-          <a:noFill/>
-          <a:ln/>
-        </p:spPr>
-        <p:txBody>
-          <a:bodyPr wrap="square" lIns="0" tIns="0" rIns="0" bIns="0" rtlCol="0" anchor="t"/>
-          <a:lstStyle/>
-          <a:p>
-            <a:pPr algn="l" indent="0" marL="0">
-              <a:lnSpc>
-                <a:spcPts val="1680"/>
-              </a:lnSpc>
-              <a:spcBef>
-                <a:spcPts val="300"/>
-              </a:spcBef>
-              <a:spcAft>
-                <a:spcPts val="300"/>
-              </a:spcAft>
-              <a:buNone/>
-            </a:pPr>
-            <a:r>
-              <a:rPr lang="en-US" sz="1200" dirty="0">
-                <a:solidFill>
-                  <a:srgbClr val="1C2833"/>
-                </a:solidFill>
-                <a:latin typeface="Arial" pitchFamily="34" charset="0"/>
-                <a:ea typeface="Arial" pitchFamily="34" charset="-122"/>
-                <a:cs typeface="Arial" pitchFamily="34" charset="-120"/>
-              </a:rPr>
-              <a:t>By the end of this lesson, students will explain that Earth's ~23.5° axial tilt — not its distance from the Sun — is what causes the seasons, and demonstrate this with a torch-and-globe model.</a:t>
-            </a:r>
-            <a:endParaRPr lang="en-US" sz="1200" dirty="0"/>
-          </a:p>
-        </p:txBody>
-      </p:sp>
-      <p:sp>
-        <p:nvSpPr>
-          <p:cNvPr id="7" name="Text 5"/>
-          <p:cNvSpPr/>
-          <p:nvPr/>
-        </p:nvSpPr>
-        <p:spPr>
-          <a:xfrm>
             <a:off x="406301" y="4434929"/>
             <a:ext cx="8498026" cy="213271"/>
           </a:xfrm>
@@ -2251,7 +2956,7 @@
                 <a:ea typeface="Georgia" pitchFamily="34" charset="-122"/>
                 <a:cs typeface="Georgia" pitchFamily="34" charset="-120"/>
               </a:rPr>
-              <a:t>Teacher notes</a:t>
+              <a:t>Core (20 min) (cont.)</a:t>
             </a:r>
             <a:endParaRPr lang="en-US" sz="1800" dirty="0"/>
           </a:p>
@@ -2265,8 +2970,8 @@
         </p:nvSpPr>
         <p:spPr>
           <a:xfrm>
-            <a:off x="406301" y="870942"/>
-            <a:ext cx="8498026" cy="1279624"/>
+            <a:off x="634901" y="883593"/>
+            <a:ext cx="8102798" cy="281880"/>
           </a:xfrm>
           <a:prstGeom prst="rect">
             <a:avLst/>
@@ -2278,17 +2983,61 @@
           <a:bodyPr wrap="square" lIns="0" tIns="0" rIns="0" bIns="0" rtlCol="0" anchor="t"/>
           <a:lstStyle/>
           <a:p>
-            <a:pPr algn="l" indent="0" marL="0">
-              <a:lnSpc>
-                <a:spcPts val="1680"/>
-              </a:lnSpc>
-              <a:spcBef>
-                <a:spcPts val="300"/>
-              </a:spcBef>
-              <a:spcAft>
-                <a:spcPts val="300"/>
-              </a:spcAft>
-              <a:buNone/>
+            <a:pPr algn="l" marL="342900" indent="-342900">
+              <a:lnSpc>
+                <a:spcPts val="1620"/>
+              </a:lnSpc>
+              <a:spcAft>
+                <a:spcPts val="300"/>
+              </a:spcAft>
+              <a:buSzPct val="100000"/>
+              <a:buChar char="•"/>
+            </a:pPr>
+            <a:r>
+              <a:rPr lang="en-US" sz="1200" b="1" dirty="0">
+                <a:solidFill>
+                  <a:srgbClr val="1C2833"/>
+                </a:solidFill>
+                <a:latin typeface="Arial" pitchFamily="34" charset="0"/>
+                <a:ea typeface="Arial" pitchFamily="34" charset="-122"/>
+                <a:cs typeface="Arial" pitchFamily="34" charset="-120"/>
+              </a:rPr>
+              <a:t>What students should see:</a:t>
+            </a:r>
+            <a:endParaRPr lang="en-US" sz="1200" dirty="0"/>
+          </a:p>
+        </p:txBody>
+      </p:sp>
+      <p:sp>
+        <p:nvSpPr>
+          <p:cNvPr id="5" name="Text 3"/>
+          <p:cNvSpPr/>
+          <p:nvPr/>
+        </p:nvSpPr>
+        <p:spPr>
+          <a:xfrm>
+            <a:off x="634901" y="1266974"/>
+            <a:ext cx="8102798" cy="937022"/>
+          </a:xfrm>
+          <a:prstGeom prst="rect">
+            <a:avLst/>
+          </a:prstGeom>
+          <a:noFill/>
+          <a:ln/>
+        </p:spPr>
+        <p:txBody>
+          <a:bodyPr wrap="square" lIns="0" tIns="0" rIns="0" bIns="0" rtlCol="0" anchor="t"/>
+          <a:lstStyle/>
+          <a:p>
+            <a:pPr algn="l" marL="342900" indent="-342900">
+              <a:lnSpc>
+                <a:spcPts val="1620"/>
+              </a:lnSpc>
+              <a:spcAft>
+                <a:spcPts val="300"/>
+              </a:spcAft>
+              <a:buSzPct val="100000"/>
+              <a:buChar char="•"/>
             </a:pPr>
             <a:r>
               <a:rPr lang="en-US" sz="1200" dirty="0">
@@ -2299,42 +3048,20 @@
                 <a:ea typeface="Arial" pitchFamily="34" charset="-122"/>
                 <a:cs typeface="Arial" pitchFamily="34" charset="-120"/>
               </a:rPr>
-              <a:t>– The "Earth closer to Sun = summer" misconception is </a:t>
-            </a:r>
-            <a:pPr algn="l" indent="0" marL="0">
-              <a:lnSpc>
-                <a:spcPts val="1680"/>
-              </a:lnSpc>
-              <a:spcBef>
-                <a:spcPts val="300"/>
-              </a:spcBef>
-              <a:spcAft>
-                <a:spcPts val="300"/>
-              </a:spcAft>
-              <a:buNone/>
-            </a:pPr>
-            <a:r>
-              <a:rPr lang="en-US" sz="1200" i="1" dirty="0">
-                <a:solidFill>
-                  <a:srgbClr val="1C2833"/>
-                </a:solidFill>
-                <a:latin typeface="Arial" pitchFamily="34" charset="0"/>
-                <a:ea typeface="Arial" pitchFamily="34" charset="-122"/>
-                <a:cs typeface="Arial" pitchFamily="34" charset="-120"/>
-              </a:rPr>
-              <a:t>very</a:t>
-            </a:r>
-            <a:pPr algn="l" indent="0" marL="0">
-              <a:lnSpc>
-                <a:spcPts val="1680"/>
-              </a:lnSpc>
-              <a:spcBef>
-                <a:spcPts val="300"/>
-              </a:spcBef>
-              <a:spcAft>
-                <a:spcPts val="300"/>
-              </a:spcAft>
-              <a:buNone/>
+              <a:t>When N is tilted toward the torch: the upper half of the globe is brightly lit, and the lit region extends past the N pole. India is well-lit and the Sun is high in the sky. → Summer.</a:t>
+            </a:r>
+            <a:endParaRPr lang="en-US" sz="1200" dirty="0"/>
+          </a:p>
+          <a:p>
+            <a:pPr algn="l" marL="342900" indent="-342900">
+              <a:lnSpc>
+                <a:spcPts val="1620"/>
+              </a:lnSpc>
+              <a:spcAft>
+                <a:spcPts val="300"/>
+              </a:spcAft>
+              <a:buSzPct val="100000"/>
+              <a:buChar char="•"/>
             </a:pPr>
             <a:r>
               <a:rPr lang="en-US" sz="1200" dirty="0">
@@ -2345,53 +3072,7 @@
                 <a:ea typeface="Arial" pitchFamily="34" charset="-122"/>
                 <a:cs typeface="Arial" pitchFamily="34" charset="-120"/>
               </a:rPr>
-              <a:t> persistent. Highlight that India's June is summer despite Earth being farthest from the Sun in July. The misconception breaks instantly when this is named. – Some students will ask: </a:t>
-            </a:r>
-            <a:pPr algn="l" indent="0" marL="0">
-              <a:lnSpc>
-                <a:spcPts val="1680"/>
-              </a:lnSpc>
-              <a:spcBef>
-                <a:spcPts val="300"/>
-              </a:spcBef>
-              <a:spcAft>
-                <a:spcPts val="300"/>
-              </a:spcAft>
-              <a:buNone/>
-            </a:pPr>
-            <a:r>
-              <a:rPr lang="en-US" sz="1200" i="1" dirty="0">
-                <a:solidFill>
-                  <a:srgbClr val="1C2833"/>
-                </a:solidFill>
-                <a:latin typeface="Arial" pitchFamily="34" charset="0"/>
-                <a:ea typeface="Arial" pitchFamily="34" charset="-122"/>
-                <a:cs typeface="Arial" pitchFamily="34" charset="-120"/>
-              </a:rPr>
-              <a:t>"Then why is India summer in June and not in winter like Australia?"</a:t>
-            </a:r>
-            <a:pPr algn="l" indent="0" marL="0">
-              <a:lnSpc>
-                <a:spcPts val="1680"/>
-              </a:lnSpc>
-              <a:spcBef>
-                <a:spcPts val="300"/>
-              </a:spcBef>
-              <a:spcAft>
-                <a:spcPts val="300"/>
-              </a:spcAft>
-              <a:buNone/>
-            </a:pPr>
-            <a:r>
-              <a:rPr lang="en-US" sz="1200" dirty="0">
-                <a:solidFill>
-                  <a:srgbClr val="1C2833"/>
-                </a:solidFill>
-                <a:latin typeface="Arial" pitchFamily="34" charset="0"/>
-                <a:ea typeface="Arial" pitchFamily="34" charset="-122"/>
-                <a:cs typeface="Arial" pitchFamily="34" charset="-120"/>
-              </a:rPr>
-              <a:t> — Yes, India is in the Northern Hemisphere; Australia is in the Southern. Same Earth tilt, opposite seasons. (Australia is wearing shorts in December, jumpers in June.) – The demo will fail visually if the room is too bright. If you can't darken the room, use a smaller globe and bring the torch closer (3–4 cm from the globe surface).</a:t>
+              <a:t>When N is tilted away: the upper half is poorly lit, the lit region falls short of the N pole. India is lit at a shallow angle. → Winter.</a:t>
             </a:r>
             <a:endParaRPr lang="en-US" sz="1200" dirty="0"/>
           </a:p>
@@ -2399,7 +3080,7 @@
       </p:sp>
       <p:sp>
         <p:nvSpPr>
-          <p:cNvPr id="5" name="Text 3"/>
+          <p:cNvPr id="6" name="Text 4"/>
           <p:cNvSpPr/>
           <p:nvPr/>
         </p:nvSpPr>
@@ -2549,7 +3230,7 @@
                 <a:ea typeface="Georgia" pitchFamily="34" charset="-122"/>
                 <a:cs typeface="Georgia" pitchFamily="34" charset="-120"/>
               </a:rPr>
-              <a:t>Citation(s) used in this lesson</a:t>
+              <a:t>Core (20 min) (cont.)</a:t>
             </a:r>
             <a:endParaRPr lang="en-US" sz="1800" dirty="0"/>
           </a:p>
@@ -2563,8 +3244,8 @@
         </p:nvSpPr>
         <p:spPr>
           <a:xfrm>
-            <a:off x="406301" y="870942"/>
-            <a:ext cx="8498026" cy="426541"/>
+            <a:off x="634901" y="883593"/>
+            <a:ext cx="8102798" cy="281880"/>
           </a:xfrm>
           <a:prstGeom prst="rect">
             <a:avLst/>
@@ -2576,6 +3257,202 @@
           <a:bodyPr wrap="square" lIns="0" tIns="0" rIns="0" bIns="0" rtlCol="0" anchor="t"/>
           <a:lstStyle/>
           <a:p>
+            <a:pPr algn="l" marL="342900" indent="-342900">
+              <a:lnSpc>
+                <a:spcPts val="1620"/>
+              </a:lnSpc>
+              <a:spcAft>
+                <a:spcPts val="300"/>
+              </a:spcAft>
+              <a:buSzPct val="100000"/>
+              <a:buChar char="•"/>
+            </a:pPr>
+            <a:r>
+              <a:rPr lang="en-US" sz="1200" b="1" dirty="0">
+                <a:solidFill>
+                  <a:srgbClr val="1C2833"/>
+                </a:solidFill>
+                <a:latin typeface="Arial" pitchFamily="34" charset="0"/>
+                <a:ea typeface="Arial" pitchFamily="34" charset="-122"/>
+                <a:cs typeface="Arial" pitchFamily="34" charset="-120"/>
+              </a:rPr>
+              <a:t>Two things the tilt does:</a:t>
+            </a:r>
+            <a:endParaRPr lang="en-US" sz="1200" dirty="0"/>
+          </a:p>
+        </p:txBody>
+      </p:sp>
+      <p:sp>
+        <p:nvSpPr>
+          <p:cNvPr id="5" name="Text 3"/>
+          <p:cNvSpPr/>
+          <p:nvPr/>
+        </p:nvSpPr>
+        <p:spPr>
+          <a:xfrm>
+            <a:off x="634901" y="1266974"/>
+            <a:ext cx="8102798" cy="937022"/>
+          </a:xfrm>
+          <a:prstGeom prst="rect">
+            <a:avLst/>
+          </a:prstGeom>
+          <a:noFill/>
+          <a:ln/>
+        </p:spPr>
+        <p:txBody>
+          <a:bodyPr wrap="square" lIns="0" tIns="0" rIns="0" bIns="0" rtlCol="0" anchor="t"/>
+          <a:lstStyle/>
+          <a:p>
+            <a:pPr algn="l" marL="342900" indent="-342900">
+              <a:lnSpc>
+                <a:spcPts val="1620"/>
+              </a:lnSpc>
+              <a:spcAft>
+                <a:spcPts val="300"/>
+              </a:spcAft>
+              <a:buSzPct val="100000"/>
+              <a:buChar char="•"/>
+            </a:pPr>
+            <a:r>
+              <a:rPr lang="en-US" sz="1200" b="1" dirty="0">
+                <a:solidFill>
+                  <a:srgbClr val="1C2833"/>
+                </a:solidFill>
+                <a:latin typeface="Arial" pitchFamily="34" charset="0"/>
+                <a:ea typeface="Arial" pitchFamily="34" charset="-122"/>
+                <a:cs typeface="Arial" pitchFamily="34" charset="-120"/>
+              </a:rPr>
+              <a:t>Day length</a:t>
+            </a:r>
+            <a:pPr algn="l" indent="0" marL="0">
+              <a:lnSpc>
+                <a:spcPts val="1620"/>
+              </a:lnSpc>
+              <a:spcAft>
+                <a:spcPts val="300"/>
+              </a:spcAft>
+              <a:buNone/>
+            </a:pPr>
+            <a:r>
+              <a:rPr lang="en-US" sz="1200" dirty="0">
+                <a:solidFill>
+                  <a:srgbClr val="1C2833"/>
+                </a:solidFill>
+                <a:latin typeface="Arial" pitchFamily="34" charset="0"/>
+                <a:ea typeface="Arial" pitchFamily="34" charset="-122"/>
+                <a:cs typeface="Arial" pitchFamily="34" charset="-120"/>
+              </a:rPr>
+              <a:t> — when tilted toward, the daytime arc through India is </a:t>
+            </a:r>
+            <a:pPr algn="l" indent="0" marL="0">
+              <a:lnSpc>
+                <a:spcPts val="1620"/>
+              </a:lnSpc>
+              <a:spcAft>
+                <a:spcPts val="300"/>
+              </a:spcAft>
+              <a:buNone/>
+            </a:pPr>
+            <a:r>
+              <a:rPr lang="en-US" sz="1200" i="1" dirty="0">
+                <a:solidFill>
+                  <a:srgbClr val="1C2833"/>
+                </a:solidFill>
+                <a:latin typeface="Arial" pitchFamily="34" charset="0"/>
+                <a:ea typeface="Arial" pitchFamily="34" charset="-122"/>
+                <a:cs typeface="Arial" pitchFamily="34" charset="-120"/>
+              </a:rPr>
+              <a:t>longer</a:t>
+            </a:r>
+            <a:pPr algn="l" indent="0" marL="0">
+              <a:lnSpc>
+                <a:spcPts val="1620"/>
+              </a:lnSpc>
+              <a:spcAft>
+                <a:spcPts val="300"/>
+              </a:spcAft>
+              <a:buNone/>
+            </a:pPr>
+            <a:r>
+              <a:rPr lang="en-US" sz="1200" dirty="0">
+                <a:solidFill>
+                  <a:srgbClr val="1C2833"/>
+                </a:solidFill>
+                <a:latin typeface="Arial" pitchFamily="34" charset="0"/>
+                <a:ea typeface="Arial" pitchFamily="34" charset="-122"/>
+                <a:cs typeface="Arial" pitchFamily="34" charset="-120"/>
+              </a:rPr>
+              <a:t> than the night-time arc. → Longer days in summer.</a:t>
+            </a:r>
+            <a:endParaRPr lang="en-US" sz="1200" dirty="0"/>
+          </a:p>
+          <a:p>
+            <a:pPr algn="l" marL="342900" indent="-342900">
+              <a:lnSpc>
+                <a:spcPts val="1620"/>
+              </a:lnSpc>
+              <a:spcAft>
+                <a:spcPts val="300"/>
+              </a:spcAft>
+              <a:buSzPct val="100000"/>
+              <a:buChar char="•"/>
+            </a:pPr>
+            <a:r>
+              <a:rPr lang="en-US" sz="1200" b="1" dirty="0">
+                <a:solidFill>
+                  <a:srgbClr val="1C2833"/>
+                </a:solidFill>
+                <a:latin typeface="Arial" pitchFamily="34" charset="0"/>
+                <a:ea typeface="Arial" pitchFamily="34" charset="-122"/>
+                <a:cs typeface="Arial" pitchFamily="34" charset="-120"/>
+              </a:rPr>
+              <a:t>Angle of sunlight</a:t>
+            </a:r>
+            <a:pPr algn="l" indent="0" marL="0">
+              <a:lnSpc>
+                <a:spcPts val="1620"/>
+              </a:lnSpc>
+              <a:spcAft>
+                <a:spcPts val="300"/>
+              </a:spcAft>
+              <a:buNone/>
+            </a:pPr>
+            <a:r>
+              <a:rPr lang="en-US" sz="1200" dirty="0">
+                <a:solidFill>
+                  <a:srgbClr val="1C2833"/>
+                </a:solidFill>
+                <a:latin typeface="Arial" pitchFamily="34" charset="0"/>
+                <a:ea typeface="Arial" pitchFamily="34" charset="-122"/>
+                <a:cs typeface="Arial" pitchFamily="34" charset="-120"/>
+              </a:rPr>
+              <a:t> — sunlight hits a tilted surface at a steeper angle in summer (more concentrated, more heat per square metre) and a shallow angle in winter (more spread out, less heat).</a:t>
+            </a:r>
+            <a:endParaRPr lang="en-US" sz="1200" dirty="0"/>
+          </a:p>
+        </p:txBody>
+      </p:sp>
+      <p:sp>
+        <p:nvSpPr>
+          <p:cNvPr id="6" name="Text 4"/>
+          <p:cNvSpPr/>
+          <p:nvPr/>
+        </p:nvSpPr>
+        <p:spPr>
+          <a:xfrm>
+            <a:off x="406301" y="4434929"/>
+            <a:ext cx="8498026" cy="213271"/>
+          </a:xfrm>
+          <a:prstGeom prst="rect">
+            <a:avLst/>
+          </a:prstGeom>
+          <a:noFill/>
+          <a:ln/>
+        </p:spPr>
+        <p:txBody>
+          <a:bodyPr wrap="square" lIns="0" tIns="0" rIns="0" bIns="0" rtlCol="0" anchor="t"/>
+          <a:lstStyle/>
+          <a:p>
             <a:pPr algn="l" indent="0" marL="0">
               <a:lnSpc>
                 <a:spcPts val="1680"/>
@@ -2597,7 +3474,2583 @@
                 <a:ea typeface="Arial" pitchFamily="34" charset="-122"/>
                 <a:cs typeface="Arial" pitchFamily="34" charset="-120"/>
               </a:rPr>
-              <a:t>– Modern axial-tilt and orbital values from standard NCERT-level astronomy. No primary-source citation needed at this band.</a:t>
+              <a:t>Middle ·  · IKS Curriculum</a:t>
+            </a:r>
+            <a:endParaRPr lang="en-US" sz="1200" dirty="0"/>
+          </a:p>
+        </p:txBody>
+      </p:sp>
+    </p:spTree>
+  </p:cSld>
+  <p:clrMapOvr>
+    <a:masterClrMapping/>
+  </p:clrMapOvr>
+</p:sld>
+</file>
+
+<file path=ppt/slides/slide12.xml><?xml version="1.0" encoding="utf-8"?>
+<p:sld xmlns:a="http://schemas.openxmlformats.org/drawingml/2006/main" xmlns:r="http://schemas.openxmlformats.org/officeDocument/2006/relationships" xmlns:p="http://schemas.openxmlformats.org/presentationml/2006/main">
+  <p:cSld name="Slide 12">
+    <p:bg>
+      <p:bgPr>
+        <a:solidFill>
+          <a:srgbClr val="FFFFFF"/>
+        </a:solidFill>
+      </p:bgPr>
+    </p:bg>
+    <p:spTree>
+      <p:nvGrpSpPr>
+        <p:cNvPr id="1" name=""/>
+        <p:cNvGrpSpPr/>
+        <p:nvPr/>
+      </p:nvGrpSpPr>
+      <p:grpSpPr>
+        <a:xfrm>
+          <a:off x="0" y="0"/>
+          <a:ext cx="0" cy="0"/>
+          <a:chOff x="0" y="0"/>
+          <a:chExt cx="0" cy="0"/>
+        </a:xfrm>
+      </p:grpSpPr>
+      <p:sp>
+        <p:nvSpPr>
+          <p:cNvPr id="2" name="Text 0"/>
+          <p:cNvSpPr/>
+          <p:nvPr/>
+        </p:nvSpPr>
+        <p:spPr>
+          <a:xfrm>
+            <a:off x="0" y="0"/>
+            <a:ext cx="9144000" cy="101501"/>
+          </a:xfrm>
+          <a:prstGeom prst="rect">
+            <a:avLst/>
+          </a:prstGeom>
+          <a:solidFill>
+            <a:srgbClr val="277884"/>
+          </a:solidFill>
+          <a:ln/>
+        </p:spPr>
+        <p:txBody>
+          <a:bodyPr wrap="square" rtlCol="0" anchor="ctr"/>
+          <a:lstStyle/>
+          <a:p>
+            <a:pPr indent="0" marL="0">
+              <a:buNone/>
+            </a:pPr>
+            <a:endParaRPr lang="en-US" dirty="0"/>
+          </a:p>
+        </p:txBody>
+      </p:sp>
+      <p:sp>
+        <p:nvSpPr>
+          <p:cNvPr id="3" name="Text 1"/>
+          <p:cNvSpPr/>
+          <p:nvPr/>
+        </p:nvSpPr>
+        <p:spPr>
+          <a:xfrm>
+            <a:off x="406301" y="457051"/>
+            <a:ext cx="8498026" cy="274290"/>
+          </a:xfrm>
+          <a:prstGeom prst="rect">
+            <a:avLst/>
+          </a:prstGeom>
+          <a:noFill/>
+          <a:ln/>
+        </p:spPr>
+        <p:txBody>
+          <a:bodyPr wrap="square" lIns="0" tIns="0" rIns="0" bIns="0" rtlCol="0" anchor="t"/>
+          <a:lstStyle/>
+          <a:p>
+            <a:pPr algn="l" indent="0" marL="0">
+              <a:lnSpc>
+                <a:spcPts val="2160"/>
+              </a:lnSpc>
+              <a:spcBef>
+                <a:spcPts val="600"/>
+              </a:spcBef>
+              <a:spcAft>
+                <a:spcPts val="800"/>
+              </a:spcAft>
+              <a:buNone/>
+            </a:pPr>
+            <a:r>
+              <a:rPr lang="en-US" sz="1800" b="1" dirty="0">
+                <a:solidFill>
+                  <a:srgbClr val="FE4447"/>
+                </a:solidFill>
+                <a:latin typeface="Georgia" pitchFamily="34" charset="0"/>
+                <a:ea typeface="Georgia" pitchFamily="34" charset="-122"/>
+                <a:cs typeface="Georgia" pitchFamily="34" charset="-120"/>
+              </a:rPr>
+              <a:t>Core (20 min) (cont.)</a:t>
+            </a:r>
+            <a:endParaRPr lang="en-US" sz="1800" dirty="0"/>
+          </a:p>
+        </p:txBody>
+      </p:sp>
+      <p:sp>
+        <p:nvSpPr>
+          <p:cNvPr id="4" name="Text 2"/>
+          <p:cNvSpPr/>
+          <p:nvPr/>
+        </p:nvSpPr>
+        <p:spPr>
+          <a:xfrm>
+            <a:off x="634901" y="883593"/>
+            <a:ext cx="8102798" cy="693241"/>
+          </a:xfrm>
+          <a:prstGeom prst="rect">
+            <a:avLst/>
+          </a:prstGeom>
+          <a:noFill/>
+          <a:ln/>
+        </p:spPr>
+        <p:txBody>
+          <a:bodyPr wrap="square" lIns="0" tIns="0" rIns="0" bIns="0" rtlCol="0" anchor="t"/>
+          <a:lstStyle/>
+          <a:p>
+            <a:pPr algn="l" marL="342900" indent="-342900">
+              <a:lnSpc>
+                <a:spcPts val="1620"/>
+              </a:lnSpc>
+              <a:spcAft>
+                <a:spcPts val="300"/>
+              </a:spcAft>
+              <a:buSzPct val="100000"/>
+              <a:buChar char="•"/>
+            </a:pPr>
+            <a:r>
+              <a:rPr lang="en-US" sz="1200" b="1" dirty="0">
+                <a:solidFill>
+                  <a:srgbClr val="1C2833"/>
+                </a:solidFill>
+                <a:latin typeface="Arial" pitchFamily="34" charset="0"/>
+                <a:ea typeface="Arial" pitchFamily="34" charset="-122"/>
+                <a:cs typeface="Arial" pitchFamily="34" charset="-120"/>
+              </a:rPr>
+              <a:t>Why does the tilt stay fixed?</a:t>
+            </a:r>
+            <a:pPr algn="l" indent="0" marL="0">
+              <a:lnSpc>
+                <a:spcPts val="1620"/>
+              </a:lnSpc>
+              <a:spcAft>
+                <a:spcPts val="300"/>
+              </a:spcAft>
+              <a:buNone/>
+            </a:pPr>
+            <a:r>
+              <a:rPr lang="en-US" sz="1200" dirty="0">
+                <a:solidFill>
+                  <a:srgbClr val="1C2833"/>
+                </a:solidFill>
+                <a:latin typeface="Arial" pitchFamily="34" charset="0"/>
+                <a:ea typeface="Arial" pitchFamily="34" charset="-122"/>
+                <a:cs typeface="Arial" pitchFamily="34" charset="-120"/>
+              </a:rPr>
+              <a:t> Earth's rotation acts like a spinning top — it resists changes in its tilt direction. Over very long times (~25,800 years) the tilt direction wobbles in a slow circle (this is </a:t>
+            </a:r>
+            <a:pPr algn="l" indent="0" marL="0">
+              <a:lnSpc>
+                <a:spcPts val="1620"/>
+              </a:lnSpc>
+              <a:spcAft>
+                <a:spcPts val="300"/>
+              </a:spcAft>
+              <a:buNone/>
+            </a:pPr>
+            <a:r>
+              <a:rPr lang="en-US" sz="1200" b="1" dirty="0">
+                <a:solidFill>
+                  <a:srgbClr val="1C2833"/>
+                </a:solidFill>
+                <a:latin typeface="Arial" pitchFamily="34" charset="0"/>
+                <a:ea typeface="Arial" pitchFamily="34" charset="-122"/>
+                <a:cs typeface="Arial" pitchFamily="34" charset="-120"/>
+              </a:rPr>
+              <a:t>precession</a:t>
+            </a:r>
+            <a:pPr algn="l" indent="0" marL="0">
+              <a:lnSpc>
+                <a:spcPts val="1620"/>
+              </a:lnSpc>
+              <a:spcAft>
+                <a:spcPts val="300"/>
+              </a:spcAft>
+              <a:buNone/>
+            </a:pPr>
+            <a:r>
+              <a:rPr lang="en-US" sz="1200" dirty="0">
+                <a:solidFill>
+                  <a:srgbClr val="1C2833"/>
+                </a:solidFill>
+                <a:latin typeface="Arial" pitchFamily="34" charset="0"/>
+                <a:ea typeface="Arial" pitchFamily="34" charset="-122"/>
+                <a:cs typeface="Arial" pitchFamily="34" charset="-120"/>
+              </a:rPr>
+              <a:t> — Day 8 senior band; we hint at it here only as a footnote).</a:t>
+            </a:r>
+            <a:endParaRPr lang="en-US" sz="1200" dirty="0"/>
+          </a:p>
+        </p:txBody>
+      </p:sp>
+      <p:sp>
+        <p:nvSpPr>
+          <p:cNvPr id="5" name="Text 3"/>
+          <p:cNvSpPr/>
+          <p:nvPr/>
+        </p:nvSpPr>
+        <p:spPr>
+          <a:xfrm>
+            <a:off x="406301" y="4434929"/>
+            <a:ext cx="8498026" cy="213271"/>
+          </a:xfrm>
+          <a:prstGeom prst="rect">
+            <a:avLst/>
+          </a:prstGeom>
+          <a:noFill/>
+          <a:ln/>
+        </p:spPr>
+        <p:txBody>
+          <a:bodyPr wrap="square" lIns="0" tIns="0" rIns="0" bIns="0" rtlCol="0" anchor="t"/>
+          <a:lstStyle/>
+          <a:p>
+            <a:pPr algn="l" indent="0" marL="0">
+              <a:lnSpc>
+                <a:spcPts val="1680"/>
+              </a:lnSpc>
+              <a:spcBef>
+                <a:spcPts val="300"/>
+              </a:spcBef>
+              <a:spcAft>
+                <a:spcPts val="300"/>
+              </a:spcAft>
+              <a:buNone/>
+            </a:pPr>
+            <a:r>
+              <a:rPr lang="en-US" sz="1200" dirty="0">
+                <a:solidFill>
+                  <a:srgbClr val="1C2833"/>
+                </a:solidFill>
+                <a:latin typeface="Arial" pitchFamily="34" charset="0"/>
+                <a:ea typeface="Arial" pitchFamily="34" charset="-122"/>
+                <a:cs typeface="Arial" pitchFamily="34" charset="-120"/>
+              </a:rPr>
+              <a:t>Middle ·  · IKS Curriculum</a:t>
+            </a:r>
+            <a:endParaRPr lang="en-US" sz="1200" dirty="0"/>
+          </a:p>
+        </p:txBody>
+      </p:sp>
+    </p:spTree>
+  </p:cSld>
+  <p:clrMapOvr>
+    <a:masterClrMapping/>
+  </p:clrMapOvr>
+</p:sld>
+</file>
+
+<file path=ppt/slides/slide13.xml><?xml version="1.0" encoding="utf-8"?>
+<p:sld xmlns:a="http://schemas.openxmlformats.org/drawingml/2006/main" xmlns:r="http://schemas.openxmlformats.org/officeDocument/2006/relationships" xmlns:p="http://schemas.openxmlformats.org/presentationml/2006/main">
+  <p:cSld name="Slide 13">
+    <p:bg>
+      <p:bgPr>
+        <a:solidFill>
+          <a:srgbClr val="FFFFFF"/>
+        </a:solidFill>
+      </p:bgPr>
+    </p:bg>
+    <p:spTree>
+      <p:nvGrpSpPr>
+        <p:cNvPr id="1" name=""/>
+        <p:cNvGrpSpPr/>
+        <p:nvPr/>
+      </p:nvGrpSpPr>
+      <p:grpSpPr>
+        <a:xfrm>
+          <a:off x="0" y="0"/>
+          <a:ext cx="0" cy="0"/>
+          <a:chOff x="0" y="0"/>
+          <a:chExt cx="0" cy="0"/>
+        </a:xfrm>
+      </p:grpSpPr>
+      <p:sp>
+        <p:nvSpPr>
+          <p:cNvPr id="2" name="Text 0"/>
+          <p:cNvSpPr/>
+          <p:nvPr/>
+        </p:nvSpPr>
+        <p:spPr>
+          <a:xfrm>
+            <a:off x="0" y="0"/>
+            <a:ext cx="9144000" cy="101501"/>
+          </a:xfrm>
+          <a:prstGeom prst="rect">
+            <a:avLst/>
+          </a:prstGeom>
+          <a:solidFill>
+            <a:srgbClr val="277884"/>
+          </a:solidFill>
+          <a:ln/>
+        </p:spPr>
+        <p:txBody>
+          <a:bodyPr wrap="square" rtlCol="0" anchor="ctr"/>
+          <a:lstStyle/>
+          <a:p>
+            <a:pPr indent="0" marL="0">
+              <a:buNone/>
+            </a:pPr>
+            <a:endParaRPr lang="en-US" dirty="0"/>
+          </a:p>
+        </p:txBody>
+      </p:sp>
+      <p:sp>
+        <p:nvSpPr>
+          <p:cNvPr id="3" name="Text 1"/>
+          <p:cNvSpPr/>
+          <p:nvPr/>
+        </p:nvSpPr>
+        <p:spPr>
+          <a:xfrm>
+            <a:off x="406301" y="457051"/>
+            <a:ext cx="8498026" cy="274290"/>
+          </a:xfrm>
+          <a:prstGeom prst="rect">
+            <a:avLst/>
+          </a:prstGeom>
+          <a:noFill/>
+          <a:ln/>
+        </p:spPr>
+        <p:txBody>
+          <a:bodyPr wrap="square" lIns="0" tIns="0" rIns="0" bIns="0" rtlCol="0" anchor="t"/>
+          <a:lstStyle/>
+          <a:p>
+            <a:pPr algn="l" indent="0" marL="0">
+              <a:lnSpc>
+                <a:spcPts val="2160"/>
+              </a:lnSpc>
+              <a:spcBef>
+                <a:spcPts val="600"/>
+              </a:spcBef>
+              <a:spcAft>
+                <a:spcPts val="800"/>
+              </a:spcAft>
+              <a:buNone/>
+            </a:pPr>
+            <a:r>
+              <a:rPr lang="en-US" sz="1800" b="1" dirty="0">
+                <a:solidFill>
+                  <a:srgbClr val="FE4447"/>
+                </a:solidFill>
+                <a:latin typeface="Georgia" pitchFamily="34" charset="0"/>
+                <a:ea typeface="Georgia" pitchFamily="34" charset="-122"/>
+                <a:cs typeface="Georgia" pitchFamily="34" charset="-120"/>
+              </a:rPr>
+              <a:t>Activity (15 min) — Build your own tilt model</a:t>
+            </a:r>
+            <a:endParaRPr lang="en-US" sz="1800" dirty="0"/>
+          </a:p>
+        </p:txBody>
+      </p:sp>
+      <p:sp>
+        <p:nvSpPr>
+          <p:cNvPr id="4" name="Text 2"/>
+          <p:cNvSpPr/>
+          <p:nvPr/>
+        </p:nvSpPr>
+        <p:spPr>
+          <a:xfrm>
+            <a:off x="406301" y="870942"/>
+            <a:ext cx="8498026" cy="213271"/>
+          </a:xfrm>
+          <a:prstGeom prst="rect">
+            <a:avLst/>
+          </a:prstGeom>
+          <a:noFill/>
+          <a:ln/>
+        </p:spPr>
+        <p:txBody>
+          <a:bodyPr wrap="square" lIns="0" tIns="0" rIns="0" bIns="0" rtlCol="0" anchor="t"/>
+          <a:lstStyle/>
+          <a:p>
+            <a:pPr algn="l" indent="0" marL="0">
+              <a:lnSpc>
+                <a:spcPts val="1680"/>
+              </a:lnSpc>
+              <a:spcBef>
+                <a:spcPts val="300"/>
+              </a:spcBef>
+              <a:spcAft>
+                <a:spcPts val="300"/>
+              </a:spcAft>
+              <a:buNone/>
+            </a:pPr>
+            <a:r>
+              <a:rPr lang="en-US" sz="1200" dirty="0">
+                <a:solidFill>
+                  <a:srgbClr val="1C2833"/>
+                </a:solidFill>
+                <a:latin typeface="Arial" pitchFamily="34" charset="0"/>
+                <a:ea typeface="Arial" pitchFamily="34" charset="-122"/>
+                <a:cs typeface="Arial" pitchFamily="34" charset="-120"/>
+              </a:rPr>
+              <a:t>In pairs, students build a paper "season-checker":</a:t>
+            </a:r>
+            <a:endParaRPr lang="en-US" sz="1200" dirty="0"/>
+          </a:p>
+        </p:txBody>
+      </p:sp>
+      <p:sp>
+        <p:nvSpPr>
+          <p:cNvPr id="5" name="Text 3"/>
+          <p:cNvSpPr/>
+          <p:nvPr/>
+        </p:nvSpPr>
+        <p:spPr>
+          <a:xfrm>
+            <a:off x="406301" y="4434929"/>
+            <a:ext cx="8498026" cy="213271"/>
+          </a:xfrm>
+          <a:prstGeom prst="rect">
+            <a:avLst/>
+          </a:prstGeom>
+          <a:noFill/>
+          <a:ln/>
+        </p:spPr>
+        <p:txBody>
+          <a:bodyPr wrap="square" lIns="0" tIns="0" rIns="0" bIns="0" rtlCol="0" anchor="t"/>
+          <a:lstStyle/>
+          <a:p>
+            <a:pPr algn="l" indent="0" marL="0">
+              <a:lnSpc>
+                <a:spcPts val="1680"/>
+              </a:lnSpc>
+              <a:spcBef>
+                <a:spcPts val="300"/>
+              </a:spcBef>
+              <a:spcAft>
+                <a:spcPts val="300"/>
+              </a:spcAft>
+              <a:buNone/>
+            </a:pPr>
+            <a:r>
+              <a:rPr lang="en-US" sz="1200" dirty="0">
+                <a:solidFill>
+                  <a:srgbClr val="1C2833"/>
+                </a:solidFill>
+                <a:latin typeface="Arial" pitchFamily="34" charset="0"/>
+                <a:ea typeface="Arial" pitchFamily="34" charset="-122"/>
+                <a:cs typeface="Arial" pitchFamily="34" charset="-120"/>
+              </a:rPr>
+              <a:t>Middle ·  · IKS Curriculum</a:t>
+            </a:r>
+            <a:endParaRPr lang="en-US" sz="1200" dirty="0"/>
+          </a:p>
+        </p:txBody>
+      </p:sp>
+    </p:spTree>
+  </p:cSld>
+  <p:clrMapOvr>
+    <a:masterClrMapping/>
+  </p:clrMapOvr>
+</p:sld>
+</file>
+
+<file path=ppt/slides/slide14.xml><?xml version="1.0" encoding="utf-8"?>
+<p:sld xmlns:a="http://schemas.openxmlformats.org/drawingml/2006/main" xmlns:r="http://schemas.openxmlformats.org/officeDocument/2006/relationships" xmlns:p="http://schemas.openxmlformats.org/presentationml/2006/main">
+  <p:cSld name="Slide 14">
+    <p:bg>
+      <p:bgPr>
+        <a:solidFill>
+          <a:srgbClr val="FFFFFF"/>
+        </a:solidFill>
+      </p:bgPr>
+    </p:bg>
+    <p:spTree>
+      <p:nvGrpSpPr>
+        <p:cNvPr id="1" name=""/>
+        <p:cNvGrpSpPr/>
+        <p:nvPr/>
+      </p:nvGrpSpPr>
+      <p:grpSpPr>
+        <a:xfrm>
+          <a:off x="0" y="0"/>
+          <a:ext cx="0" cy="0"/>
+          <a:chOff x="0" y="0"/>
+          <a:chExt cx="0" cy="0"/>
+        </a:xfrm>
+      </p:grpSpPr>
+      <p:sp>
+        <p:nvSpPr>
+          <p:cNvPr id="2" name="Text 0"/>
+          <p:cNvSpPr/>
+          <p:nvPr/>
+        </p:nvSpPr>
+        <p:spPr>
+          <a:xfrm>
+            <a:off x="0" y="0"/>
+            <a:ext cx="9144000" cy="101501"/>
+          </a:xfrm>
+          <a:prstGeom prst="rect">
+            <a:avLst/>
+          </a:prstGeom>
+          <a:solidFill>
+            <a:srgbClr val="277884"/>
+          </a:solidFill>
+          <a:ln/>
+        </p:spPr>
+        <p:txBody>
+          <a:bodyPr wrap="square" rtlCol="0" anchor="ctr"/>
+          <a:lstStyle/>
+          <a:p>
+            <a:pPr indent="0" marL="0">
+              <a:buNone/>
+            </a:pPr>
+            <a:endParaRPr lang="en-US" dirty="0"/>
+          </a:p>
+        </p:txBody>
+      </p:sp>
+      <p:sp>
+        <p:nvSpPr>
+          <p:cNvPr id="3" name="Text 1"/>
+          <p:cNvSpPr/>
+          <p:nvPr/>
+        </p:nvSpPr>
+        <p:spPr>
+          <a:xfrm>
+            <a:off x="406301" y="457051"/>
+            <a:ext cx="8498026" cy="274290"/>
+          </a:xfrm>
+          <a:prstGeom prst="rect">
+            <a:avLst/>
+          </a:prstGeom>
+          <a:noFill/>
+          <a:ln/>
+        </p:spPr>
+        <p:txBody>
+          <a:bodyPr wrap="square" lIns="0" tIns="0" rIns="0" bIns="0" rtlCol="0" anchor="t"/>
+          <a:lstStyle/>
+          <a:p>
+            <a:pPr algn="l" indent="0" marL="0">
+              <a:lnSpc>
+                <a:spcPts val="2160"/>
+              </a:lnSpc>
+              <a:spcBef>
+                <a:spcPts val="600"/>
+              </a:spcBef>
+              <a:spcAft>
+                <a:spcPts val="800"/>
+              </a:spcAft>
+              <a:buNone/>
+            </a:pPr>
+            <a:r>
+              <a:rPr lang="en-US" sz="1800" b="1" dirty="0">
+                <a:solidFill>
+                  <a:srgbClr val="FE4447"/>
+                </a:solidFill>
+                <a:latin typeface="Georgia" pitchFamily="34" charset="0"/>
+                <a:ea typeface="Georgia" pitchFamily="34" charset="-122"/>
+                <a:cs typeface="Georgia" pitchFamily="34" charset="-120"/>
+              </a:rPr>
+              <a:t>Activity (15 min) — Build your own tilt model (cont.)</a:t>
+            </a:r>
+            <a:endParaRPr lang="en-US" sz="1800" dirty="0"/>
+          </a:p>
+        </p:txBody>
+      </p:sp>
+      <p:sp>
+        <p:nvSpPr>
+          <p:cNvPr id="4" name="Text 2"/>
+          <p:cNvSpPr/>
+          <p:nvPr/>
+        </p:nvSpPr>
+        <p:spPr>
+          <a:xfrm>
+            <a:off x="634901" y="883593"/>
+            <a:ext cx="8102798" cy="1706463"/>
+          </a:xfrm>
+          <a:prstGeom prst="rect">
+            <a:avLst/>
+          </a:prstGeom>
+          <a:noFill/>
+          <a:ln/>
+        </p:spPr>
+        <p:txBody>
+          <a:bodyPr wrap="square" lIns="0" tIns="0" rIns="0" bIns="0" rtlCol="0" anchor="t"/>
+          <a:lstStyle/>
+          <a:p>
+            <a:pPr algn="l" marL="342900" indent="-342900">
+              <a:lnSpc>
+                <a:spcPts val="1620"/>
+              </a:lnSpc>
+              <a:spcAft>
+                <a:spcPts val="300"/>
+              </a:spcAft>
+              <a:buSzPct val="100000"/>
+              <a:buChar char="•"/>
+            </a:pPr>
+            <a:r>
+              <a:rPr lang="en-US" sz="1200" dirty="0">
+                <a:solidFill>
+                  <a:srgbClr val="1C2833"/>
+                </a:solidFill>
+                <a:latin typeface="Arial" pitchFamily="34" charset="0"/>
+                <a:ea typeface="Arial" pitchFamily="34" charset="-122"/>
+                <a:cs typeface="Arial" pitchFamily="34" charset="-120"/>
+              </a:rPr>
+              <a:t>Take an A4 sheet. Mark a small circle in the centre — that's the Sun.</a:t>
+            </a:r>
+            <a:endParaRPr lang="en-US" sz="1200" dirty="0"/>
+          </a:p>
+          <a:p>
+            <a:pPr algn="l" marL="342900" indent="-342900">
+              <a:lnSpc>
+                <a:spcPts val="1620"/>
+              </a:lnSpc>
+              <a:spcAft>
+                <a:spcPts val="300"/>
+              </a:spcAft>
+              <a:buSzPct val="100000"/>
+              <a:buChar char="•"/>
+            </a:pPr>
+            <a:r>
+              <a:rPr lang="en-US" sz="1200" dirty="0">
+                <a:solidFill>
+                  <a:srgbClr val="1C2833"/>
+                </a:solidFill>
+                <a:latin typeface="Arial" pitchFamily="34" charset="0"/>
+                <a:ea typeface="Arial" pitchFamily="34" charset="-122"/>
+                <a:cs typeface="Arial" pitchFamily="34" charset="-120"/>
+              </a:rPr>
+              <a:t>Draw Earth's orbit as a big circle around it.</a:t>
+            </a:r>
+            <a:endParaRPr lang="en-US" sz="1200" dirty="0"/>
+          </a:p>
+          <a:p>
+            <a:pPr algn="l" marL="342900" indent="-342900">
+              <a:lnSpc>
+                <a:spcPts val="1620"/>
+              </a:lnSpc>
+              <a:spcAft>
+                <a:spcPts val="300"/>
+              </a:spcAft>
+              <a:buSzPct val="100000"/>
+              <a:buChar char="•"/>
+            </a:pPr>
+            <a:r>
+              <a:rPr lang="en-US" sz="1200" dirty="0">
+                <a:solidFill>
+                  <a:srgbClr val="1C2833"/>
+                </a:solidFill>
+                <a:latin typeface="Arial" pitchFamily="34" charset="0"/>
+                <a:ea typeface="Arial" pitchFamily="34" charset="-122"/>
+                <a:cs typeface="Arial" pitchFamily="34" charset="-120"/>
+              </a:rPr>
+              <a:t>At four positions on the orbit (top, right, bottom, left), draw a small Earth with its axis tilted to the </a:t>
+            </a:r>
+            <a:pPr algn="l" indent="0" marL="0">
+              <a:lnSpc>
+                <a:spcPts val="1620"/>
+              </a:lnSpc>
+              <a:spcAft>
+                <a:spcPts val="300"/>
+              </a:spcAft>
+              <a:buNone/>
+            </a:pPr>
+            <a:r>
+              <a:rPr lang="en-US" sz="1200" b="1" dirty="0">
+                <a:solidFill>
+                  <a:srgbClr val="1C2833"/>
+                </a:solidFill>
+                <a:latin typeface="Arial" pitchFamily="34" charset="0"/>
+                <a:ea typeface="Arial" pitchFamily="34" charset="-122"/>
+                <a:cs typeface="Arial" pitchFamily="34" charset="-120"/>
+              </a:rPr>
+              <a:t>right</a:t>
+            </a:r>
+            <a:pPr algn="l" indent="0" marL="0">
+              <a:lnSpc>
+                <a:spcPts val="1620"/>
+              </a:lnSpc>
+              <a:spcAft>
+                <a:spcPts val="300"/>
+              </a:spcAft>
+              <a:buNone/>
+            </a:pPr>
+            <a:r>
+              <a:rPr lang="en-US" sz="1200" dirty="0">
+                <a:solidFill>
+                  <a:srgbClr val="1C2833"/>
+                </a:solidFill>
+                <a:latin typeface="Arial" pitchFamily="34" charset="0"/>
+                <a:ea typeface="Arial" pitchFamily="34" charset="-122"/>
+                <a:cs typeface="Arial" pitchFamily="34" charset="-120"/>
+              </a:rPr>
+              <a:t> of vertical (same direction in all four).</a:t>
+            </a:r>
+            <a:endParaRPr lang="en-US" sz="1200" dirty="0"/>
+          </a:p>
+          <a:p>
+            <a:pPr algn="l" marL="342900" indent="-342900">
+              <a:lnSpc>
+                <a:spcPts val="1620"/>
+              </a:lnSpc>
+              <a:spcAft>
+                <a:spcPts val="300"/>
+              </a:spcAft>
+              <a:buSzPct val="100000"/>
+              <a:buChar char="•"/>
+            </a:pPr>
+            <a:r>
+              <a:rPr lang="en-US" sz="1200" dirty="0">
+                <a:solidFill>
+                  <a:srgbClr val="1C2833"/>
+                </a:solidFill>
+                <a:latin typeface="Arial" pitchFamily="34" charset="0"/>
+                <a:ea typeface="Arial" pitchFamily="34" charset="-122"/>
+                <a:cs typeface="Arial" pitchFamily="34" charset="-120"/>
+              </a:rPr>
+              <a:t>Mark which position is summer in the Northern Hemisphere, which is winter, which are the two equinoxes.</a:t>
+            </a:r>
+            <a:endParaRPr lang="en-US" sz="1200" dirty="0"/>
+          </a:p>
+          <a:p>
+            <a:pPr algn="l" marL="342900" indent="-342900">
+              <a:lnSpc>
+                <a:spcPts val="1620"/>
+              </a:lnSpc>
+              <a:spcAft>
+                <a:spcPts val="300"/>
+              </a:spcAft>
+              <a:buSzPct val="100000"/>
+              <a:buChar char="•"/>
+            </a:pPr>
+            <a:r>
+              <a:rPr lang="en-US" sz="1200" dirty="0">
+                <a:solidFill>
+                  <a:srgbClr val="1C2833"/>
+                </a:solidFill>
+                <a:latin typeface="Arial" pitchFamily="34" charset="0"/>
+                <a:ea typeface="Arial" pitchFamily="34" charset="-122"/>
+                <a:cs typeface="Arial" pitchFamily="34" charset="-120"/>
+              </a:rPr>
+              <a:t>Label each: June / September / December / March.</a:t>
+            </a:r>
+            <a:endParaRPr lang="en-US" sz="1200" dirty="0"/>
+          </a:p>
+          <a:p>
+            <a:pPr algn="l" marL="342900" indent="-342900">
+              <a:lnSpc>
+                <a:spcPts val="1620"/>
+              </a:lnSpc>
+              <a:spcAft>
+                <a:spcPts val="300"/>
+              </a:spcAft>
+              <a:buSzPct val="100000"/>
+              <a:buChar char="•"/>
+            </a:pPr>
+            <a:r>
+              <a:rPr lang="en-US" sz="1200" dirty="0">
+                <a:solidFill>
+                  <a:srgbClr val="1C2833"/>
+                </a:solidFill>
+                <a:latin typeface="Arial" pitchFamily="34" charset="0"/>
+                <a:ea typeface="Arial" pitchFamily="34" charset="-122"/>
+                <a:cs typeface="Arial" pitchFamily="34" charset="-120"/>
+              </a:rPr>
+              <a:t>Bonus: mark the Indian subcontinent on each Earth and shade where it's day.</a:t>
+            </a:r>
+            <a:endParaRPr lang="en-US" sz="1200" dirty="0"/>
+          </a:p>
+        </p:txBody>
+      </p:sp>
+      <p:sp>
+        <p:nvSpPr>
+          <p:cNvPr id="5" name="Text 3"/>
+          <p:cNvSpPr/>
+          <p:nvPr/>
+        </p:nvSpPr>
+        <p:spPr>
+          <a:xfrm>
+            <a:off x="406301" y="4434929"/>
+            <a:ext cx="8498026" cy="213271"/>
+          </a:xfrm>
+          <a:prstGeom prst="rect">
+            <a:avLst/>
+          </a:prstGeom>
+          <a:noFill/>
+          <a:ln/>
+        </p:spPr>
+        <p:txBody>
+          <a:bodyPr wrap="square" lIns="0" tIns="0" rIns="0" bIns="0" rtlCol="0" anchor="t"/>
+          <a:lstStyle/>
+          <a:p>
+            <a:pPr algn="l" indent="0" marL="0">
+              <a:lnSpc>
+                <a:spcPts val="1680"/>
+              </a:lnSpc>
+              <a:spcBef>
+                <a:spcPts val="300"/>
+              </a:spcBef>
+              <a:spcAft>
+                <a:spcPts val="300"/>
+              </a:spcAft>
+              <a:buNone/>
+            </a:pPr>
+            <a:r>
+              <a:rPr lang="en-US" sz="1200" dirty="0">
+                <a:solidFill>
+                  <a:srgbClr val="1C2833"/>
+                </a:solidFill>
+                <a:latin typeface="Arial" pitchFamily="34" charset="0"/>
+                <a:ea typeface="Arial" pitchFamily="34" charset="-122"/>
+                <a:cs typeface="Arial" pitchFamily="34" charset="-120"/>
+              </a:rPr>
+              <a:t>Middle ·  · IKS Curriculum</a:t>
+            </a:r>
+            <a:endParaRPr lang="en-US" sz="1200" dirty="0"/>
+          </a:p>
+        </p:txBody>
+      </p:sp>
+    </p:spTree>
+  </p:cSld>
+  <p:clrMapOvr>
+    <a:masterClrMapping/>
+  </p:clrMapOvr>
+</p:sld>
+</file>
+
+<file path=ppt/slides/slide15.xml><?xml version="1.0" encoding="utf-8"?>
+<p:sld xmlns:a="http://schemas.openxmlformats.org/drawingml/2006/main" xmlns:r="http://schemas.openxmlformats.org/officeDocument/2006/relationships" xmlns:p="http://schemas.openxmlformats.org/presentationml/2006/main">
+  <p:cSld name="Slide 15">
+    <p:bg>
+      <p:bgPr>
+        <a:solidFill>
+          <a:srgbClr val="FFFFFF"/>
+        </a:solidFill>
+      </p:bgPr>
+    </p:bg>
+    <p:spTree>
+      <p:nvGrpSpPr>
+        <p:cNvPr id="1" name=""/>
+        <p:cNvGrpSpPr/>
+        <p:nvPr/>
+      </p:nvGrpSpPr>
+      <p:grpSpPr>
+        <a:xfrm>
+          <a:off x="0" y="0"/>
+          <a:ext cx="0" cy="0"/>
+          <a:chOff x="0" y="0"/>
+          <a:chExt cx="0" cy="0"/>
+        </a:xfrm>
+      </p:grpSpPr>
+      <p:sp>
+        <p:nvSpPr>
+          <p:cNvPr id="2" name="Text 0"/>
+          <p:cNvSpPr/>
+          <p:nvPr/>
+        </p:nvSpPr>
+        <p:spPr>
+          <a:xfrm>
+            <a:off x="0" y="0"/>
+            <a:ext cx="9144000" cy="101501"/>
+          </a:xfrm>
+          <a:prstGeom prst="rect">
+            <a:avLst/>
+          </a:prstGeom>
+          <a:solidFill>
+            <a:srgbClr val="277884"/>
+          </a:solidFill>
+          <a:ln/>
+        </p:spPr>
+        <p:txBody>
+          <a:bodyPr wrap="square" rtlCol="0" anchor="ctr"/>
+          <a:lstStyle/>
+          <a:p>
+            <a:pPr indent="0" marL="0">
+              <a:buNone/>
+            </a:pPr>
+            <a:endParaRPr lang="en-US" dirty="0"/>
+          </a:p>
+        </p:txBody>
+      </p:sp>
+      <p:sp>
+        <p:nvSpPr>
+          <p:cNvPr id="3" name="Text 1"/>
+          <p:cNvSpPr/>
+          <p:nvPr/>
+        </p:nvSpPr>
+        <p:spPr>
+          <a:xfrm>
+            <a:off x="406301" y="457051"/>
+            <a:ext cx="8498026" cy="274290"/>
+          </a:xfrm>
+          <a:prstGeom prst="rect">
+            <a:avLst/>
+          </a:prstGeom>
+          <a:noFill/>
+          <a:ln/>
+        </p:spPr>
+        <p:txBody>
+          <a:bodyPr wrap="square" lIns="0" tIns="0" rIns="0" bIns="0" rtlCol="0" anchor="t"/>
+          <a:lstStyle/>
+          <a:p>
+            <a:pPr algn="l" indent="0" marL="0">
+              <a:lnSpc>
+                <a:spcPts val="2160"/>
+              </a:lnSpc>
+              <a:spcBef>
+                <a:spcPts val="600"/>
+              </a:spcBef>
+              <a:spcAft>
+                <a:spcPts val="800"/>
+              </a:spcAft>
+              <a:buNone/>
+            </a:pPr>
+            <a:r>
+              <a:rPr lang="en-US" sz="1800" b="1" dirty="0">
+                <a:solidFill>
+                  <a:srgbClr val="FE4447"/>
+                </a:solidFill>
+                <a:latin typeface="Georgia" pitchFamily="34" charset="0"/>
+                <a:ea typeface="Georgia" pitchFamily="34" charset="-122"/>
+                <a:cs typeface="Georgia" pitchFamily="34" charset="-120"/>
+              </a:rPr>
+              <a:t>Wrap-up (5 min)</a:t>
+            </a:r>
+            <a:endParaRPr lang="en-US" sz="1800" dirty="0"/>
+          </a:p>
+        </p:txBody>
+      </p:sp>
+      <p:sp>
+        <p:nvSpPr>
+          <p:cNvPr id="4" name="Text 2"/>
+          <p:cNvSpPr/>
+          <p:nvPr/>
+        </p:nvSpPr>
+        <p:spPr>
+          <a:xfrm>
+            <a:off x="634901" y="883593"/>
+            <a:ext cx="8102798" cy="937022"/>
+          </a:xfrm>
+          <a:prstGeom prst="rect">
+            <a:avLst/>
+          </a:prstGeom>
+          <a:noFill/>
+          <a:ln/>
+        </p:spPr>
+        <p:txBody>
+          <a:bodyPr wrap="square" lIns="0" tIns="0" rIns="0" bIns="0" rtlCol="0" anchor="t"/>
+          <a:lstStyle/>
+          <a:p>
+            <a:pPr algn="l" marL="342900" indent="-342900">
+              <a:lnSpc>
+                <a:spcPts val="1620"/>
+              </a:lnSpc>
+              <a:spcAft>
+                <a:spcPts val="300"/>
+              </a:spcAft>
+              <a:buSzPct val="100000"/>
+              <a:buChar char="•"/>
+            </a:pPr>
+            <a:r>
+              <a:rPr lang="en-US" sz="1200" b="1" dirty="0">
+                <a:solidFill>
+                  <a:srgbClr val="1C2833"/>
+                </a:solidFill>
+                <a:latin typeface="Arial" pitchFamily="34" charset="0"/>
+                <a:ea typeface="Arial" pitchFamily="34" charset="-122"/>
+                <a:cs typeface="Arial" pitchFamily="34" charset="-120"/>
+              </a:rPr>
+              <a:t>Exit ticket on a slip of paper:</a:t>
+            </a:r>
+            <a:pPr algn="l" indent="0" marL="0">
+              <a:lnSpc>
+                <a:spcPts val="1620"/>
+              </a:lnSpc>
+              <a:spcAft>
+                <a:spcPts val="300"/>
+              </a:spcAft>
+              <a:buNone/>
+            </a:pPr>
+            <a:r>
+              <a:rPr lang="en-US" sz="1200" dirty="0">
+                <a:solidFill>
+                  <a:srgbClr val="1C2833"/>
+                </a:solidFill>
+                <a:latin typeface="Arial" pitchFamily="34" charset="0"/>
+                <a:ea typeface="Arial" pitchFamily="34" charset="-122"/>
+                <a:cs typeface="Arial" pitchFamily="34" charset="-120"/>
+              </a:rPr>
+              <a:t> "Which is hotter in India in June: the </a:t>
+            </a:r>
+            <a:pPr algn="l" indent="0" marL="0">
+              <a:lnSpc>
+                <a:spcPts val="1620"/>
+              </a:lnSpc>
+              <a:spcAft>
+                <a:spcPts val="300"/>
+              </a:spcAft>
+              <a:buNone/>
+            </a:pPr>
+            <a:r>
+              <a:rPr lang="en-US" sz="1200" i="1" dirty="0">
+                <a:solidFill>
+                  <a:srgbClr val="1C2833"/>
+                </a:solidFill>
+                <a:latin typeface="Arial" pitchFamily="34" charset="0"/>
+                <a:ea typeface="Arial" pitchFamily="34" charset="-122"/>
+                <a:cs typeface="Arial" pitchFamily="34" charset="-120"/>
+              </a:rPr>
+              <a:t>day length</a:t>
+            </a:r>
+            <a:pPr algn="l" indent="0" marL="0">
+              <a:lnSpc>
+                <a:spcPts val="1620"/>
+              </a:lnSpc>
+              <a:spcAft>
+                <a:spcPts val="300"/>
+              </a:spcAft>
+              <a:buNone/>
+            </a:pPr>
+            <a:r>
+              <a:rPr lang="en-US" sz="1200" dirty="0">
+                <a:solidFill>
+                  <a:srgbClr val="1C2833"/>
+                </a:solidFill>
+                <a:latin typeface="Arial" pitchFamily="34" charset="0"/>
+                <a:ea typeface="Arial" pitchFamily="34" charset="-122"/>
+                <a:cs typeface="Arial" pitchFamily="34" charset="-120"/>
+              </a:rPr>
+              <a:t> or the </a:t>
+            </a:r>
+            <a:pPr algn="l" indent="0" marL="0">
+              <a:lnSpc>
+                <a:spcPts val="1620"/>
+              </a:lnSpc>
+              <a:spcAft>
+                <a:spcPts val="300"/>
+              </a:spcAft>
+              <a:buNone/>
+            </a:pPr>
+            <a:r>
+              <a:rPr lang="en-US" sz="1200" i="1" dirty="0">
+                <a:solidFill>
+                  <a:srgbClr val="1C2833"/>
+                </a:solidFill>
+                <a:latin typeface="Arial" pitchFamily="34" charset="0"/>
+                <a:ea typeface="Arial" pitchFamily="34" charset="-122"/>
+                <a:cs typeface="Arial" pitchFamily="34" charset="-120"/>
+              </a:rPr>
+              <a:t>angle of sunlight</a:t>
+            </a:r>
+            <a:pPr algn="l" indent="0" marL="0">
+              <a:lnSpc>
+                <a:spcPts val="1620"/>
+              </a:lnSpc>
+              <a:spcAft>
+                <a:spcPts val="300"/>
+              </a:spcAft>
+              <a:buNone/>
+            </a:pPr>
+            <a:r>
+              <a:rPr lang="en-US" sz="1200" dirty="0">
+                <a:solidFill>
+                  <a:srgbClr val="1C2833"/>
+                </a:solidFill>
+                <a:latin typeface="Arial" pitchFamily="34" charset="0"/>
+                <a:ea typeface="Arial" pitchFamily="34" charset="-122"/>
+                <a:cs typeface="Arial" pitchFamily="34" charset="-120"/>
+              </a:rPr>
+              <a:t> on your skin? Or both? In one sentence."</a:t>
+            </a:r>
+            <a:endParaRPr lang="en-US" sz="1200" dirty="0"/>
+          </a:p>
+          <a:p>
+            <a:pPr algn="l" marL="342900" indent="-342900">
+              <a:lnSpc>
+                <a:spcPts val="1620"/>
+              </a:lnSpc>
+              <a:spcAft>
+                <a:spcPts val="300"/>
+              </a:spcAft>
+              <a:buSzPct val="100000"/>
+              <a:buChar char="•"/>
+            </a:pPr>
+            <a:r>
+              <a:rPr lang="en-US" sz="1200" dirty="0">
+                <a:solidFill>
+                  <a:srgbClr val="1C2833"/>
+                </a:solidFill>
+                <a:latin typeface="Arial" pitchFamily="34" charset="0"/>
+                <a:ea typeface="Arial" pitchFamily="34" charset="-122"/>
+                <a:cs typeface="Arial" pitchFamily="34" charset="-120"/>
+              </a:rPr>
+              <a:t>Acceptable answer: BOTH — longer days mean more total hours of sunlight, AND the steeper angle means each minute of sunlight delivers more heat per square metre.</a:t>
+            </a:r>
+            <a:endParaRPr lang="en-US" sz="1200" dirty="0"/>
+          </a:p>
+        </p:txBody>
+      </p:sp>
+      <p:sp>
+        <p:nvSpPr>
+          <p:cNvPr id="5" name="Text 3"/>
+          <p:cNvSpPr/>
+          <p:nvPr/>
+        </p:nvSpPr>
+        <p:spPr>
+          <a:xfrm>
+            <a:off x="406301" y="4434929"/>
+            <a:ext cx="8498026" cy="213271"/>
+          </a:xfrm>
+          <a:prstGeom prst="rect">
+            <a:avLst/>
+          </a:prstGeom>
+          <a:noFill/>
+          <a:ln/>
+        </p:spPr>
+        <p:txBody>
+          <a:bodyPr wrap="square" lIns="0" tIns="0" rIns="0" bIns="0" rtlCol="0" anchor="t"/>
+          <a:lstStyle/>
+          <a:p>
+            <a:pPr algn="l" indent="0" marL="0">
+              <a:lnSpc>
+                <a:spcPts val="1680"/>
+              </a:lnSpc>
+              <a:spcBef>
+                <a:spcPts val="300"/>
+              </a:spcBef>
+              <a:spcAft>
+                <a:spcPts val="300"/>
+              </a:spcAft>
+              <a:buNone/>
+            </a:pPr>
+            <a:r>
+              <a:rPr lang="en-US" sz="1200" dirty="0">
+                <a:solidFill>
+                  <a:srgbClr val="1C2833"/>
+                </a:solidFill>
+                <a:latin typeface="Arial" pitchFamily="34" charset="0"/>
+                <a:ea typeface="Arial" pitchFamily="34" charset="-122"/>
+                <a:cs typeface="Arial" pitchFamily="34" charset="-120"/>
+              </a:rPr>
+              <a:t>Middle ·  · IKS Curriculum</a:t>
+            </a:r>
+            <a:endParaRPr lang="en-US" sz="1200" dirty="0"/>
+          </a:p>
+        </p:txBody>
+      </p:sp>
+    </p:spTree>
+  </p:cSld>
+  <p:clrMapOvr>
+    <a:masterClrMapping/>
+  </p:clrMapOvr>
+</p:sld>
+</file>
+
+<file path=ppt/slides/slide16.xml><?xml version="1.0" encoding="utf-8"?>
+<p:sld xmlns:a="http://schemas.openxmlformats.org/drawingml/2006/main" xmlns:r="http://schemas.openxmlformats.org/officeDocument/2006/relationships" xmlns:p="http://schemas.openxmlformats.org/presentationml/2006/main">
+  <p:cSld name="Slide 16">
+    <p:bg>
+      <p:bgPr>
+        <a:solidFill>
+          <a:srgbClr val="FFFFFF"/>
+        </a:solidFill>
+      </p:bgPr>
+    </p:bg>
+    <p:spTree>
+      <p:nvGrpSpPr>
+        <p:cNvPr id="1" name=""/>
+        <p:cNvGrpSpPr/>
+        <p:nvPr/>
+      </p:nvGrpSpPr>
+      <p:grpSpPr>
+        <a:xfrm>
+          <a:off x="0" y="0"/>
+          <a:ext cx="0" cy="0"/>
+          <a:chOff x="0" y="0"/>
+          <a:chExt cx="0" cy="0"/>
+        </a:xfrm>
+      </p:grpSpPr>
+      <p:sp>
+        <p:nvSpPr>
+          <p:cNvPr id="2" name="Text 0"/>
+          <p:cNvSpPr/>
+          <p:nvPr/>
+        </p:nvSpPr>
+        <p:spPr>
+          <a:xfrm>
+            <a:off x="0" y="0"/>
+            <a:ext cx="9144000" cy="101501"/>
+          </a:xfrm>
+          <a:prstGeom prst="rect">
+            <a:avLst/>
+          </a:prstGeom>
+          <a:solidFill>
+            <a:srgbClr val="277884"/>
+          </a:solidFill>
+          <a:ln/>
+        </p:spPr>
+        <p:txBody>
+          <a:bodyPr wrap="square" rtlCol="0" anchor="ctr"/>
+          <a:lstStyle/>
+          <a:p>
+            <a:pPr indent="0" marL="0">
+              <a:buNone/>
+            </a:pPr>
+            <a:endParaRPr lang="en-US" dirty="0"/>
+          </a:p>
+        </p:txBody>
+      </p:sp>
+      <p:sp>
+        <p:nvSpPr>
+          <p:cNvPr id="3" name="Text 1"/>
+          <p:cNvSpPr/>
+          <p:nvPr/>
+        </p:nvSpPr>
+        <p:spPr>
+          <a:xfrm>
+            <a:off x="406301" y="457051"/>
+            <a:ext cx="8498026" cy="274290"/>
+          </a:xfrm>
+          <a:prstGeom prst="rect">
+            <a:avLst/>
+          </a:prstGeom>
+          <a:noFill/>
+          <a:ln/>
+        </p:spPr>
+        <p:txBody>
+          <a:bodyPr wrap="square" lIns="0" tIns="0" rIns="0" bIns="0" rtlCol="0" anchor="t"/>
+          <a:lstStyle/>
+          <a:p>
+            <a:pPr algn="l" indent="0" marL="0">
+              <a:lnSpc>
+                <a:spcPts val="2160"/>
+              </a:lnSpc>
+              <a:spcBef>
+                <a:spcPts val="600"/>
+              </a:spcBef>
+              <a:spcAft>
+                <a:spcPts val="800"/>
+              </a:spcAft>
+              <a:buNone/>
+            </a:pPr>
+            <a:r>
+              <a:rPr lang="en-US" sz="1800" b="1" dirty="0">
+                <a:solidFill>
+                  <a:srgbClr val="FE4447"/>
+                </a:solidFill>
+                <a:latin typeface="Georgia" pitchFamily="34" charset="0"/>
+                <a:ea typeface="Georgia" pitchFamily="34" charset="-122"/>
+                <a:cs typeface="Georgia" pitchFamily="34" charset="-120"/>
+              </a:rPr>
+              <a:t>Homework</a:t>
+            </a:r>
+            <a:endParaRPr lang="en-US" sz="1800" dirty="0"/>
+          </a:p>
+        </p:txBody>
+      </p:sp>
+      <p:sp>
+        <p:nvSpPr>
+          <p:cNvPr id="4" name="Text 2"/>
+          <p:cNvSpPr/>
+          <p:nvPr/>
+        </p:nvSpPr>
+        <p:spPr>
+          <a:xfrm>
+            <a:off x="634901" y="883593"/>
+            <a:ext cx="8102798" cy="731341"/>
+          </a:xfrm>
+          <a:prstGeom prst="rect">
+            <a:avLst/>
+          </a:prstGeom>
+          <a:noFill/>
+          <a:ln/>
+        </p:spPr>
+        <p:txBody>
+          <a:bodyPr wrap="square" lIns="0" tIns="0" rIns="0" bIns="0" rtlCol="0" anchor="t"/>
+          <a:lstStyle/>
+          <a:p>
+            <a:pPr algn="l" marL="342900" indent="-342900">
+              <a:lnSpc>
+                <a:spcPts val="1620"/>
+              </a:lnSpc>
+              <a:spcAft>
+                <a:spcPts val="300"/>
+              </a:spcAft>
+              <a:buSzPct val="100000"/>
+              <a:buChar char="•"/>
+            </a:pPr>
+            <a:r>
+              <a:rPr lang="en-US" sz="1200" dirty="0">
+                <a:solidFill>
+                  <a:srgbClr val="1C2833"/>
+                </a:solidFill>
+                <a:latin typeface="Arial" pitchFamily="34" charset="0"/>
+                <a:ea typeface="Arial" pitchFamily="34" charset="-122"/>
+                <a:cs typeface="Arial" pitchFamily="34" charset="-120"/>
+              </a:rPr>
+              <a:t>On the calendar printout, mark the four dates: </a:t>
+            </a:r>
+            <a:pPr algn="l" indent="0" marL="0">
+              <a:lnSpc>
+                <a:spcPts val="1620"/>
+              </a:lnSpc>
+              <a:spcAft>
+                <a:spcPts val="300"/>
+              </a:spcAft>
+              <a:buNone/>
+            </a:pPr>
+            <a:r>
+              <a:rPr lang="en-US" sz="1200" b="1" dirty="0">
+                <a:solidFill>
+                  <a:srgbClr val="1C2833"/>
+                </a:solidFill>
+                <a:latin typeface="Arial" pitchFamily="34" charset="0"/>
+                <a:ea typeface="Arial" pitchFamily="34" charset="-122"/>
+                <a:cs typeface="Arial" pitchFamily="34" charset="-120"/>
+              </a:rPr>
+              <a:t>~21 March (March equinox), ~21 June (June solstice), ~23 September (September equinox), ~21 December (December solstice).</a:t>
+            </a:r>
+            <a:endParaRPr lang="en-US" sz="1200" dirty="0"/>
+          </a:p>
+          <a:p>
+            <a:pPr algn="l" marL="342900" indent="-342900">
+              <a:lnSpc>
+                <a:spcPts val="1620"/>
+              </a:lnSpc>
+              <a:spcAft>
+                <a:spcPts val="300"/>
+              </a:spcAft>
+              <a:buSzPct val="100000"/>
+              <a:buChar char="•"/>
+            </a:pPr>
+            <a:r>
+              <a:rPr lang="en-US" sz="1200" dirty="0">
+                <a:solidFill>
+                  <a:srgbClr val="1C2833"/>
+                </a:solidFill>
+                <a:latin typeface="Arial" pitchFamily="34" charset="0"/>
+                <a:ea typeface="Arial" pitchFamily="34" charset="-122"/>
+                <a:cs typeface="Arial" pitchFamily="34" charset="-120"/>
+              </a:rPr>
+              <a:t>Bring the marked calendar to Day 3.</a:t>
+            </a:r>
+            <a:endParaRPr lang="en-US" sz="1200" dirty="0"/>
+          </a:p>
+        </p:txBody>
+      </p:sp>
+      <p:sp>
+        <p:nvSpPr>
+          <p:cNvPr id="5" name="Text 3"/>
+          <p:cNvSpPr/>
+          <p:nvPr/>
+        </p:nvSpPr>
+        <p:spPr>
+          <a:xfrm>
+            <a:off x="406301" y="4434929"/>
+            <a:ext cx="8498026" cy="213271"/>
+          </a:xfrm>
+          <a:prstGeom prst="rect">
+            <a:avLst/>
+          </a:prstGeom>
+          <a:noFill/>
+          <a:ln/>
+        </p:spPr>
+        <p:txBody>
+          <a:bodyPr wrap="square" lIns="0" tIns="0" rIns="0" bIns="0" rtlCol="0" anchor="t"/>
+          <a:lstStyle/>
+          <a:p>
+            <a:pPr algn="l" indent="0" marL="0">
+              <a:lnSpc>
+                <a:spcPts val="1680"/>
+              </a:lnSpc>
+              <a:spcBef>
+                <a:spcPts val="300"/>
+              </a:spcBef>
+              <a:spcAft>
+                <a:spcPts val="300"/>
+              </a:spcAft>
+              <a:buNone/>
+            </a:pPr>
+            <a:r>
+              <a:rPr lang="en-US" sz="1200" dirty="0">
+                <a:solidFill>
+                  <a:srgbClr val="1C2833"/>
+                </a:solidFill>
+                <a:latin typeface="Arial" pitchFamily="34" charset="0"/>
+                <a:ea typeface="Arial" pitchFamily="34" charset="-122"/>
+                <a:cs typeface="Arial" pitchFamily="34" charset="-120"/>
+              </a:rPr>
+              <a:t>Middle ·  · IKS Curriculum</a:t>
+            </a:r>
+            <a:endParaRPr lang="en-US" sz="1200" dirty="0"/>
+          </a:p>
+        </p:txBody>
+      </p:sp>
+    </p:spTree>
+  </p:cSld>
+  <p:clrMapOvr>
+    <a:masterClrMapping/>
+  </p:clrMapOvr>
+</p:sld>
+</file>
+
+<file path=ppt/slides/slide17.xml><?xml version="1.0" encoding="utf-8"?>
+<p:sld xmlns:a="http://schemas.openxmlformats.org/drawingml/2006/main" xmlns:r="http://schemas.openxmlformats.org/officeDocument/2006/relationships" xmlns:p="http://schemas.openxmlformats.org/presentationml/2006/main">
+  <p:cSld name="Slide 17">
+    <p:bg>
+      <p:bgPr>
+        <a:solidFill>
+          <a:srgbClr val="FFFFFF"/>
+        </a:solidFill>
+      </p:bgPr>
+    </p:bg>
+    <p:spTree>
+      <p:nvGrpSpPr>
+        <p:cNvPr id="1" name=""/>
+        <p:cNvGrpSpPr/>
+        <p:nvPr/>
+      </p:nvGrpSpPr>
+      <p:grpSpPr>
+        <a:xfrm>
+          <a:off x="0" y="0"/>
+          <a:ext cx="0" cy="0"/>
+          <a:chOff x="0" y="0"/>
+          <a:chExt cx="0" cy="0"/>
+        </a:xfrm>
+      </p:grpSpPr>
+      <p:sp>
+        <p:nvSpPr>
+          <p:cNvPr id="2" name="Text 0"/>
+          <p:cNvSpPr/>
+          <p:nvPr/>
+        </p:nvSpPr>
+        <p:spPr>
+          <a:xfrm>
+            <a:off x="0" y="0"/>
+            <a:ext cx="9144000" cy="101501"/>
+          </a:xfrm>
+          <a:prstGeom prst="rect">
+            <a:avLst/>
+          </a:prstGeom>
+          <a:solidFill>
+            <a:srgbClr val="277884"/>
+          </a:solidFill>
+          <a:ln/>
+        </p:spPr>
+        <p:txBody>
+          <a:bodyPr wrap="square" rtlCol="0" anchor="ctr"/>
+          <a:lstStyle/>
+          <a:p>
+            <a:pPr indent="0" marL="0">
+              <a:buNone/>
+            </a:pPr>
+            <a:endParaRPr lang="en-US" dirty="0"/>
+          </a:p>
+        </p:txBody>
+      </p:sp>
+      <p:sp>
+        <p:nvSpPr>
+          <p:cNvPr id="3" name="Text 1"/>
+          <p:cNvSpPr/>
+          <p:nvPr/>
+        </p:nvSpPr>
+        <p:spPr>
+          <a:xfrm>
+            <a:off x="406301" y="457051"/>
+            <a:ext cx="8498026" cy="274290"/>
+          </a:xfrm>
+          <a:prstGeom prst="rect">
+            <a:avLst/>
+          </a:prstGeom>
+          <a:noFill/>
+          <a:ln/>
+        </p:spPr>
+        <p:txBody>
+          <a:bodyPr wrap="square" lIns="0" tIns="0" rIns="0" bIns="0" rtlCol="0" anchor="t"/>
+          <a:lstStyle/>
+          <a:p>
+            <a:pPr algn="l" indent="0" marL="0">
+              <a:lnSpc>
+                <a:spcPts val="2160"/>
+              </a:lnSpc>
+              <a:spcBef>
+                <a:spcPts val="600"/>
+              </a:spcBef>
+              <a:spcAft>
+                <a:spcPts val="800"/>
+              </a:spcAft>
+              <a:buNone/>
+            </a:pPr>
+            <a:r>
+              <a:rPr lang="en-US" sz="1800" b="1" dirty="0">
+                <a:solidFill>
+                  <a:srgbClr val="FE4447"/>
+                </a:solidFill>
+                <a:latin typeface="Georgia" pitchFamily="34" charset="0"/>
+                <a:ea typeface="Georgia" pitchFamily="34" charset="-122"/>
+                <a:cs typeface="Georgia" pitchFamily="34" charset="-120"/>
+              </a:rPr>
+              <a:t>Student-facing content</a:t>
+            </a:r>
+            <a:endParaRPr lang="en-US" sz="1800" dirty="0"/>
+          </a:p>
+        </p:txBody>
+      </p:sp>
+      <p:sp>
+        <p:nvSpPr>
+          <p:cNvPr id="4" name="Text 2"/>
+          <p:cNvSpPr/>
+          <p:nvPr/>
+        </p:nvSpPr>
+        <p:spPr>
+          <a:xfrm>
+            <a:off x="406301" y="883593"/>
+            <a:ext cx="8331398" cy="2419350"/>
+          </a:xfrm>
+          <a:prstGeom prst="rect">
+            <a:avLst/>
+          </a:prstGeom>
+          <a:solidFill>
+            <a:srgbClr val="F4F8F9"/>
+          </a:solidFill>
+          <a:ln/>
+        </p:spPr>
+        <p:txBody>
+          <a:bodyPr wrap="square" rtlCol="0" anchor="ctr"/>
+          <a:lstStyle/>
+          <a:p>
+            <a:pPr indent="0" marL="0">
+              <a:buNone/>
+            </a:pPr>
+            <a:endParaRPr lang="en-US" dirty="0"/>
+          </a:p>
+        </p:txBody>
+      </p:sp>
+      <p:sp>
+        <p:nvSpPr>
+          <p:cNvPr id="5" name="Shape 3"/>
+          <p:cNvSpPr/>
+          <p:nvPr/>
+        </p:nvSpPr>
+        <p:spPr>
+          <a:xfrm>
+            <a:off x="434876" y="883593"/>
+            <a:ext cx="0" cy="2419350"/>
+          </a:xfrm>
+          <a:prstGeom prst="line">
+            <a:avLst/>
+          </a:prstGeom>
+          <a:noFill/>
+          <a:ln w="57150">
+            <a:solidFill>
+              <a:srgbClr val="FE4447"/>
+            </a:solidFill>
+            <a:prstDash val="solid"/>
+          </a:ln>
+        </p:spPr>
+      </p:sp>
+      <p:sp>
+        <p:nvSpPr>
+          <p:cNvPr id="6" name="Text 4"/>
+          <p:cNvSpPr/>
+          <p:nvPr/>
+        </p:nvSpPr>
+        <p:spPr>
+          <a:xfrm>
+            <a:off x="692051" y="1074093"/>
+            <a:ext cx="7973389" cy="461963"/>
+          </a:xfrm>
+          <a:prstGeom prst="rect">
+            <a:avLst/>
+          </a:prstGeom>
+          <a:noFill/>
+          <a:ln/>
+        </p:spPr>
+        <p:txBody>
+          <a:bodyPr wrap="square" lIns="0" tIns="0" rIns="0" bIns="0" rtlCol="0" anchor="t"/>
+          <a:lstStyle/>
+          <a:p>
+            <a:pPr algn="l" indent="0" marL="0">
+              <a:lnSpc>
+                <a:spcPts val="1820"/>
+              </a:lnSpc>
+              <a:spcBef>
+                <a:spcPts val="300"/>
+              </a:spcBef>
+              <a:spcAft>
+                <a:spcPts val="300"/>
+              </a:spcAft>
+              <a:buNone/>
+            </a:pPr>
+            <a:r>
+              <a:rPr lang="en-US" sz="1300" b="1" i="1" dirty="0">
+                <a:solidFill>
+                  <a:srgbClr val="1C2833"/>
+                </a:solidFill>
+                <a:latin typeface="Georgia" pitchFamily="34" charset="0"/>
+                <a:ea typeface="Georgia" pitchFamily="34" charset="-122"/>
+                <a:cs typeface="Georgia" pitchFamily="34" charset="-120"/>
+              </a:rPr>
+              <a:t>Earth is tilted.</a:t>
+            </a:r>
+            <a:pPr algn="l" indent="0" marL="0">
+              <a:lnSpc>
+                <a:spcPts val="1820"/>
+              </a:lnSpc>
+              <a:spcBef>
+                <a:spcPts val="300"/>
+              </a:spcBef>
+              <a:spcAft>
+                <a:spcPts val="300"/>
+              </a:spcAft>
+              <a:buNone/>
+            </a:pPr>
+            <a:r>
+              <a:rPr lang="en-US" sz="1300" dirty="0">
+                <a:solidFill>
+                  <a:srgbClr val="1C2833"/>
+                </a:solidFill>
+                <a:latin typeface="Georgia" pitchFamily="34" charset="0"/>
+                <a:ea typeface="Georgia" pitchFamily="34" charset="-122"/>
+                <a:cs typeface="Georgia" pitchFamily="34" charset="-120"/>
+              </a:rPr>
+              <a:t> Its rotation axis is at ~23.5° from straight-up (relative to its orbit around the Sun). And the tilt direction </a:t>
+            </a:r>
+            <a:pPr algn="l" indent="0" marL="0">
+              <a:lnSpc>
+                <a:spcPts val="1820"/>
+              </a:lnSpc>
+              <a:spcBef>
+                <a:spcPts val="300"/>
+              </a:spcBef>
+              <a:spcAft>
+                <a:spcPts val="300"/>
+              </a:spcAft>
+              <a:buNone/>
+            </a:pPr>
+            <a:r>
+              <a:rPr lang="en-US" sz="1300" i="1" dirty="0">
+                <a:solidFill>
+                  <a:srgbClr val="1C2833"/>
+                </a:solidFill>
+                <a:latin typeface="Georgia" pitchFamily="34" charset="0"/>
+                <a:ea typeface="Georgia" pitchFamily="34" charset="-122"/>
+                <a:cs typeface="Georgia" pitchFamily="34" charset="-120"/>
+              </a:rPr>
+              <a:t>doesn't change</a:t>
+            </a:r>
+            <a:pPr algn="l" indent="0" marL="0">
+              <a:lnSpc>
+                <a:spcPts val="1820"/>
+              </a:lnSpc>
+              <a:spcBef>
+                <a:spcPts val="300"/>
+              </a:spcBef>
+              <a:spcAft>
+                <a:spcPts val="300"/>
+              </a:spcAft>
+              <a:buNone/>
+            </a:pPr>
+            <a:r>
+              <a:rPr lang="en-US" sz="1300" dirty="0">
+                <a:solidFill>
+                  <a:srgbClr val="1C2833"/>
+                </a:solidFill>
+                <a:latin typeface="Georgia" pitchFamily="34" charset="0"/>
+                <a:ea typeface="Georgia" pitchFamily="34" charset="-122"/>
+                <a:cs typeface="Georgia" pitchFamily="34" charset="-120"/>
+              </a:rPr>
+              <a:t> as Earth orbits.</a:t>
+            </a:r>
+            <a:endParaRPr lang="en-US" sz="1300" dirty="0"/>
+          </a:p>
+        </p:txBody>
+      </p:sp>
+      <p:sp>
+        <p:nvSpPr>
+          <p:cNvPr id="7" name="Text 5"/>
+          <p:cNvSpPr/>
+          <p:nvPr/>
+        </p:nvSpPr>
+        <p:spPr>
+          <a:xfrm>
+            <a:off x="692051" y="1574155"/>
+            <a:ext cx="7973389" cy="230981"/>
+          </a:xfrm>
+          <a:prstGeom prst="rect">
+            <a:avLst/>
+          </a:prstGeom>
+          <a:noFill/>
+          <a:ln/>
+        </p:spPr>
+        <p:txBody>
+          <a:bodyPr wrap="square" lIns="0" tIns="0" rIns="0" bIns="0" rtlCol="0" anchor="t"/>
+          <a:lstStyle/>
+          <a:p>
+            <a:pPr algn="l" indent="0" marL="0">
+              <a:lnSpc>
+                <a:spcPts val="1820"/>
+              </a:lnSpc>
+              <a:spcBef>
+                <a:spcPts val="300"/>
+              </a:spcBef>
+              <a:spcAft>
+                <a:spcPts val="300"/>
+              </a:spcAft>
+              <a:buNone/>
+            </a:pPr>
+            <a:r>
+              <a:rPr lang="en-US" sz="1300" i="1" dirty="0">
+                <a:solidFill>
+                  <a:srgbClr val="1C2833"/>
+                </a:solidFill>
+                <a:latin typeface="Georgia" pitchFamily="34" charset="0"/>
+                <a:ea typeface="Georgia" pitchFamily="34" charset="-122"/>
+                <a:cs typeface="Georgia" pitchFamily="34" charset="-120"/>
+              </a:rPr>
+              <a:t>This single fact causes the seasons:</a:t>
+            </a:r>
+            <a:endParaRPr lang="en-US" sz="1300" dirty="0"/>
+          </a:p>
+        </p:txBody>
+      </p:sp>
+      <p:sp>
+        <p:nvSpPr>
+          <p:cNvPr id="8" name="Text 6"/>
+          <p:cNvSpPr/>
+          <p:nvPr/>
+        </p:nvSpPr>
+        <p:spPr>
+          <a:xfrm>
+            <a:off x="692051" y="1843236"/>
+            <a:ext cx="7973389" cy="230981"/>
+          </a:xfrm>
+          <a:prstGeom prst="rect">
+            <a:avLst/>
+          </a:prstGeom>
+          <a:noFill/>
+          <a:ln/>
+        </p:spPr>
+        <p:txBody>
+          <a:bodyPr wrap="square" lIns="0" tIns="0" rIns="0" bIns="0" rtlCol="0" anchor="t"/>
+          <a:lstStyle/>
+          <a:p>
+            <a:pPr algn="l" indent="0" marL="0">
+              <a:lnSpc>
+                <a:spcPts val="1820"/>
+              </a:lnSpc>
+              <a:spcBef>
+                <a:spcPts val="300"/>
+              </a:spcBef>
+              <a:spcAft>
+                <a:spcPts val="300"/>
+              </a:spcAft>
+              <a:buNone/>
+            </a:pPr>
+            <a:r>
+              <a:rPr lang="en-US" sz="1300" i="1" dirty="0">
+                <a:solidFill>
+                  <a:srgbClr val="1C2833"/>
+                </a:solidFill>
+                <a:latin typeface="Georgia" pitchFamily="34" charset="0"/>
+                <a:ea typeface="Georgia" pitchFamily="34" charset="-122"/>
+                <a:cs typeface="Georgia" pitchFamily="34" charset="-120"/>
+              </a:rPr>
+              <a:t>When the N pole leans TOWARD the Sun (~June 21) → summer in India.</a:t>
+            </a:r>
+            <a:endParaRPr lang="en-US" sz="1300" dirty="0"/>
+          </a:p>
+        </p:txBody>
+      </p:sp>
+      <p:sp>
+        <p:nvSpPr>
+          <p:cNvPr id="9" name="Text 7"/>
+          <p:cNvSpPr/>
+          <p:nvPr/>
+        </p:nvSpPr>
+        <p:spPr>
+          <a:xfrm>
+            <a:off x="692051" y="2112318"/>
+            <a:ext cx="7973389" cy="230981"/>
+          </a:xfrm>
+          <a:prstGeom prst="rect">
+            <a:avLst/>
+          </a:prstGeom>
+          <a:noFill/>
+          <a:ln/>
+        </p:spPr>
+        <p:txBody>
+          <a:bodyPr wrap="square" lIns="0" tIns="0" rIns="0" bIns="0" rtlCol="0" anchor="t"/>
+          <a:lstStyle/>
+          <a:p>
+            <a:pPr algn="l" indent="0" marL="0">
+              <a:lnSpc>
+                <a:spcPts val="1820"/>
+              </a:lnSpc>
+              <a:spcBef>
+                <a:spcPts val="300"/>
+              </a:spcBef>
+              <a:spcAft>
+                <a:spcPts val="300"/>
+              </a:spcAft>
+              <a:buNone/>
+            </a:pPr>
+            <a:r>
+              <a:rPr lang="en-US" sz="1300" i="1" dirty="0">
+                <a:solidFill>
+                  <a:srgbClr val="1C2833"/>
+                </a:solidFill>
+                <a:latin typeface="Georgia" pitchFamily="34" charset="0"/>
+                <a:ea typeface="Georgia" pitchFamily="34" charset="-122"/>
+                <a:cs typeface="Georgia" pitchFamily="34" charset="-120"/>
+              </a:rPr>
+              <a:t>When it leans AWAY (~December 21) → winter in India.</a:t>
+            </a:r>
+            <a:endParaRPr lang="en-US" sz="1300" dirty="0"/>
+          </a:p>
+        </p:txBody>
+      </p:sp>
+      <p:sp>
+        <p:nvSpPr>
+          <p:cNvPr id="10" name="Text 8"/>
+          <p:cNvSpPr/>
+          <p:nvPr/>
+        </p:nvSpPr>
+        <p:spPr>
+          <a:xfrm>
+            <a:off x="692051" y="2381399"/>
+            <a:ext cx="7973389" cy="230981"/>
+          </a:xfrm>
+          <a:prstGeom prst="rect">
+            <a:avLst/>
+          </a:prstGeom>
+          <a:noFill/>
+          <a:ln/>
+        </p:spPr>
+        <p:txBody>
+          <a:bodyPr wrap="square" lIns="0" tIns="0" rIns="0" bIns="0" rtlCol="0" anchor="t"/>
+          <a:lstStyle/>
+          <a:p>
+            <a:pPr algn="l" indent="0" marL="0">
+              <a:lnSpc>
+                <a:spcPts val="1820"/>
+              </a:lnSpc>
+              <a:spcBef>
+                <a:spcPts val="300"/>
+              </a:spcBef>
+              <a:spcAft>
+                <a:spcPts val="300"/>
+              </a:spcAft>
+              <a:buNone/>
+            </a:pPr>
+            <a:r>
+              <a:rPr lang="en-US" sz="1300" i="1" dirty="0">
+                <a:solidFill>
+                  <a:srgbClr val="1C2833"/>
+                </a:solidFill>
+                <a:latin typeface="Georgia" pitchFamily="34" charset="0"/>
+                <a:ea typeface="Georgia" pitchFamily="34" charset="-122"/>
+                <a:cs typeface="Georgia" pitchFamily="34" charset="-120"/>
+              </a:rPr>
+              <a:t>When it leans SIDEWAYS (~March 21 and ~September 23) → day = night everywhere on Earth.</a:t>
+            </a:r>
+            <a:endParaRPr lang="en-US" sz="1300" dirty="0"/>
+          </a:p>
+        </p:txBody>
+      </p:sp>
+      <p:sp>
+        <p:nvSpPr>
+          <p:cNvPr id="11" name="Text 9"/>
+          <p:cNvSpPr/>
+          <p:nvPr/>
+        </p:nvSpPr>
+        <p:spPr>
+          <a:xfrm>
+            <a:off x="692051" y="2650480"/>
+            <a:ext cx="7973389" cy="461963"/>
+          </a:xfrm>
+          <a:prstGeom prst="rect">
+            <a:avLst/>
+          </a:prstGeom>
+          <a:noFill/>
+          <a:ln/>
+        </p:spPr>
+        <p:txBody>
+          <a:bodyPr wrap="square" lIns="0" tIns="0" rIns="0" bIns="0" rtlCol="0" anchor="t"/>
+          <a:lstStyle/>
+          <a:p>
+            <a:pPr algn="l" indent="0" marL="0">
+              <a:lnSpc>
+                <a:spcPts val="1820"/>
+              </a:lnSpc>
+              <a:spcBef>
+                <a:spcPts val="300"/>
+              </a:spcBef>
+              <a:spcAft>
+                <a:spcPts val="300"/>
+              </a:spcAft>
+              <a:buNone/>
+            </a:pPr>
+            <a:r>
+              <a:rPr lang="en-US" sz="1300" dirty="0">
+                <a:solidFill>
+                  <a:srgbClr val="1C2833"/>
+                </a:solidFill>
+                <a:latin typeface="Georgia" pitchFamily="34" charset="0"/>
+                <a:ea typeface="Georgia" pitchFamily="34" charset="-122"/>
+                <a:cs typeface="Georgia" pitchFamily="34" charset="-120"/>
+              </a:rPr>
+              <a:t>Surprise fact: Earth is actually </a:t>
+            </a:r>
+            <a:pPr algn="l" indent="0" marL="0">
+              <a:lnSpc>
+                <a:spcPts val="1820"/>
+              </a:lnSpc>
+              <a:spcBef>
+                <a:spcPts val="300"/>
+              </a:spcBef>
+              <a:spcAft>
+                <a:spcPts val="300"/>
+              </a:spcAft>
+              <a:buNone/>
+            </a:pPr>
+            <a:r>
+              <a:rPr lang="en-US" sz="1300" i="1" dirty="0">
+                <a:solidFill>
+                  <a:srgbClr val="1C2833"/>
+                </a:solidFill>
+                <a:latin typeface="Georgia" pitchFamily="34" charset="0"/>
+                <a:ea typeface="Georgia" pitchFamily="34" charset="-122"/>
+                <a:cs typeface="Georgia" pitchFamily="34" charset="-120"/>
+              </a:rPr>
+              <a:t>closer</a:t>
+            </a:r>
+            <a:pPr algn="l" indent="0" marL="0">
+              <a:lnSpc>
+                <a:spcPts val="1820"/>
+              </a:lnSpc>
+              <a:spcBef>
+                <a:spcPts val="300"/>
+              </a:spcBef>
+              <a:spcAft>
+                <a:spcPts val="300"/>
+              </a:spcAft>
+              <a:buNone/>
+            </a:pPr>
+            <a:r>
+              <a:rPr lang="en-US" sz="1300" dirty="0">
+                <a:solidFill>
+                  <a:srgbClr val="1C2833"/>
+                </a:solidFill>
+                <a:latin typeface="Georgia" pitchFamily="34" charset="0"/>
+                <a:ea typeface="Georgia" pitchFamily="34" charset="-122"/>
+                <a:cs typeface="Georgia" pitchFamily="34" charset="-120"/>
+              </a:rPr>
+              <a:t> to the Sun in January than in July. Distance is not what causes seasons. Tilt is.</a:t>
+            </a:r>
+            <a:endParaRPr lang="en-US" sz="1300" dirty="0"/>
+          </a:p>
+        </p:txBody>
+      </p:sp>
+      <p:sp>
+        <p:nvSpPr>
+          <p:cNvPr id="12" name="Text 10"/>
+          <p:cNvSpPr/>
+          <p:nvPr/>
+        </p:nvSpPr>
+        <p:spPr>
+          <a:xfrm>
+            <a:off x="406301" y="4434929"/>
+            <a:ext cx="8498026" cy="213271"/>
+          </a:xfrm>
+          <a:prstGeom prst="rect">
+            <a:avLst/>
+          </a:prstGeom>
+          <a:noFill/>
+          <a:ln/>
+        </p:spPr>
+        <p:txBody>
+          <a:bodyPr wrap="square" lIns="0" tIns="0" rIns="0" bIns="0" rtlCol="0" anchor="t"/>
+          <a:lstStyle/>
+          <a:p>
+            <a:pPr algn="l" indent="0" marL="0">
+              <a:lnSpc>
+                <a:spcPts val="1680"/>
+              </a:lnSpc>
+              <a:spcBef>
+                <a:spcPts val="300"/>
+              </a:spcBef>
+              <a:spcAft>
+                <a:spcPts val="300"/>
+              </a:spcAft>
+              <a:buNone/>
+            </a:pPr>
+            <a:r>
+              <a:rPr lang="en-US" sz="1200" dirty="0">
+                <a:solidFill>
+                  <a:srgbClr val="1C2833"/>
+                </a:solidFill>
+                <a:latin typeface="Arial" pitchFamily="34" charset="0"/>
+                <a:ea typeface="Arial" pitchFamily="34" charset="-122"/>
+                <a:cs typeface="Arial" pitchFamily="34" charset="-120"/>
+              </a:rPr>
+              <a:t>Middle ·  · IKS Curriculum</a:t>
+            </a:r>
+            <a:endParaRPr lang="en-US" sz="1200" dirty="0"/>
+          </a:p>
+        </p:txBody>
+      </p:sp>
+    </p:spTree>
+  </p:cSld>
+  <p:clrMapOvr>
+    <a:masterClrMapping/>
+  </p:clrMapOvr>
+</p:sld>
+</file>
+
+<file path=ppt/slides/slide18.xml><?xml version="1.0" encoding="utf-8"?>
+<p:sld xmlns:a="http://schemas.openxmlformats.org/drawingml/2006/main" xmlns:r="http://schemas.openxmlformats.org/officeDocument/2006/relationships" xmlns:p="http://schemas.openxmlformats.org/presentationml/2006/main">
+  <p:cSld name="Slide 18">
+    <p:bg>
+      <p:bgPr>
+        <a:solidFill>
+          <a:srgbClr val="FFFFFF"/>
+        </a:solidFill>
+      </p:bgPr>
+    </p:bg>
+    <p:spTree>
+      <p:nvGrpSpPr>
+        <p:cNvPr id="1" name=""/>
+        <p:cNvGrpSpPr/>
+        <p:nvPr/>
+      </p:nvGrpSpPr>
+      <p:grpSpPr>
+        <a:xfrm>
+          <a:off x="0" y="0"/>
+          <a:ext cx="0" cy="0"/>
+          <a:chOff x="0" y="0"/>
+          <a:chExt cx="0" cy="0"/>
+        </a:xfrm>
+      </p:grpSpPr>
+      <p:sp>
+        <p:nvSpPr>
+          <p:cNvPr id="2" name="Text 0"/>
+          <p:cNvSpPr/>
+          <p:nvPr/>
+        </p:nvSpPr>
+        <p:spPr>
+          <a:xfrm>
+            <a:off x="0" y="0"/>
+            <a:ext cx="9144000" cy="101501"/>
+          </a:xfrm>
+          <a:prstGeom prst="rect">
+            <a:avLst/>
+          </a:prstGeom>
+          <a:solidFill>
+            <a:srgbClr val="277884"/>
+          </a:solidFill>
+          <a:ln/>
+        </p:spPr>
+        <p:txBody>
+          <a:bodyPr wrap="square" rtlCol="0" anchor="ctr"/>
+          <a:lstStyle/>
+          <a:p>
+            <a:pPr indent="0" marL="0">
+              <a:buNone/>
+            </a:pPr>
+            <a:endParaRPr lang="en-US" dirty="0"/>
+          </a:p>
+        </p:txBody>
+      </p:sp>
+      <p:sp>
+        <p:nvSpPr>
+          <p:cNvPr id="3" name="Text 1"/>
+          <p:cNvSpPr/>
+          <p:nvPr/>
+        </p:nvSpPr>
+        <p:spPr>
+          <a:xfrm>
+            <a:off x="406301" y="457051"/>
+            <a:ext cx="8498026" cy="274290"/>
+          </a:xfrm>
+          <a:prstGeom prst="rect">
+            <a:avLst/>
+          </a:prstGeom>
+          <a:noFill/>
+          <a:ln/>
+        </p:spPr>
+        <p:txBody>
+          <a:bodyPr wrap="square" lIns="0" tIns="0" rIns="0" bIns="0" rtlCol="0" anchor="t"/>
+          <a:lstStyle/>
+          <a:p>
+            <a:pPr algn="l" indent="0" marL="0">
+              <a:lnSpc>
+                <a:spcPts val="2160"/>
+              </a:lnSpc>
+              <a:spcBef>
+                <a:spcPts val="600"/>
+              </a:spcBef>
+              <a:spcAft>
+                <a:spcPts val="800"/>
+              </a:spcAft>
+              <a:buNone/>
+            </a:pPr>
+            <a:r>
+              <a:rPr lang="en-US" sz="1800" b="1" dirty="0">
+                <a:solidFill>
+                  <a:srgbClr val="FE4447"/>
+                </a:solidFill>
+                <a:latin typeface="Georgia" pitchFamily="34" charset="0"/>
+                <a:ea typeface="Georgia" pitchFamily="34" charset="-122"/>
+                <a:cs typeface="Georgia" pitchFamily="34" charset="-120"/>
+              </a:rPr>
+              <a:t>Differentiation</a:t>
+            </a:r>
+            <a:endParaRPr lang="en-US" sz="1800" dirty="0"/>
+          </a:p>
+        </p:txBody>
+      </p:sp>
+      <p:sp>
+        <p:nvSpPr>
+          <p:cNvPr id="4" name="Text 2"/>
+          <p:cNvSpPr/>
+          <p:nvPr/>
+        </p:nvSpPr>
+        <p:spPr>
+          <a:xfrm>
+            <a:off x="634901" y="883593"/>
+            <a:ext cx="8102798" cy="937022"/>
+          </a:xfrm>
+          <a:prstGeom prst="rect">
+            <a:avLst/>
+          </a:prstGeom>
+          <a:noFill/>
+          <a:ln/>
+        </p:spPr>
+        <p:txBody>
+          <a:bodyPr wrap="square" lIns="0" tIns="0" rIns="0" bIns="0" rtlCol="0" anchor="t"/>
+          <a:lstStyle/>
+          <a:p>
+            <a:pPr algn="l" marL="342900" indent="-342900">
+              <a:lnSpc>
+                <a:spcPts val="1620"/>
+              </a:lnSpc>
+              <a:spcAft>
+                <a:spcPts val="300"/>
+              </a:spcAft>
+              <a:buSzPct val="100000"/>
+              <a:buChar char="•"/>
+            </a:pPr>
+            <a:r>
+              <a:rPr lang="en-US" sz="1200" b="1" dirty="0">
+                <a:solidFill>
+                  <a:srgbClr val="1C2833"/>
+                </a:solidFill>
+                <a:latin typeface="Arial" pitchFamily="34" charset="0"/>
+                <a:ea typeface="Arial" pitchFamily="34" charset="-122"/>
+                <a:cs typeface="Arial" pitchFamily="34" charset="-120"/>
+              </a:rPr>
+              <a:t>One tier up:</a:t>
+            </a:r>
+            <a:pPr algn="l" indent="0" marL="0">
+              <a:lnSpc>
+                <a:spcPts val="1620"/>
+              </a:lnSpc>
+              <a:spcAft>
+                <a:spcPts val="300"/>
+              </a:spcAft>
+              <a:buNone/>
+            </a:pPr>
+            <a:r>
+              <a:rPr lang="en-US" sz="1200" dirty="0">
+                <a:solidFill>
+                  <a:srgbClr val="1C2833"/>
+                </a:solidFill>
+                <a:latin typeface="Arial" pitchFamily="34" charset="0"/>
+                <a:ea typeface="Arial" pitchFamily="34" charset="-122"/>
+                <a:cs typeface="Arial" pitchFamily="34" charset="-120"/>
+              </a:rPr>
+              <a:t> What would the seasons be like if Earth's tilt were 0°? (No seasons; equal day/night everywhere all year; equatorial regions hot, polar regions cold permanently.) What if it were 45°? (Extreme seasons — the Arctic Circle would extend down to Delhi's latitude in summer.)</a:t>
+            </a:r>
+            <a:endParaRPr lang="en-US" sz="1200" dirty="0"/>
+          </a:p>
+          <a:p>
+            <a:pPr algn="l" marL="342900" indent="-342900">
+              <a:lnSpc>
+                <a:spcPts val="1620"/>
+              </a:lnSpc>
+              <a:spcAft>
+                <a:spcPts val="300"/>
+              </a:spcAft>
+              <a:buSzPct val="100000"/>
+              <a:buChar char="•"/>
+            </a:pPr>
+            <a:r>
+              <a:rPr lang="en-US" sz="1200" b="1" dirty="0">
+                <a:solidFill>
+                  <a:srgbClr val="1C2833"/>
+                </a:solidFill>
+                <a:latin typeface="Arial" pitchFamily="34" charset="0"/>
+                <a:ea typeface="Arial" pitchFamily="34" charset="-122"/>
+                <a:cs typeface="Arial" pitchFamily="34" charset="-120"/>
+              </a:rPr>
+              <a:t>One tier down:</a:t>
+            </a:r>
+            <a:pPr algn="l" indent="0" marL="0">
+              <a:lnSpc>
+                <a:spcPts val="1620"/>
+              </a:lnSpc>
+              <a:spcAft>
+                <a:spcPts val="300"/>
+              </a:spcAft>
+              <a:buNone/>
+            </a:pPr>
+            <a:r>
+              <a:rPr lang="en-US" sz="1200" dirty="0">
+                <a:solidFill>
+                  <a:srgbClr val="1C2833"/>
+                </a:solidFill>
+                <a:latin typeface="Arial" pitchFamily="34" charset="0"/>
+                <a:ea typeface="Arial" pitchFamily="34" charset="-122"/>
+                <a:cs typeface="Arial" pitchFamily="34" charset="-120"/>
+              </a:rPr>
+              <a:t> Focus on the demo. Just remember: "tilted toward = summer, tilted away = winter, sideways = equinox."</a:t>
+            </a:r>
+            <a:endParaRPr lang="en-US" sz="1200" dirty="0"/>
+          </a:p>
+        </p:txBody>
+      </p:sp>
+      <p:sp>
+        <p:nvSpPr>
+          <p:cNvPr id="5" name="Text 3"/>
+          <p:cNvSpPr/>
+          <p:nvPr/>
+        </p:nvSpPr>
+        <p:spPr>
+          <a:xfrm>
+            <a:off x="406301" y="4434929"/>
+            <a:ext cx="8498026" cy="213271"/>
+          </a:xfrm>
+          <a:prstGeom prst="rect">
+            <a:avLst/>
+          </a:prstGeom>
+          <a:noFill/>
+          <a:ln/>
+        </p:spPr>
+        <p:txBody>
+          <a:bodyPr wrap="square" lIns="0" tIns="0" rIns="0" bIns="0" rtlCol="0" anchor="t"/>
+          <a:lstStyle/>
+          <a:p>
+            <a:pPr algn="l" indent="0" marL="0">
+              <a:lnSpc>
+                <a:spcPts val="1680"/>
+              </a:lnSpc>
+              <a:spcBef>
+                <a:spcPts val="300"/>
+              </a:spcBef>
+              <a:spcAft>
+                <a:spcPts val="300"/>
+              </a:spcAft>
+              <a:buNone/>
+            </a:pPr>
+            <a:r>
+              <a:rPr lang="en-US" sz="1200" dirty="0">
+                <a:solidFill>
+                  <a:srgbClr val="1C2833"/>
+                </a:solidFill>
+                <a:latin typeface="Arial" pitchFamily="34" charset="0"/>
+                <a:ea typeface="Arial" pitchFamily="34" charset="-122"/>
+                <a:cs typeface="Arial" pitchFamily="34" charset="-120"/>
+              </a:rPr>
+              <a:t>Middle ·  · IKS Curriculum</a:t>
+            </a:r>
+            <a:endParaRPr lang="en-US" sz="1200" dirty="0"/>
+          </a:p>
+        </p:txBody>
+      </p:sp>
+    </p:spTree>
+  </p:cSld>
+  <p:clrMapOvr>
+    <a:masterClrMapping/>
+  </p:clrMapOvr>
+</p:sld>
+</file>
+
+<file path=ppt/slides/slide19.xml><?xml version="1.0" encoding="utf-8"?>
+<p:sld xmlns:a="http://schemas.openxmlformats.org/drawingml/2006/main" xmlns:r="http://schemas.openxmlformats.org/officeDocument/2006/relationships" xmlns:p="http://schemas.openxmlformats.org/presentationml/2006/main">
+  <p:cSld name="Slide 19">
+    <p:bg>
+      <p:bgPr>
+        <a:solidFill>
+          <a:srgbClr val="FFFFFF"/>
+        </a:solidFill>
+      </p:bgPr>
+    </p:bg>
+    <p:spTree>
+      <p:nvGrpSpPr>
+        <p:cNvPr id="1" name=""/>
+        <p:cNvGrpSpPr/>
+        <p:nvPr/>
+      </p:nvGrpSpPr>
+      <p:grpSpPr>
+        <a:xfrm>
+          <a:off x="0" y="0"/>
+          <a:ext cx="0" cy="0"/>
+          <a:chOff x="0" y="0"/>
+          <a:chExt cx="0" cy="0"/>
+        </a:xfrm>
+      </p:grpSpPr>
+      <p:sp>
+        <p:nvSpPr>
+          <p:cNvPr id="2" name="Text 0"/>
+          <p:cNvSpPr/>
+          <p:nvPr/>
+        </p:nvSpPr>
+        <p:spPr>
+          <a:xfrm>
+            <a:off x="0" y="0"/>
+            <a:ext cx="9144000" cy="101501"/>
+          </a:xfrm>
+          <a:prstGeom prst="rect">
+            <a:avLst/>
+          </a:prstGeom>
+          <a:solidFill>
+            <a:srgbClr val="277884"/>
+          </a:solidFill>
+          <a:ln/>
+        </p:spPr>
+        <p:txBody>
+          <a:bodyPr wrap="square" rtlCol="0" anchor="ctr"/>
+          <a:lstStyle/>
+          <a:p>
+            <a:pPr indent="0" marL="0">
+              <a:buNone/>
+            </a:pPr>
+            <a:endParaRPr lang="en-US" dirty="0"/>
+          </a:p>
+        </p:txBody>
+      </p:sp>
+      <p:sp>
+        <p:nvSpPr>
+          <p:cNvPr id="3" name="Text 1"/>
+          <p:cNvSpPr/>
+          <p:nvPr/>
+        </p:nvSpPr>
+        <p:spPr>
+          <a:xfrm>
+            <a:off x="406301" y="457051"/>
+            <a:ext cx="8498026" cy="274290"/>
+          </a:xfrm>
+          <a:prstGeom prst="rect">
+            <a:avLst/>
+          </a:prstGeom>
+          <a:noFill/>
+          <a:ln/>
+        </p:spPr>
+        <p:txBody>
+          <a:bodyPr wrap="square" lIns="0" tIns="0" rIns="0" bIns="0" rtlCol="0" anchor="t"/>
+          <a:lstStyle/>
+          <a:p>
+            <a:pPr algn="l" indent="0" marL="0">
+              <a:lnSpc>
+                <a:spcPts val="2160"/>
+              </a:lnSpc>
+              <a:spcBef>
+                <a:spcPts val="600"/>
+              </a:spcBef>
+              <a:spcAft>
+                <a:spcPts val="800"/>
+              </a:spcAft>
+              <a:buNone/>
+            </a:pPr>
+            <a:r>
+              <a:rPr lang="en-US" sz="1800" b="1" dirty="0">
+                <a:solidFill>
+                  <a:srgbClr val="FE4447"/>
+                </a:solidFill>
+                <a:latin typeface="Georgia" pitchFamily="34" charset="0"/>
+                <a:ea typeface="Georgia" pitchFamily="34" charset="-122"/>
+                <a:cs typeface="Georgia" pitchFamily="34" charset="-120"/>
+              </a:rPr>
+              <a:t>Teacher notes</a:t>
+            </a:r>
+            <a:endParaRPr lang="en-US" sz="1800" dirty="0"/>
+          </a:p>
+        </p:txBody>
+      </p:sp>
+      <p:sp>
+        <p:nvSpPr>
+          <p:cNvPr id="4" name="Text 2"/>
+          <p:cNvSpPr/>
+          <p:nvPr/>
+        </p:nvSpPr>
+        <p:spPr>
+          <a:xfrm>
+            <a:off x="634901" y="883593"/>
+            <a:ext cx="8102798" cy="1592163"/>
+          </a:xfrm>
+          <a:prstGeom prst="rect">
+            <a:avLst/>
+          </a:prstGeom>
+          <a:noFill/>
+          <a:ln/>
+        </p:spPr>
+        <p:txBody>
+          <a:bodyPr wrap="square" lIns="0" tIns="0" rIns="0" bIns="0" rtlCol="0" anchor="t"/>
+          <a:lstStyle/>
+          <a:p>
+            <a:pPr algn="l" marL="342900" indent="-342900">
+              <a:lnSpc>
+                <a:spcPts val="1620"/>
+              </a:lnSpc>
+              <a:spcAft>
+                <a:spcPts val="300"/>
+              </a:spcAft>
+              <a:buSzPct val="100000"/>
+              <a:buChar char="•"/>
+            </a:pPr>
+            <a:r>
+              <a:rPr lang="en-US" sz="1200" dirty="0">
+                <a:solidFill>
+                  <a:srgbClr val="1C2833"/>
+                </a:solidFill>
+                <a:latin typeface="Arial" pitchFamily="34" charset="0"/>
+                <a:ea typeface="Arial" pitchFamily="34" charset="-122"/>
+                <a:cs typeface="Arial" pitchFamily="34" charset="-120"/>
+              </a:rPr>
+              <a:t>The "Earth closer to Sun = summer" misconception is </a:t>
+            </a:r>
+            <a:pPr algn="l" indent="0" marL="0">
+              <a:lnSpc>
+                <a:spcPts val="1620"/>
+              </a:lnSpc>
+              <a:spcAft>
+                <a:spcPts val="300"/>
+              </a:spcAft>
+              <a:buNone/>
+            </a:pPr>
+            <a:r>
+              <a:rPr lang="en-US" sz="1200" i="1" dirty="0">
+                <a:solidFill>
+                  <a:srgbClr val="1C2833"/>
+                </a:solidFill>
+                <a:latin typeface="Arial" pitchFamily="34" charset="0"/>
+                <a:ea typeface="Arial" pitchFamily="34" charset="-122"/>
+                <a:cs typeface="Arial" pitchFamily="34" charset="-120"/>
+              </a:rPr>
+              <a:t>very</a:t>
+            </a:r>
+            <a:pPr algn="l" indent="0" marL="0">
+              <a:lnSpc>
+                <a:spcPts val="1620"/>
+              </a:lnSpc>
+              <a:spcAft>
+                <a:spcPts val="300"/>
+              </a:spcAft>
+              <a:buNone/>
+            </a:pPr>
+            <a:r>
+              <a:rPr lang="en-US" sz="1200" dirty="0">
+                <a:solidFill>
+                  <a:srgbClr val="1C2833"/>
+                </a:solidFill>
+                <a:latin typeface="Arial" pitchFamily="34" charset="0"/>
+                <a:ea typeface="Arial" pitchFamily="34" charset="-122"/>
+                <a:cs typeface="Arial" pitchFamily="34" charset="-120"/>
+              </a:rPr>
+              <a:t> persistent. Highlight that India's June is summer despite Earth being farthest from the Sun in July. The misconception breaks instantly when this is named.</a:t>
+            </a:r>
+            <a:endParaRPr lang="en-US" sz="1200" dirty="0"/>
+          </a:p>
+          <a:p>
+            <a:pPr algn="l" marL="342900" indent="-342900">
+              <a:lnSpc>
+                <a:spcPts val="1620"/>
+              </a:lnSpc>
+              <a:spcAft>
+                <a:spcPts val="300"/>
+              </a:spcAft>
+              <a:buSzPct val="100000"/>
+              <a:buChar char="•"/>
+            </a:pPr>
+            <a:r>
+              <a:rPr lang="en-US" sz="1200" dirty="0">
+                <a:solidFill>
+                  <a:srgbClr val="1C2833"/>
+                </a:solidFill>
+                <a:latin typeface="Arial" pitchFamily="34" charset="0"/>
+                <a:ea typeface="Arial" pitchFamily="34" charset="-122"/>
+                <a:cs typeface="Arial" pitchFamily="34" charset="-120"/>
+              </a:rPr>
+              <a:t>Some students will ask: </a:t>
+            </a:r>
+            <a:pPr algn="l" indent="0" marL="0">
+              <a:lnSpc>
+                <a:spcPts val="1620"/>
+              </a:lnSpc>
+              <a:spcAft>
+                <a:spcPts val="300"/>
+              </a:spcAft>
+              <a:buNone/>
+            </a:pPr>
+            <a:r>
+              <a:rPr lang="en-US" sz="1200" i="1" dirty="0">
+                <a:solidFill>
+                  <a:srgbClr val="1C2833"/>
+                </a:solidFill>
+                <a:latin typeface="Arial" pitchFamily="34" charset="0"/>
+                <a:ea typeface="Arial" pitchFamily="34" charset="-122"/>
+                <a:cs typeface="Arial" pitchFamily="34" charset="-120"/>
+              </a:rPr>
+              <a:t>"Then why is India summer in June and not in winter like Australia?"</a:t>
+            </a:r>
+            <a:pPr algn="l" indent="0" marL="0">
+              <a:lnSpc>
+                <a:spcPts val="1620"/>
+              </a:lnSpc>
+              <a:spcAft>
+                <a:spcPts val="300"/>
+              </a:spcAft>
+              <a:buNone/>
+            </a:pPr>
+            <a:r>
+              <a:rPr lang="en-US" sz="1200" dirty="0">
+                <a:solidFill>
+                  <a:srgbClr val="1C2833"/>
+                </a:solidFill>
+                <a:latin typeface="Arial" pitchFamily="34" charset="0"/>
+                <a:ea typeface="Arial" pitchFamily="34" charset="-122"/>
+                <a:cs typeface="Arial" pitchFamily="34" charset="-120"/>
+              </a:rPr>
+              <a:t> — Yes, India is in the Northern Hemisphere; Australia is in the Southern. Same Earth tilt, opposite seasons. (Australia is wearing shorts in December, jumpers in June.)</a:t>
+            </a:r>
+            <a:endParaRPr lang="en-US" sz="1200" dirty="0"/>
+          </a:p>
+          <a:p>
+            <a:pPr algn="l" marL="342900" indent="-342900">
+              <a:lnSpc>
+                <a:spcPts val="1620"/>
+              </a:lnSpc>
+              <a:spcAft>
+                <a:spcPts val="300"/>
+              </a:spcAft>
+              <a:buSzPct val="100000"/>
+              <a:buChar char="•"/>
+            </a:pPr>
+            <a:r>
+              <a:rPr lang="en-US" sz="1200" dirty="0">
+                <a:solidFill>
+                  <a:srgbClr val="1C2833"/>
+                </a:solidFill>
+                <a:latin typeface="Arial" pitchFamily="34" charset="0"/>
+                <a:ea typeface="Arial" pitchFamily="34" charset="-122"/>
+                <a:cs typeface="Arial" pitchFamily="34" charset="-120"/>
+              </a:rPr>
+              <a:t>The demo will fail visually if the room is too bright. If you can't darken the room, use a smaller globe and bring the torch closer (3–4 cm from the globe surface).</a:t>
             </a:r>
             <a:endParaRPr lang="en-US" sz="1200" dirty="0"/>
           </a:p>
@@ -2755,7 +6208,7 @@
                 <a:ea typeface="Georgia" pitchFamily="34" charset="-122"/>
                 <a:cs typeface="Georgia" pitchFamily="34" charset="-120"/>
               </a:rPr>
-              <a:t>Materials</a:t>
+              <a:t>Learning objective</a:t>
             </a:r>
             <a:endParaRPr lang="en-US" sz="1800" dirty="0"/>
           </a:p>
@@ -2770,7 +6223,7 @@
         <p:spPr>
           <a:xfrm>
             <a:off x="406301" y="870942"/>
-            <a:ext cx="8498026" cy="639812"/>
+            <a:ext cx="8498026" cy="426541"/>
           </a:xfrm>
           <a:prstGeom prst="rect">
             <a:avLst/>
@@ -2803,7 +6256,211 @@
                 <a:ea typeface="Arial" pitchFamily="34" charset="-122"/>
                 <a:cs typeface="Arial" pitchFamily="34" charset="-120"/>
               </a:rPr>
-              <a:t>– A small globe (or a ball with N and S marked) — one per group ideally, one as demo minimum – A strong torch / table lamp (the "Sun") – A protractor (to verify the tilt angle) – A blackout / curtained room if possible, OR a hallway – Student notebooks</a:t>
+              <a:t>By the end of this lesson, students will explain that Earth's ~23.5° axial tilt — not its distance from the Sun — is what causes the seasons, and demonstrate this with a torch-and-globe model.</a:t>
+            </a:r>
+            <a:endParaRPr lang="en-US" sz="1200" dirty="0"/>
+          </a:p>
+        </p:txBody>
+      </p:sp>
+      <p:sp>
+        <p:nvSpPr>
+          <p:cNvPr id="5" name="Text 3"/>
+          <p:cNvSpPr/>
+          <p:nvPr/>
+        </p:nvSpPr>
+        <p:spPr>
+          <a:xfrm>
+            <a:off x="406301" y="4434929"/>
+            <a:ext cx="8498026" cy="213271"/>
+          </a:xfrm>
+          <a:prstGeom prst="rect">
+            <a:avLst/>
+          </a:prstGeom>
+          <a:noFill/>
+          <a:ln/>
+        </p:spPr>
+        <p:txBody>
+          <a:bodyPr wrap="square" lIns="0" tIns="0" rIns="0" bIns="0" rtlCol="0" anchor="t"/>
+          <a:lstStyle/>
+          <a:p>
+            <a:pPr algn="l" indent="0" marL="0">
+              <a:lnSpc>
+                <a:spcPts val="1680"/>
+              </a:lnSpc>
+              <a:spcBef>
+                <a:spcPts val="300"/>
+              </a:spcBef>
+              <a:spcAft>
+                <a:spcPts val="300"/>
+              </a:spcAft>
+              <a:buNone/>
+            </a:pPr>
+            <a:r>
+              <a:rPr lang="en-US" sz="1200" dirty="0">
+                <a:solidFill>
+                  <a:srgbClr val="1C2833"/>
+                </a:solidFill>
+                <a:latin typeface="Arial" pitchFamily="34" charset="0"/>
+                <a:ea typeface="Arial" pitchFamily="34" charset="-122"/>
+                <a:cs typeface="Arial" pitchFamily="34" charset="-120"/>
+              </a:rPr>
+              <a:t>Middle ·  · IKS Curriculum</a:t>
+            </a:r>
+            <a:endParaRPr lang="en-US" sz="1200" dirty="0"/>
+          </a:p>
+        </p:txBody>
+      </p:sp>
+    </p:spTree>
+  </p:cSld>
+  <p:clrMapOvr>
+    <a:masterClrMapping/>
+  </p:clrMapOvr>
+</p:sld>
+</file>
+
+<file path=ppt/slides/slide20.xml><?xml version="1.0" encoding="utf-8"?>
+<p:sld xmlns:a="http://schemas.openxmlformats.org/drawingml/2006/main" xmlns:r="http://schemas.openxmlformats.org/officeDocument/2006/relationships" xmlns:p="http://schemas.openxmlformats.org/presentationml/2006/main">
+  <p:cSld name="Slide 20">
+    <p:bg>
+      <p:bgPr>
+        <a:solidFill>
+          <a:srgbClr val="FFFFFF"/>
+        </a:solidFill>
+      </p:bgPr>
+    </p:bg>
+    <p:spTree>
+      <p:nvGrpSpPr>
+        <p:cNvPr id="1" name=""/>
+        <p:cNvGrpSpPr/>
+        <p:nvPr/>
+      </p:nvGrpSpPr>
+      <p:grpSpPr>
+        <a:xfrm>
+          <a:off x="0" y="0"/>
+          <a:ext cx="0" cy="0"/>
+          <a:chOff x="0" y="0"/>
+          <a:chExt cx="0" cy="0"/>
+        </a:xfrm>
+      </p:grpSpPr>
+      <p:sp>
+        <p:nvSpPr>
+          <p:cNvPr id="2" name="Text 0"/>
+          <p:cNvSpPr/>
+          <p:nvPr/>
+        </p:nvSpPr>
+        <p:spPr>
+          <a:xfrm>
+            <a:off x="0" y="0"/>
+            <a:ext cx="9144000" cy="101501"/>
+          </a:xfrm>
+          <a:prstGeom prst="rect">
+            <a:avLst/>
+          </a:prstGeom>
+          <a:solidFill>
+            <a:srgbClr val="277884"/>
+          </a:solidFill>
+          <a:ln/>
+        </p:spPr>
+        <p:txBody>
+          <a:bodyPr wrap="square" rtlCol="0" anchor="ctr"/>
+          <a:lstStyle/>
+          <a:p>
+            <a:pPr indent="0" marL="0">
+              <a:buNone/>
+            </a:pPr>
+            <a:endParaRPr lang="en-US" dirty="0"/>
+          </a:p>
+        </p:txBody>
+      </p:sp>
+      <p:sp>
+        <p:nvSpPr>
+          <p:cNvPr id="3" name="Text 1"/>
+          <p:cNvSpPr/>
+          <p:nvPr/>
+        </p:nvSpPr>
+        <p:spPr>
+          <a:xfrm>
+            <a:off x="406301" y="457051"/>
+            <a:ext cx="8498026" cy="274290"/>
+          </a:xfrm>
+          <a:prstGeom prst="rect">
+            <a:avLst/>
+          </a:prstGeom>
+          <a:noFill/>
+          <a:ln/>
+        </p:spPr>
+        <p:txBody>
+          <a:bodyPr wrap="square" lIns="0" tIns="0" rIns="0" bIns="0" rtlCol="0" anchor="t"/>
+          <a:lstStyle/>
+          <a:p>
+            <a:pPr algn="l" indent="0" marL="0">
+              <a:lnSpc>
+                <a:spcPts val="2160"/>
+              </a:lnSpc>
+              <a:spcBef>
+                <a:spcPts val="600"/>
+              </a:spcBef>
+              <a:spcAft>
+                <a:spcPts val="800"/>
+              </a:spcAft>
+              <a:buNone/>
+            </a:pPr>
+            <a:r>
+              <a:rPr lang="en-US" sz="1800" b="1" dirty="0">
+                <a:solidFill>
+                  <a:srgbClr val="FE4447"/>
+                </a:solidFill>
+                <a:latin typeface="Georgia" pitchFamily="34" charset="0"/>
+                <a:ea typeface="Georgia" pitchFamily="34" charset="-122"/>
+                <a:cs typeface="Georgia" pitchFamily="34" charset="-120"/>
+              </a:rPr>
+              <a:t>Citation(s) used in this lesson</a:t>
+            </a:r>
+            <a:endParaRPr lang="en-US" sz="1800" dirty="0"/>
+          </a:p>
+        </p:txBody>
+      </p:sp>
+      <p:sp>
+        <p:nvSpPr>
+          <p:cNvPr id="4" name="Text 2"/>
+          <p:cNvSpPr/>
+          <p:nvPr/>
+        </p:nvSpPr>
+        <p:spPr>
+          <a:xfrm>
+            <a:off x="634901" y="883593"/>
+            <a:ext cx="8102798" cy="487561"/>
+          </a:xfrm>
+          <a:prstGeom prst="rect">
+            <a:avLst/>
+          </a:prstGeom>
+          <a:noFill/>
+          <a:ln/>
+        </p:spPr>
+        <p:txBody>
+          <a:bodyPr wrap="square" lIns="0" tIns="0" rIns="0" bIns="0" rtlCol="0" anchor="t"/>
+          <a:lstStyle/>
+          <a:p>
+            <a:pPr algn="l" marL="342900" indent="-342900">
+              <a:lnSpc>
+                <a:spcPts val="1620"/>
+              </a:lnSpc>
+              <a:spcAft>
+                <a:spcPts val="300"/>
+              </a:spcAft>
+              <a:buSzPct val="100000"/>
+              <a:buChar char="•"/>
+            </a:pPr>
+            <a:r>
+              <a:rPr lang="en-US" sz="1200" dirty="0">
+                <a:solidFill>
+                  <a:srgbClr val="1C2833"/>
+                </a:solidFill>
+                <a:latin typeface="Arial" pitchFamily="34" charset="0"/>
+                <a:ea typeface="Arial" pitchFamily="34" charset="-122"/>
+                <a:cs typeface="Arial" pitchFamily="34" charset="-120"/>
+              </a:rPr>
+              <a:t>Modern axial-tilt and orbital values from standard NCERT-level astronomy. No primary-source citation needed at this band.</a:t>
             </a:r>
             <a:endParaRPr lang="en-US" sz="1200" dirty="0"/>
           </a:p>
@@ -2961,7 +6618,7 @@
                 <a:ea typeface="Georgia" pitchFamily="34" charset="-122"/>
                 <a:cs typeface="Georgia" pitchFamily="34" charset="-120"/>
               </a:rPr>
-              <a:t>Vocabulary introduced today</a:t>
+              <a:t>Materials</a:t>
             </a:r>
             <a:endParaRPr lang="en-US" sz="1800" dirty="0"/>
           </a:p>
@@ -2976,7 +6633,7 @@
         <p:spPr>
           <a:xfrm>
             <a:off x="634901" y="883593"/>
-            <a:ext cx="8102798" cy="693241"/>
+            <a:ext cx="8102798" cy="1257002"/>
           </a:xfrm>
           <a:prstGeom prst="rect">
             <a:avLst/>
@@ -2999,24 +6656,28 @@
               <a:buChar char="•"/>
             </a:pPr>
             <a:r>
-              <a:rPr lang="en-US" sz="1200" b="1" dirty="0">
-                <a:solidFill>
-                  <a:srgbClr val="1C2833"/>
-                </a:solidFill>
-                <a:latin typeface="Arial" pitchFamily="34" charset="0"/>
-                <a:ea typeface="Arial" pitchFamily="34" charset="-122"/>
-                <a:cs typeface="Arial" pitchFamily="34" charset="-120"/>
-              </a:rPr>
-              <a:t>Axial tilt</a:t>
-            </a:r>
-            <a:pPr algn="l" indent="0" marL="0">
+              <a:rPr lang="en-US" sz="1200" dirty="0">
+                <a:solidFill>
+                  <a:srgbClr val="1C2833"/>
+                </a:solidFill>
+                <a:latin typeface="Arial" pitchFamily="34" charset="0"/>
+                <a:ea typeface="Arial" pitchFamily="34" charset="-122"/>
+                <a:cs typeface="Arial" pitchFamily="34" charset="-120"/>
+              </a:rPr>
+              <a:t>A small globe (or a ball with N and S marked) — one per group ideally, one as demo minimum</a:t>
+            </a:r>
+            <a:endParaRPr lang="en-US" sz="1200" dirty="0"/>
+          </a:p>
+          <a:p>
+            <a:pPr algn="l" marL="342900" indent="-342900">
               <a:lnSpc>
                 <a:spcPts val="1620"/>
               </a:lnSpc>
               <a:spcAft>
                 <a:spcPts val="300"/>
               </a:spcAft>
-              <a:buNone/>
+              <a:buSzPct val="100000"/>
+              <a:buChar char="•"/>
             </a:pPr>
             <a:r>
               <a:rPr lang="en-US" sz="1200" dirty="0">
@@ -3027,201 +6688,87 @@
                 <a:ea typeface="Arial" pitchFamily="34" charset="-122"/>
                 <a:cs typeface="Arial" pitchFamily="34" charset="-120"/>
               </a:rPr>
-              <a:t> (obliquity of the ecliptic) — Earth's rotation axis is tilted ~23.5° from a line perpendicular to its orbital plane. This tilt does not change over a year — Earth keeps its tilt pointed in the same direction in space as it goes around the Sun.</a:t>
+              <a:t>A strong torch / table lamp (the "Sun")</a:t>
             </a:r>
             <a:endParaRPr lang="en-US" sz="1200" dirty="0"/>
           </a:p>
+          <a:p>
+            <a:pPr algn="l" marL="342900" indent="-342900">
+              <a:lnSpc>
+                <a:spcPts val="1620"/>
+              </a:lnSpc>
+              <a:spcAft>
+                <a:spcPts val="300"/>
+              </a:spcAft>
+              <a:buSzPct val="100000"/>
+              <a:buChar char="•"/>
+            </a:pPr>
+            <a:r>
+              <a:rPr lang="en-US" sz="1200" dirty="0">
+                <a:solidFill>
+                  <a:srgbClr val="1C2833"/>
+                </a:solidFill>
+                <a:latin typeface="Arial" pitchFamily="34" charset="0"/>
+                <a:ea typeface="Arial" pitchFamily="34" charset="-122"/>
+                <a:cs typeface="Arial" pitchFamily="34" charset="-120"/>
+              </a:rPr>
+              <a:t>A protractor (to verify the tilt angle)</a:t>
+            </a:r>
+            <a:endParaRPr lang="en-US" sz="1200" dirty="0"/>
+          </a:p>
+          <a:p>
+            <a:pPr algn="l" marL="342900" indent="-342900">
+              <a:lnSpc>
+                <a:spcPts val="1620"/>
+              </a:lnSpc>
+              <a:spcAft>
+                <a:spcPts val="300"/>
+              </a:spcAft>
+              <a:buSzPct val="100000"/>
+              <a:buChar char="•"/>
+            </a:pPr>
+            <a:r>
+              <a:rPr lang="en-US" sz="1200" dirty="0">
+                <a:solidFill>
+                  <a:srgbClr val="1C2833"/>
+                </a:solidFill>
+                <a:latin typeface="Arial" pitchFamily="34" charset="0"/>
+                <a:ea typeface="Arial" pitchFamily="34" charset="-122"/>
+                <a:cs typeface="Arial" pitchFamily="34" charset="-120"/>
+              </a:rPr>
+              <a:t>A blackout / curtained room if possible, OR a hallway</a:t>
+            </a:r>
+            <a:endParaRPr lang="en-US" sz="1200" dirty="0"/>
+          </a:p>
+          <a:p>
+            <a:pPr algn="l" marL="342900" indent="-342900">
+              <a:lnSpc>
+                <a:spcPts val="1620"/>
+              </a:lnSpc>
+              <a:spcAft>
+                <a:spcPts val="300"/>
+              </a:spcAft>
+              <a:buSzPct val="100000"/>
+              <a:buChar char="•"/>
+            </a:pPr>
+            <a:r>
+              <a:rPr lang="en-US" sz="1200" dirty="0">
+                <a:solidFill>
+                  <a:srgbClr val="1C2833"/>
+                </a:solidFill>
+                <a:latin typeface="Arial" pitchFamily="34" charset="0"/>
+                <a:ea typeface="Arial" pitchFamily="34" charset="-122"/>
+                <a:cs typeface="Arial" pitchFamily="34" charset="-120"/>
+              </a:rPr>
+              <a:t>Student notebooks</a:t>
+            </a:r>
+            <a:endParaRPr lang="en-US" sz="1200" dirty="0"/>
+          </a:p>
         </p:txBody>
       </p:sp>
       <p:sp>
         <p:nvSpPr>
           <p:cNvPr id="5" name="Text 3"/>
-          <p:cNvSpPr/>
-          <p:nvPr/>
-        </p:nvSpPr>
-        <p:spPr>
-          <a:xfrm>
-            <a:off x="406301" y="1665684"/>
-            <a:ext cx="8498026" cy="426541"/>
-          </a:xfrm>
-          <a:prstGeom prst="rect">
-            <a:avLst/>
-          </a:prstGeom>
-          <a:noFill/>
-          <a:ln/>
-        </p:spPr>
-        <p:txBody>
-          <a:bodyPr wrap="square" lIns="0" tIns="0" rIns="0" bIns="0" rtlCol="0" anchor="t"/>
-          <a:lstStyle/>
-          <a:p>
-            <a:pPr algn="l" indent="0" marL="0">
-              <a:lnSpc>
-                <a:spcPts val="1680"/>
-              </a:lnSpc>
-              <a:spcBef>
-                <a:spcPts val="300"/>
-              </a:spcBef>
-              <a:spcAft>
-                <a:spcPts val="300"/>
-              </a:spcAft>
-              <a:buNone/>
-            </a:pPr>
-            <a:r>
-              <a:rPr lang="en-US" sz="1200" dirty="0">
-                <a:solidFill>
-                  <a:srgbClr val="1C2833"/>
-                </a:solidFill>
-                <a:latin typeface="Arial" pitchFamily="34" charset="0"/>
-                <a:ea typeface="Arial" pitchFamily="34" charset="-122"/>
-                <a:cs typeface="Arial" pitchFamily="34" charset="-120"/>
-              </a:rPr>
-              <a:t>(No new Sanskrit term today — yesterday's </a:t>
-            </a:r>
-            <a:pPr algn="l" indent="0" marL="0">
-              <a:lnSpc>
-                <a:spcPts val="1680"/>
-              </a:lnSpc>
-              <a:spcBef>
-                <a:spcPts val="300"/>
-              </a:spcBef>
-              <a:spcAft>
-                <a:spcPts val="300"/>
-              </a:spcAft>
-              <a:buNone/>
-            </a:pPr>
-            <a:r>
-              <a:rPr lang="en-US" sz="1200" i="1" dirty="0">
-                <a:solidFill>
-                  <a:srgbClr val="1C2833"/>
-                </a:solidFill>
-                <a:latin typeface="Arial" pitchFamily="34" charset="0"/>
-                <a:ea typeface="Arial" pitchFamily="34" charset="-122"/>
-                <a:cs typeface="Arial" pitchFamily="34" charset="-120"/>
-              </a:rPr>
-              <a:t>krānti-vṛtta</a:t>
-            </a:r>
-            <a:pPr algn="l" indent="0" marL="0">
-              <a:lnSpc>
-                <a:spcPts val="1680"/>
-              </a:lnSpc>
-              <a:spcBef>
-                <a:spcPts val="300"/>
-              </a:spcBef>
-              <a:spcAft>
-                <a:spcPts val="300"/>
-              </a:spcAft>
-              <a:buNone/>
-            </a:pPr>
-            <a:r>
-              <a:rPr lang="en-US" sz="1200" dirty="0">
-                <a:solidFill>
-                  <a:srgbClr val="1C2833"/>
-                </a:solidFill>
-                <a:latin typeface="Arial" pitchFamily="34" charset="0"/>
-                <a:ea typeface="Arial" pitchFamily="34" charset="-122"/>
-                <a:cs typeface="Arial" pitchFamily="34" charset="-120"/>
-              </a:rPr>
-              <a:t> covers it. The axial tilt is what </a:t>
-            </a:r>
-            <a:pPr algn="l" indent="0" marL="0">
-              <a:lnSpc>
-                <a:spcPts val="1680"/>
-              </a:lnSpc>
-              <a:spcBef>
-                <a:spcPts val="300"/>
-              </a:spcBef>
-              <a:spcAft>
-                <a:spcPts val="300"/>
-              </a:spcAft>
-              <a:buNone/>
-            </a:pPr>
-            <a:r>
-              <a:rPr lang="en-US" sz="1200" i="1" dirty="0">
-                <a:solidFill>
-                  <a:srgbClr val="1C2833"/>
-                </a:solidFill>
-                <a:latin typeface="Arial" pitchFamily="34" charset="0"/>
-                <a:ea typeface="Arial" pitchFamily="34" charset="-122"/>
-                <a:cs typeface="Arial" pitchFamily="34" charset="-120"/>
-              </a:rPr>
-              <a:t>causes</a:t>
-            </a:r>
-            <a:pPr algn="l" indent="0" marL="0">
-              <a:lnSpc>
-                <a:spcPts val="1680"/>
-              </a:lnSpc>
-              <a:spcBef>
-                <a:spcPts val="300"/>
-              </a:spcBef>
-              <a:spcAft>
-                <a:spcPts val="300"/>
-              </a:spcAft>
-              <a:buNone/>
-            </a:pPr>
-            <a:r>
-              <a:rPr lang="en-US" sz="1200" dirty="0">
-                <a:solidFill>
-                  <a:srgbClr val="1C2833"/>
-                </a:solidFill>
-                <a:latin typeface="Arial" pitchFamily="34" charset="0"/>
-                <a:ea typeface="Arial" pitchFamily="34" charset="-122"/>
-                <a:cs typeface="Arial" pitchFamily="34" charset="-120"/>
-              </a:rPr>
-              <a:t> the ecliptic to be a </a:t>
-            </a:r>
-            <a:pPr algn="l" indent="0" marL="0">
-              <a:lnSpc>
-                <a:spcPts val="1680"/>
-              </a:lnSpc>
-              <a:spcBef>
-                <a:spcPts val="300"/>
-              </a:spcBef>
-              <a:spcAft>
-                <a:spcPts val="300"/>
-              </a:spcAft>
-              <a:buNone/>
-            </a:pPr>
-            <a:r>
-              <a:rPr lang="en-US" sz="1200" i="1" dirty="0">
-                <a:solidFill>
-                  <a:srgbClr val="1C2833"/>
-                </a:solidFill>
-                <a:latin typeface="Arial" pitchFamily="34" charset="0"/>
-                <a:ea typeface="Arial" pitchFamily="34" charset="-122"/>
-                <a:cs typeface="Arial" pitchFamily="34" charset="-120"/>
-              </a:rPr>
-              <a:t>circle</a:t>
-            </a:r>
-            <a:pPr algn="l" indent="0" marL="0">
-              <a:lnSpc>
-                <a:spcPts val="1680"/>
-              </a:lnSpc>
-              <a:spcBef>
-                <a:spcPts val="300"/>
-              </a:spcBef>
-              <a:spcAft>
-                <a:spcPts val="300"/>
-              </a:spcAft>
-              <a:buNone/>
-            </a:pPr>
-            <a:r>
-              <a:rPr lang="en-US" sz="1200" dirty="0">
-                <a:solidFill>
-                  <a:srgbClr val="1C2833"/>
-                </a:solidFill>
-                <a:latin typeface="Arial" pitchFamily="34" charset="0"/>
-                <a:ea typeface="Arial" pitchFamily="34" charset="-122"/>
-                <a:cs typeface="Arial" pitchFamily="34" charset="-120"/>
-              </a:rPr>
-              <a:t> on the sky rather than just running along the equator.)</a:t>
-            </a:r>
-            <a:endParaRPr lang="en-US" sz="1200" dirty="0"/>
-          </a:p>
-        </p:txBody>
-      </p:sp>
-      <p:sp>
-        <p:nvSpPr>
-          <p:cNvPr id="6" name="Text 4"/>
           <p:cNvSpPr/>
           <p:nvPr/>
         </p:nvSpPr>
@@ -3371,7 +6918,7 @@
                 <a:ea typeface="Georgia" pitchFamily="34" charset="-122"/>
                 <a:cs typeface="Georgia" pitchFamily="34" charset="-120"/>
               </a:rPr>
-              <a:t>Lesson flow</a:t>
+              <a:t>Vocabulary introduced today</a:t>
             </a:r>
             <a:endParaRPr lang="en-US" sz="1800" dirty="0"/>
           </a:p>
@@ -3380,6 +6927,258 @@
       <p:sp>
         <p:nvSpPr>
           <p:cNvPr id="4" name="Text 2"/>
+          <p:cNvSpPr/>
+          <p:nvPr/>
+        </p:nvSpPr>
+        <p:spPr>
+          <a:xfrm>
+            <a:off x="634901" y="883593"/>
+            <a:ext cx="8102798" cy="693241"/>
+          </a:xfrm>
+          <a:prstGeom prst="rect">
+            <a:avLst/>
+          </a:prstGeom>
+          <a:noFill/>
+          <a:ln/>
+        </p:spPr>
+        <p:txBody>
+          <a:bodyPr wrap="square" lIns="0" tIns="0" rIns="0" bIns="0" rtlCol="0" anchor="t"/>
+          <a:lstStyle/>
+          <a:p>
+            <a:pPr algn="l" marL="342900" indent="-342900">
+              <a:lnSpc>
+                <a:spcPts val="1620"/>
+              </a:lnSpc>
+              <a:spcAft>
+                <a:spcPts val="300"/>
+              </a:spcAft>
+              <a:buSzPct val="100000"/>
+              <a:buChar char="•"/>
+            </a:pPr>
+            <a:r>
+              <a:rPr lang="en-US" sz="1200" b="1" dirty="0">
+                <a:solidFill>
+                  <a:srgbClr val="1C2833"/>
+                </a:solidFill>
+                <a:latin typeface="Arial" pitchFamily="34" charset="0"/>
+                <a:ea typeface="Arial" pitchFamily="34" charset="-122"/>
+                <a:cs typeface="Arial" pitchFamily="34" charset="-120"/>
+              </a:rPr>
+              <a:t>Axial tilt</a:t>
+            </a:r>
+            <a:pPr algn="l" indent="0" marL="0">
+              <a:lnSpc>
+                <a:spcPts val="1620"/>
+              </a:lnSpc>
+              <a:spcAft>
+                <a:spcPts val="300"/>
+              </a:spcAft>
+              <a:buNone/>
+            </a:pPr>
+            <a:r>
+              <a:rPr lang="en-US" sz="1200" dirty="0">
+                <a:solidFill>
+                  <a:srgbClr val="1C2833"/>
+                </a:solidFill>
+                <a:latin typeface="Arial" pitchFamily="34" charset="0"/>
+                <a:ea typeface="Arial" pitchFamily="34" charset="-122"/>
+                <a:cs typeface="Arial" pitchFamily="34" charset="-120"/>
+              </a:rPr>
+              <a:t> (obliquity of the ecliptic) — Earth's rotation axis is tilted ~23.5° from a line perpendicular to its orbital plane. This tilt does not change over a year — Earth keeps its tilt pointed in the same direction in space as it goes around the Sun.</a:t>
+            </a:r>
+            <a:endParaRPr lang="en-US" sz="1200" dirty="0"/>
+          </a:p>
+        </p:txBody>
+      </p:sp>
+      <p:sp>
+        <p:nvSpPr>
+          <p:cNvPr id="5" name="Text 3"/>
+          <p:cNvSpPr/>
+          <p:nvPr/>
+        </p:nvSpPr>
+        <p:spPr>
+          <a:xfrm>
+            <a:off x="406301" y="1665684"/>
+            <a:ext cx="8498026" cy="426541"/>
+          </a:xfrm>
+          <a:prstGeom prst="rect">
+            <a:avLst/>
+          </a:prstGeom>
+          <a:noFill/>
+          <a:ln/>
+        </p:spPr>
+        <p:txBody>
+          <a:bodyPr wrap="square" lIns="0" tIns="0" rIns="0" bIns="0" rtlCol="0" anchor="t"/>
+          <a:lstStyle/>
+          <a:p>
+            <a:pPr algn="l" indent="0" marL="0">
+              <a:lnSpc>
+                <a:spcPts val="1680"/>
+              </a:lnSpc>
+              <a:spcBef>
+                <a:spcPts val="300"/>
+              </a:spcBef>
+              <a:spcAft>
+                <a:spcPts val="300"/>
+              </a:spcAft>
+              <a:buNone/>
+            </a:pPr>
+            <a:r>
+              <a:rPr lang="en-US" sz="1200" dirty="0">
+                <a:solidFill>
+                  <a:srgbClr val="1C2833"/>
+                </a:solidFill>
+                <a:latin typeface="Arial" pitchFamily="34" charset="0"/>
+                <a:ea typeface="Arial" pitchFamily="34" charset="-122"/>
+                <a:cs typeface="Arial" pitchFamily="34" charset="-120"/>
+              </a:rPr>
+              <a:t>(No new Sanskrit term today — yesterday's </a:t>
+            </a:r>
+            <a:pPr algn="l" indent="0" marL="0">
+              <a:lnSpc>
+                <a:spcPts val="1680"/>
+              </a:lnSpc>
+              <a:spcBef>
+                <a:spcPts val="300"/>
+              </a:spcBef>
+              <a:spcAft>
+                <a:spcPts val="300"/>
+              </a:spcAft>
+              <a:buNone/>
+            </a:pPr>
+            <a:r>
+              <a:rPr lang="en-US" sz="1200" i="1" dirty="0">
+                <a:solidFill>
+                  <a:srgbClr val="1C2833"/>
+                </a:solidFill>
+                <a:latin typeface="Arial" pitchFamily="34" charset="0"/>
+                <a:ea typeface="Arial" pitchFamily="34" charset="-122"/>
+                <a:cs typeface="Arial" pitchFamily="34" charset="-120"/>
+              </a:rPr>
+              <a:t>krānti-vṛtta</a:t>
+            </a:r>
+            <a:pPr algn="l" indent="0" marL="0">
+              <a:lnSpc>
+                <a:spcPts val="1680"/>
+              </a:lnSpc>
+              <a:spcBef>
+                <a:spcPts val="300"/>
+              </a:spcBef>
+              <a:spcAft>
+                <a:spcPts val="300"/>
+              </a:spcAft>
+              <a:buNone/>
+            </a:pPr>
+            <a:r>
+              <a:rPr lang="en-US" sz="1200" dirty="0">
+                <a:solidFill>
+                  <a:srgbClr val="1C2833"/>
+                </a:solidFill>
+                <a:latin typeface="Arial" pitchFamily="34" charset="0"/>
+                <a:ea typeface="Arial" pitchFamily="34" charset="-122"/>
+                <a:cs typeface="Arial" pitchFamily="34" charset="-120"/>
+              </a:rPr>
+              <a:t> covers it. The axial tilt is what </a:t>
+            </a:r>
+            <a:pPr algn="l" indent="0" marL="0">
+              <a:lnSpc>
+                <a:spcPts val="1680"/>
+              </a:lnSpc>
+              <a:spcBef>
+                <a:spcPts val="300"/>
+              </a:spcBef>
+              <a:spcAft>
+                <a:spcPts val="300"/>
+              </a:spcAft>
+              <a:buNone/>
+            </a:pPr>
+            <a:r>
+              <a:rPr lang="en-US" sz="1200" i="1" dirty="0">
+                <a:solidFill>
+                  <a:srgbClr val="1C2833"/>
+                </a:solidFill>
+                <a:latin typeface="Arial" pitchFamily="34" charset="0"/>
+                <a:ea typeface="Arial" pitchFamily="34" charset="-122"/>
+                <a:cs typeface="Arial" pitchFamily="34" charset="-120"/>
+              </a:rPr>
+              <a:t>causes</a:t>
+            </a:r>
+            <a:pPr algn="l" indent="0" marL="0">
+              <a:lnSpc>
+                <a:spcPts val="1680"/>
+              </a:lnSpc>
+              <a:spcBef>
+                <a:spcPts val="300"/>
+              </a:spcBef>
+              <a:spcAft>
+                <a:spcPts val="300"/>
+              </a:spcAft>
+              <a:buNone/>
+            </a:pPr>
+            <a:r>
+              <a:rPr lang="en-US" sz="1200" dirty="0">
+                <a:solidFill>
+                  <a:srgbClr val="1C2833"/>
+                </a:solidFill>
+                <a:latin typeface="Arial" pitchFamily="34" charset="0"/>
+                <a:ea typeface="Arial" pitchFamily="34" charset="-122"/>
+                <a:cs typeface="Arial" pitchFamily="34" charset="-120"/>
+              </a:rPr>
+              <a:t> the ecliptic to be a </a:t>
+            </a:r>
+            <a:pPr algn="l" indent="0" marL="0">
+              <a:lnSpc>
+                <a:spcPts val="1680"/>
+              </a:lnSpc>
+              <a:spcBef>
+                <a:spcPts val="300"/>
+              </a:spcBef>
+              <a:spcAft>
+                <a:spcPts val="300"/>
+              </a:spcAft>
+              <a:buNone/>
+            </a:pPr>
+            <a:r>
+              <a:rPr lang="en-US" sz="1200" i="1" dirty="0">
+                <a:solidFill>
+                  <a:srgbClr val="1C2833"/>
+                </a:solidFill>
+                <a:latin typeface="Arial" pitchFamily="34" charset="0"/>
+                <a:ea typeface="Arial" pitchFamily="34" charset="-122"/>
+                <a:cs typeface="Arial" pitchFamily="34" charset="-120"/>
+              </a:rPr>
+              <a:t>circle</a:t>
+            </a:r>
+            <a:pPr algn="l" indent="0" marL="0">
+              <a:lnSpc>
+                <a:spcPts val="1680"/>
+              </a:lnSpc>
+              <a:spcBef>
+                <a:spcPts val="300"/>
+              </a:spcBef>
+              <a:spcAft>
+                <a:spcPts val="300"/>
+              </a:spcAft>
+              <a:buNone/>
+            </a:pPr>
+            <a:r>
+              <a:rPr lang="en-US" sz="1200" dirty="0">
+                <a:solidFill>
+                  <a:srgbClr val="1C2833"/>
+                </a:solidFill>
+                <a:latin typeface="Arial" pitchFamily="34" charset="0"/>
+                <a:ea typeface="Arial" pitchFamily="34" charset="-122"/>
+                <a:cs typeface="Arial" pitchFamily="34" charset="-120"/>
+              </a:rPr>
+              <a:t> on the sky rather than just running along the equator.)</a:t>
+            </a:r>
+            <a:endParaRPr lang="en-US" sz="1200" dirty="0"/>
+          </a:p>
+        </p:txBody>
+      </p:sp>
+      <p:sp>
+        <p:nvSpPr>
+          <p:cNvPr id="6" name="Text 4"/>
           <p:cNvSpPr/>
           <p:nvPr/>
         </p:nvSpPr>
@@ -3529,7 +7328,7 @@
                 <a:ea typeface="Georgia" pitchFamily="34" charset="-122"/>
                 <a:cs typeface="Georgia" pitchFamily="34" charset="-120"/>
               </a:rPr>
-              <a:t>Warm-up (5 min)</a:t>
+              <a:t>Lesson flow</a:t>
             </a:r>
             <a:endParaRPr lang="en-US" sz="1800" dirty="0"/>
           </a:p>
@@ -3538,353 +7337,6 @@
       <p:sp>
         <p:nvSpPr>
           <p:cNvPr id="4" name="Text 2"/>
-          <p:cNvSpPr/>
-          <p:nvPr/>
-        </p:nvSpPr>
-        <p:spPr>
-          <a:xfrm>
-            <a:off x="406301" y="870942"/>
-            <a:ext cx="8498026" cy="853083"/>
-          </a:xfrm>
-          <a:prstGeom prst="rect">
-            <a:avLst/>
-          </a:prstGeom>
-          <a:noFill/>
-          <a:ln/>
-        </p:spPr>
-        <p:txBody>
-          <a:bodyPr wrap="square" lIns="0" tIns="0" rIns="0" bIns="0" rtlCol="0" anchor="t"/>
-          <a:lstStyle/>
-          <a:p>
-            <a:pPr algn="l" indent="0" marL="0">
-              <a:lnSpc>
-                <a:spcPts val="1680"/>
-              </a:lnSpc>
-              <a:spcBef>
-                <a:spcPts val="300"/>
-              </a:spcBef>
-              <a:spcAft>
-                <a:spcPts val="300"/>
-              </a:spcAft>
-              <a:buNone/>
-            </a:pPr>
-            <a:r>
-              <a:rPr lang="en-US" sz="1200" dirty="0">
-                <a:solidFill>
-                  <a:srgbClr val="1C2833"/>
-                </a:solidFill>
-                <a:latin typeface="Arial" pitchFamily="34" charset="0"/>
-                <a:ea typeface="Arial" pitchFamily="34" charset="-122"/>
-                <a:cs typeface="Arial" pitchFamily="34" charset="-120"/>
-              </a:rPr>
-              <a:t>– Prompt: </a:t>
-            </a:r>
-            <a:pPr algn="l" indent="0" marL="0">
-              <a:lnSpc>
-                <a:spcPts val="1680"/>
-              </a:lnSpc>
-              <a:spcBef>
-                <a:spcPts val="300"/>
-              </a:spcBef>
-              <a:spcAft>
-                <a:spcPts val="300"/>
-              </a:spcAft>
-              <a:buNone/>
-            </a:pPr>
-            <a:r>
-              <a:rPr lang="en-US" sz="1200" i="1" dirty="0">
-                <a:solidFill>
-                  <a:srgbClr val="1C2833"/>
-                </a:solidFill>
-                <a:latin typeface="Arial" pitchFamily="34" charset="0"/>
-                <a:ea typeface="Arial" pitchFamily="34" charset="-122"/>
-                <a:cs typeface="Arial" pitchFamily="34" charset="-120"/>
-              </a:rPr>
-              <a:t>"Why is it hot in May–June in India and cool in December–January?"</a:t>
-            </a:r>
-            <a:pPr algn="l" indent="0" marL="0">
-              <a:lnSpc>
-                <a:spcPts val="1680"/>
-              </a:lnSpc>
-              <a:spcBef>
-                <a:spcPts val="300"/>
-              </a:spcBef>
-              <a:spcAft>
-                <a:spcPts val="300"/>
-              </a:spcAft>
-              <a:buNone/>
-            </a:pPr>
-            <a:r>
-              <a:rPr lang="en-US" sz="1200" dirty="0">
-                <a:solidFill>
-                  <a:srgbClr val="1C2833"/>
-                </a:solidFill>
-                <a:latin typeface="Arial" pitchFamily="34" charset="0"/>
-                <a:ea typeface="Arial" pitchFamily="34" charset="-122"/>
-                <a:cs typeface="Arial" pitchFamily="34" charset="-120"/>
-              </a:rPr>
-              <a:t> – Likely wrong answer (very common): </a:t>
-            </a:r>
-            <a:pPr algn="l" indent="0" marL="0">
-              <a:lnSpc>
-                <a:spcPts val="1680"/>
-              </a:lnSpc>
-              <a:spcBef>
-                <a:spcPts val="300"/>
-              </a:spcBef>
-              <a:spcAft>
-                <a:spcPts val="300"/>
-              </a:spcAft>
-              <a:buNone/>
-            </a:pPr>
-            <a:r>
-              <a:rPr lang="en-US" sz="1200" i="1" dirty="0">
-                <a:solidFill>
-                  <a:srgbClr val="1C2833"/>
-                </a:solidFill>
-                <a:latin typeface="Arial" pitchFamily="34" charset="0"/>
-                <a:ea typeface="Arial" pitchFamily="34" charset="-122"/>
-                <a:cs typeface="Arial" pitchFamily="34" charset="-120"/>
-              </a:rPr>
-              <a:t>"Because Earth is closer to the Sun in summer and farther in winter."</a:t>
-            </a:r>
-            <a:pPr algn="l" indent="0" marL="0">
-              <a:lnSpc>
-                <a:spcPts val="1680"/>
-              </a:lnSpc>
-              <a:spcBef>
-                <a:spcPts val="300"/>
-              </a:spcBef>
-              <a:spcAft>
-                <a:spcPts val="300"/>
-              </a:spcAft>
-              <a:buNone/>
-            </a:pPr>
-            <a:r>
-              <a:rPr lang="en-US" sz="1200" dirty="0">
-                <a:solidFill>
-                  <a:srgbClr val="1C2833"/>
-                </a:solidFill>
-                <a:latin typeface="Arial" pitchFamily="34" charset="0"/>
-                <a:ea typeface="Arial" pitchFamily="34" charset="-122"/>
-                <a:cs typeface="Arial" pitchFamily="34" charset="-120"/>
-              </a:rPr>
-              <a:t> – Surprise: Earth is actually slightly </a:t>
-            </a:r>
-            <a:pPr algn="l" indent="0" marL="0">
-              <a:lnSpc>
-                <a:spcPts val="1680"/>
-              </a:lnSpc>
-              <a:spcBef>
-                <a:spcPts val="300"/>
-              </a:spcBef>
-              <a:spcAft>
-                <a:spcPts val="300"/>
-              </a:spcAft>
-              <a:buNone/>
-            </a:pPr>
-            <a:r>
-              <a:rPr lang="en-US" sz="1200" i="1" dirty="0">
-                <a:solidFill>
-                  <a:srgbClr val="1C2833"/>
-                </a:solidFill>
-                <a:latin typeface="Arial" pitchFamily="34" charset="0"/>
-                <a:ea typeface="Arial" pitchFamily="34" charset="-122"/>
-                <a:cs typeface="Arial" pitchFamily="34" charset="-120"/>
-              </a:rPr>
-              <a:t>closer</a:t>
-            </a:r>
-            <a:pPr algn="l" indent="0" marL="0">
-              <a:lnSpc>
-                <a:spcPts val="1680"/>
-              </a:lnSpc>
-              <a:spcBef>
-                <a:spcPts val="300"/>
-              </a:spcBef>
-              <a:spcAft>
-                <a:spcPts val="300"/>
-              </a:spcAft>
-              <a:buNone/>
-            </a:pPr>
-            <a:r>
-              <a:rPr lang="en-US" sz="1200" dirty="0">
-                <a:solidFill>
-                  <a:srgbClr val="1C2833"/>
-                </a:solidFill>
-                <a:latin typeface="Arial" pitchFamily="34" charset="0"/>
-                <a:ea typeface="Arial" pitchFamily="34" charset="-122"/>
-                <a:cs typeface="Arial" pitchFamily="34" charset="-120"/>
-              </a:rPr>
-              <a:t> to the Sun in </a:t>
-            </a:r>
-            <a:pPr algn="l" indent="0" marL="0">
-              <a:lnSpc>
-                <a:spcPts val="1680"/>
-              </a:lnSpc>
-              <a:spcBef>
-                <a:spcPts val="300"/>
-              </a:spcBef>
-              <a:spcAft>
-                <a:spcPts val="300"/>
-              </a:spcAft>
-              <a:buNone/>
-            </a:pPr>
-            <a:r>
-              <a:rPr lang="en-US" sz="1200" b="1" dirty="0">
-                <a:solidFill>
-                  <a:srgbClr val="1C2833"/>
-                </a:solidFill>
-                <a:latin typeface="Arial" pitchFamily="34" charset="0"/>
-                <a:ea typeface="Arial" pitchFamily="34" charset="-122"/>
-                <a:cs typeface="Arial" pitchFamily="34" charset="-120"/>
-              </a:rPr>
-              <a:t>January</a:t>
-            </a:r>
-            <a:pPr algn="l" indent="0" marL="0">
-              <a:lnSpc>
-                <a:spcPts val="1680"/>
-              </a:lnSpc>
-              <a:spcBef>
-                <a:spcPts val="300"/>
-              </a:spcBef>
-              <a:spcAft>
-                <a:spcPts val="300"/>
-              </a:spcAft>
-              <a:buNone/>
-            </a:pPr>
-            <a:r>
-              <a:rPr lang="en-US" sz="1200" dirty="0">
-                <a:solidFill>
-                  <a:srgbClr val="1C2833"/>
-                </a:solidFill>
-                <a:latin typeface="Arial" pitchFamily="34" charset="0"/>
-                <a:ea typeface="Arial" pitchFamily="34" charset="-122"/>
-                <a:cs typeface="Arial" pitchFamily="34" charset="-120"/>
-              </a:rPr>
-              <a:t> (perihelion ~3 January, 147.1 million km) and slightly </a:t>
-            </a:r>
-            <a:pPr algn="l" indent="0" marL="0">
-              <a:lnSpc>
-                <a:spcPts val="1680"/>
-              </a:lnSpc>
-              <a:spcBef>
-                <a:spcPts val="300"/>
-              </a:spcBef>
-              <a:spcAft>
-                <a:spcPts val="300"/>
-              </a:spcAft>
-              <a:buNone/>
-            </a:pPr>
-            <a:r>
-              <a:rPr lang="en-US" sz="1200" i="1" dirty="0">
-                <a:solidFill>
-                  <a:srgbClr val="1C2833"/>
-                </a:solidFill>
-                <a:latin typeface="Arial" pitchFamily="34" charset="0"/>
-                <a:ea typeface="Arial" pitchFamily="34" charset="-122"/>
-                <a:cs typeface="Arial" pitchFamily="34" charset="-120"/>
-              </a:rPr>
-              <a:t>farther</a:t>
-            </a:r>
-            <a:pPr algn="l" indent="0" marL="0">
-              <a:lnSpc>
-                <a:spcPts val="1680"/>
-              </a:lnSpc>
-              <a:spcBef>
-                <a:spcPts val="300"/>
-              </a:spcBef>
-              <a:spcAft>
-                <a:spcPts val="300"/>
-              </a:spcAft>
-              <a:buNone/>
-            </a:pPr>
-            <a:r>
-              <a:rPr lang="en-US" sz="1200" dirty="0">
-                <a:solidFill>
-                  <a:srgbClr val="1C2833"/>
-                </a:solidFill>
-                <a:latin typeface="Arial" pitchFamily="34" charset="0"/>
-                <a:ea typeface="Arial" pitchFamily="34" charset="-122"/>
-                <a:cs typeface="Arial" pitchFamily="34" charset="-120"/>
-              </a:rPr>
-              <a:t> in </a:t>
-            </a:r>
-            <a:pPr algn="l" indent="0" marL="0">
-              <a:lnSpc>
-                <a:spcPts val="1680"/>
-              </a:lnSpc>
-              <a:spcBef>
-                <a:spcPts val="300"/>
-              </a:spcBef>
-              <a:spcAft>
-                <a:spcPts val="300"/>
-              </a:spcAft>
-              <a:buNone/>
-            </a:pPr>
-            <a:r>
-              <a:rPr lang="en-US" sz="1200" b="1" dirty="0">
-                <a:solidFill>
-                  <a:srgbClr val="1C2833"/>
-                </a:solidFill>
-                <a:latin typeface="Arial" pitchFamily="34" charset="0"/>
-                <a:ea typeface="Arial" pitchFamily="34" charset="-122"/>
-                <a:cs typeface="Arial" pitchFamily="34" charset="-120"/>
-              </a:rPr>
-              <a:t>July</a:t>
-            </a:r>
-            <a:pPr algn="l" indent="0" marL="0">
-              <a:lnSpc>
-                <a:spcPts val="1680"/>
-              </a:lnSpc>
-              <a:spcBef>
-                <a:spcPts val="300"/>
-              </a:spcBef>
-              <a:spcAft>
-                <a:spcPts val="300"/>
-              </a:spcAft>
-              <a:buNone/>
-            </a:pPr>
-            <a:r>
-              <a:rPr lang="en-US" sz="1200" dirty="0">
-                <a:solidFill>
-                  <a:srgbClr val="1C2833"/>
-                </a:solidFill>
-                <a:latin typeface="Arial" pitchFamily="34" charset="0"/>
-                <a:ea typeface="Arial" pitchFamily="34" charset="-122"/>
-                <a:cs typeface="Arial" pitchFamily="34" charset="-120"/>
-              </a:rPr>
-              <a:t> (aphelion ~4 July, 152.1 million km). India is hot in May–June anyway. So distance is not the answer. – Real question: </a:t>
-            </a:r>
-            <a:pPr algn="l" indent="0" marL="0">
-              <a:lnSpc>
-                <a:spcPts val="1680"/>
-              </a:lnSpc>
-              <a:spcBef>
-                <a:spcPts val="300"/>
-              </a:spcBef>
-              <a:spcAft>
-                <a:spcPts val="300"/>
-              </a:spcAft>
-              <a:buNone/>
-            </a:pPr>
-            <a:r>
-              <a:rPr lang="en-US" sz="1200" i="1" dirty="0">
-                <a:solidFill>
-                  <a:srgbClr val="1C2833"/>
-                </a:solidFill>
-                <a:latin typeface="Arial" pitchFamily="34" charset="0"/>
-                <a:ea typeface="Arial" pitchFamily="34" charset="-122"/>
-                <a:cs typeface="Arial" pitchFamily="34" charset="-120"/>
-              </a:rPr>
-              <a:t>"What else could cause seasons?"</a:t>
-            </a:r>
-            <a:endParaRPr lang="en-US" sz="1200" dirty="0"/>
-          </a:p>
-        </p:txBody>
-      </p:sp>
-      <p:sp>
-        <p:nvSpPr>
-          <p:cNvPr id="5" name="Text 3"/>
           <p:cNvSpPr/>
           <p:nvPr/>
         </p:nvSpPr>
@@ -4034,7 +7486,7 @@
                 <a:ea typeface="Georgia" pitchFamily="34" charset="-122"/>
                 <a:cs typeface="Georgia" pitchFamily="34" charset="-120"/>
               </a:rPr>
-              <a:t>Activity (15 min) — Build your own tilt model</a:t>
+              <a:t>Warm-up (5 min)</a:t>
             </a:r>
             <a:endParaRPr lang="en-US" sz="1800" dirty="0"/>
           </a:p>
@@ -4048,8 +7500,8 @@
         </p:nvSpPr>
         <p:spPr>
           <a:xfrm>
-            <a:off x="406301" y="870942"/>
-            <a:ext cx="8498026" cy="213271"/>
+            <a:off x="634901" y="883593"/>
+            <a:ext cx="8102798" cy="1218902"/>
           </a:xfrm>
           <a:prstGeom prst="rect">
             <a:avLst/>
@@ -4061,17 +7513,15 @@
           <a:bodyPr wrap="square" lIns="0" tIns="0" rIns="0" bIns="0" rtlCol="0" anchor="t"/>
           <a:lstStyle/>
           <a:p>
-            <a:pPr algn="l" indent="0" marL="0">
-              <a:lnSpc>
-                <a:spcPts val="1680"/>
-              </a:lnSpc>
-              <a:spcBef>
-                <a:spcPts val="300"/>
-              </a:spcBef>
-              <a:spcAft>
-                <a:spcPts val="300"/>
-              </a:spcAft>
-              <a:buNone/>
+            <a:pPr algn="l" marL="342900" indent="-342900">
+              <a:lnSpc>
+                <a:spcPts val="1620"/>
+              </a:lnSpc>
+              <a:spcAft>
+                <a:spcPts val="300"/>
+              </a:spcAft>
+              <a:buSzPct val="100000"/>
+              <a:buChar char="•"/>
             </a:pPr>
             <a:r>
               <a:rPr lang="en-US" sz="1200" dirty="0">
@@ -4082,109 +7532,307 @@
                 <a:ea typeface="Arial" pitchFamily="34" charset="-122"/>
                 <a:cs typeface="Arial" pitchFamily="34" charset="-120"/>
               </a:rPr>
-              <a:t>In pairs, students build a paper "season-checker":</a:t>
+              <a:t>Prompt: </a:t>
+            </a:r>
+            <a:pPr algn="l" indent="0" marL="0">
+              <a:lnSpc>
+                <a:spcPts val="1620"/>
+              </a:lnSpc>
+              <a:spcAft>
+                <a:spcPts val="300"/>
+              </a:spcAft>
+              <a:buNone/>
+            </a:pPr>
+            <a:r>
+              <a:rPr lang="en-US" sz="1200" i="1" dirty="0">
+                <a:solidFill>
+                  <a:srgbClr val="1C2833"/>
+                </a:solidFill>
+                <a:latin typeface="Arial" pitchFamily="34" charset="0"/>
+                <a:ea typeface="Arial" pitchFamily="34" charset="-122"/>
+                <a:cs typeface="Arial" pitchFamily="34" charset="-120"/>
+              </a:rPr>
+              <a:t>"Why is it hot in May–June in India and cool in December–January?"</a:t>
             </a:r>
             <a:endParaRPr lang="en-US" sz="1200" dirty="0"/>
           </a:p>
+          <a:p>
+            <a:pPr algn="l" marL="342900" indent="-342900">
+              <a:lnSpc>
+                <a:spcPts val="1620"/>
+              </a:lnSpc>
+              <a:spcAft>
+                <a:spcPts val="300"/>
+              </a:spcAft>
+              <a:buSzPct val="100000"/>
+              <a:buChar char="•"/>
+            </a:pPr>
+            <a:r>
+              <a:rPr lang="en-US" sz="1200" dirty="0">
+                <a:solidFill>
+                  <a:srgbClr val="1C2833"/>
+                </a:solidFill>
+                <a:latin typeface="Arial" pitchFamily="34" charset="0"/>
+                <a:ea typeface="Arial" pitchFamily="34" charset="-122"/>
+                <a:cs typeface="Arial" pitchFamily="34" charset="-120"/>
+              </a:rPr>
+              <a:t>Likely wrong answer (very common): </a:t>
+            </a:r>
+            <a:pPr algn="l" indent="0" marL="0">
+              <a:lnSpc>
+                <a:spcPts val="1620"/>
+              </a:lnSpc>
+              <a:spcAft>
+                <a:spcPts val="300"/>
+              </a:spcAft>
+              <a:buNone/>
+            </a:pPr>
+            <a:r>
+              <a:rPr lang="en-US" sz="1200" i="1" dirty="0">
+                <a:solidFill>
+                  <a:srgbClr val="1C2833"/>
+                </a:solidFill>
+                <a:latin typeface="Arial" pitchFamily="34" charset="0"/>
+                <a:ea typeface="Arial" pitchFamily="34" charset="-122"/>
+                <a:cs typeface="Arial" pitchFamily="34" charset="-120"/>
+              </a:rPr>
+              <a:t>"Because Earth is closer to the Sun in summer and farther in winter."</a:t>
+            </a:r>
+            <a:endParaRPr lang="en-US" sz="1200" dirty="0"/>
+          </a:p>
+          <a:p>
+            <a:pPr algn="l" marL="342900" indent="-342900">
+              <a:lnSpc>
+                <a:spcPts val="1620"/>
+              </a:lnSpc>
+              <a:spcAft>
+                <a:spcPts val="300"/>
+              </a:spcAft>
+              <a:buSzPct val="100000"/>
+              <a:buChar char="•"/>
+            </a:pPr>
+            <a:r>
+              <a:rPr lang="en-US" sz="1200" dirty="0">
+                <a:solidFill>
+                  <a:srgbClr val="1C2833"/>
+                </a:solidFill>
+                <a:latin typeface="Arial" pitchFamily="34" charset="0"/>
+                <a:ea typeface="Arial" pitchFamily="34" charset="-122"/>
+                <a:cs typeface="Arial" pitchFamily="34" charset="-120"/>
+              </a:rPr>
+              <a:t>Surprise: Earth is actually slightly </a:t>
+            </a:r>
+            <a:pPr algn="l" indent="0" marL="0">
+              <a:lnSpc>
+                <a:spcPts val="1620"/>
+              </a:lnSpc>
+              <a:spcAft>
+                <a:spcPts val="300"/>
+              </a:spcAft>
+              <a:buNone/>
+            </a:pPr>
+            <a:r>
+              <a:rPr lang="en-US" sz="1200" i="1" dirty="0">
+                <a:solidFill>
+                  <a:srgbClr val="1C2833"/>
+                </a:solidFill>
+                <a:latin typeface="Arial" pitchFamily="34" charset="0"/>
+                <a:ea typeface="Arial" pitchFamily="34" charset="-122"/>
+                <a:cs typeface="Arial" pitchFamily="34" charset="-120"/>
+              </a:rPr>
+              <a:t>closer</a:t>
+            </a:r>
+            <a:pPr algn="l" indent="0" marL="0">
+              <a:lnSpc>
+                <a:spcPts val="1620"/>
+              </a:lnSpc>
+              <a:spcAft>
+                <a:spcPts val="300"/>
+              </a:spcAft>
+              <a:buNone/>
+            </a:pPr>
+            <a:r>
+              <a:rPr lang="en-US" sz="1200" dirty="0">
+                <a:solidFill>
+                  <a:srgbClr val="1C2833"/>
+                </a:solidFill>
+                <a:latin typeface="Arial" pitchFamily="34" charset="0"/>
+                <a:ea typeface="Arial" pitchFamily="34" charset="-122"/>
+                <a:cs typeface="Arial" pitchFamily="34" charset="-120"/>
+              </a:rPr>
+              <a:t> to the Sun in </a:t>
+            </a:r>
+            <a:pPr algn="l" indent="0" marL="0">
+              <a:lnSpc>
+                <a:spcPts val="1620"/>
+              </a:lnSpc>
+              <a:spcAft>
+                <a:spcPts val="300"/>
+              </a:spcAft>
+              <a:buNone/>
+            </a:pPr>
+            <a:r>
+              <a:rPr lang="en-US" sz="1200" b="1" dirty="0">
+                <a:solidFill>
+                  <a:srgbClr val="1C2833"/>
+                </a:solidFill>
+                <a:latin typeface="Arial" pitchFamily="34" charset="0"/>
+                <a:ea typeface="Arial" pitchFamily="34" charset="-122"/>
+                <a:cs typeface="Arial" pitchFamily="34" charset="-120"/>
+              </a:rPr>
+              <a:t>January</a:t>
+            </a:r>
+            <a:pPr algn="l" indent="0" marL="0">
+              <a:lnSpc>
+                <a:spcPts val="1620"/>
+              </a:lnSpc>
+              <a:spcAft>
+                <a:spcPts val="300"/>
+              </a:spcAft>
+              <a:buNone/>
+            </a:pPr>
+            <a:r>
+              <a:rPr lang="en-US" sz="1200" dirty="0">
+                <a:solidFill>
+                  <a:srgbClr val="1C2833"/>
+                </a:solidFill>
+                <a:latin typeface="Arial" pitchFamily="34" charset="0"/>
+                <a:ea typeface="Arial" pitchFamily="34" charset="-122"/>
+                <a:cs typeface="Arial" pitchFamily="34" charset="-120"/>
+              </a:rPr>
+              <a:t> (perihelion ~3 January, 147.1 million km) and slightly </a:t>
+            </a:r>
+            <a:pPr algn="l" indent="0" marL="0">
+              <a:lnSpc>
+                <a:spcPts val="1620"/>
+              </a:lnSpc>
+              <a:spcAft>
+                <a:spcPts val="300"/>
+              </a:spcAft>
+              <a:buNone/>
+            </a:pPr>
+            <a:r>
+              <a:rPr lang="en-US" sz="1200" i="1" dirty="0">
+                <a:solidFill>
+                  <a:srgbClr val="1C2833"/>
+                </a:solidFill>
+                <a:latin typeface="Arial" pitchFamily="34" charset="0"/>
+                <a:ea typeface="Arial" pitchFamily="34" charset="-122"/>
+                <a:cs typeface="Arial" pitchFamily="34" charset="-120"/>
+              </a:rPr>
+              <a:t>farther</a:t>
+            </a:r>
+            <a:pPr algn="l" indent="0" marL="0">
+              <a:lnSpc>
+                <a:spcPts val="1620"/>
+              </a:lnSpc>
+              <a:spcAft>
+                <a:spcPts val="300"/>
+              </a:spcAft>
+              <a:buNone/>
+            </a:pPr>
+            <a:r>
+              <a:rPr lang="en-US" sz="1200" dirty="0">
+                <a:solidFill>
+                  <a:srgbClr val="1C2833"/>
+                </a:solidFill>
+                <a:latin typeface="Arial" pitchFamily="34" charset="0"/>
+                <a:ea typeface="Arial" pitchFamily="34" charset="-122"/>
+                <a:cs typeface="Arial" pitchFamily="34" charset="-120"/>
+              </a:rPr>
+              <a:t> in </a:t>
+            </a:r>
+            <a:pPr algn="l" indent="0" marL="0">
+              <a:lnSpc>
+                <a:spcPts val="1620"/>
+              </a:lnSpc>
+              <a:spcAft>
+                <a:spcPts val="300"/>
+              </a:spcAft>
+              <a:buNone/>
+            </a:pPr>
+            <a:r>
+              <a:rPr lang="en-US" sz="1200" b="1" dirty="0">
+                <a:solidFill>
+                  <a:srgbClr val="1C2833"/>
+                </a:solidFill>
+                <a:latin typeface="Arial" pitchFamily="34" charset="0"/>
+                <a:ea typeface="Arial" pitchFamily="34" charset="-122"/>
+                <a:cs typeface="Arial" pitchFamily="34" charset="-120"/>
+              </a:rPr>
+              <a:t>July</a:t>
+            </a:r>
+            <a:pPr algn="l" indent="0" marL="0">
+              <a:lnSpc>
+                <a:spcPts val="1620"/>
+              </a:lnSpc>
+              <a:spcAft>
+                <a:spcPts val="300"/>
+              </a:spcAft>
+              <a:buNone/>
+            </a:pPr>
+            <a:r>
+              <a:rPr lang="en-US" sz="1200" dirty="0">
+                <a:solidFill>
+                  <a:srgbClr val="1C2833"/>
+                </a:solidFill>
+                <a:latin typeface="Arial" pitchFamily="34" charset="0"/>
+                <a:ea typeface="Arial" pitchFamily="34" charset="-122"/>
+                <a:cs typeface="Arial" pitchFamily="34" charset="-120"/>
+              </a:rPr>
+              <a:t> (aphelion ~4 July, 152.1 million km). India is hot in May–June anyway. So distance is not the answer.</a:t>
+            </a:r>
+            <a:endParaRPr lang="en-US" sz="1200" dirty="0"/>
+          </a:p>
+          <a:p>
+            <a:pPr algn="l" marL="342900" indent="-342900">
+              <a:lnSpc>
+                <a:spcPts val="1620"/>
+              </a:lnSpc>
+              <a:spcAft>
+                <a:spcPts val="300"/>
+              </a:spcAft>
+              <a:buSzPct val="100000"/>
+              <a:buChar char="•"/>
+            </a:pPr>
+            <a:r>
+              <a:rPr lang="en-US" sz="1200" dirty="0">
+                <a:solidFill>
+                  <a:srgbClr val="1C2833"/>
+                </a:solidFill>
+                <a:latin typeface="Arial" pitchFamily="34" charset="0"/>
+                <a:ea typeface="Arial" pitchFamily="34" charset="-122"/>
+                <a:cs typeface="Arial" pitchFamily="34" charset="-120"/>
+              </a:rPr>
+              <a:t>Real question: </a:t>
+            </a:r>
+            <a:pPr algn="l" indent="0" marL="0">
+              <a:lnSpc>
+                <a:spcPts val="1620"/>
+              </a:lnSpc>
+              <a:spcAft>
+                <a:spcPts val="300"/>
+              </a:spcAft>
+              <a:buNone/>
+            </a:pPr>
+            <a:r>
+              <a:rPr lang="en-US" sz="1200" i="1" dirty="0">
+                <a:solidFill>
+                  <a:srgbClr val="1C2833"/>
+                </a:solidFill>
+                <a:latin typeface="Arial" pitchFamily="34" charset="0"/>
+                <a:ea typeface="Arial" pitchFamily="34" charset="-122"/>
+                <a:cs typeface="Arial" pitchFamily="34" charset="-120"/>
+              </a:rPr>
+              <a:t>"What else could cause seasons?"</a:t>
+            </a:r>
+            <a:endParaRPr lang="en-US" sz="1200" dirty="0"/>
+          </a:p>
         </p:txBody>
       </p:sp>
       <p:sp>
         <p:nvSpPr>
           <p:cNvPr id="5" name="Text 3"/>
-          <p:cNvSpPr/>
-          <p:nvPr/>
-        </p:nvSpPr>
-        <p:spPr>
-          <a:xfrm>
-            <a:off x="406301" y="1160413"/>
-            <a:ext cx="8498026" cy="1066354"/>
-          </a:xfrm>
-          <a:prstGeom prst="rect">
-            <a:avLst/>
-          </a:prstGeom>
-          <a:noFill/>
-          <a:ln/>
-        </p:spPr>
-        <p:txBody>
-          <a:bodyPr wrap="square" lIns="0" tIns="0" rIns="0" bIns="0" rtlCol="0" anchor="t"/>
-          <a:lstStyle/>
-          <a:p>
-            <a:pPr algn="l" indent="0" marL="0">
-              <a:lnSpc>
-                <a:spcPts val="1680"/>
-              </a:lnSpc>
-              <a:spcBef>
-                <a:spcPts val="300"/>
-              </a:spcBef>
-              <a:spcAft>
-                <a:spcPts val="300"/>
-              </a:spcAft>
-              <a:buNone/>
-            </a:pPr>
-            <a:r>
-              <a:rPr lang="en-US" sz="1200" dirty="0">
-                <a:solidFill>
-                  <a:srgbClr val="1C2833"/>
-                </a:solidFill>
-                <a:latin typeface="Arial" pitchFamily="34" charset="0"/>
-                <a:ea typeface="Arial" pitchFamily="34" charset="-122"/>
-                <a:cs typeface="Arial" pitchFamily="34" charset="-120"/>
-              </a:rPr>
-              <a:t>– Take an A4 sheet. Mark a small circle in the centre — that's the Sun. – Draw Earth's orbit as a big circle around it. – At four positions on the orbit (top, right, bottom, left), draw a small Earth with its axis tilted to the </a:t>
-            </a:r>
-            <a:pPr algn="l" indent="0" marL="0">
-              <a:lnSpc>
-                <a:spcPts val="1680"/>
-              </a:lnSpc>
-              <a:spcBef>
-                <a:spcPts val="300"/>
-              </a:spcBef>
-              <a:spcAft>
-                <a:spcPts val="300"/>
-              </a:spcAft>
-              <a:buNone/>
-            </a:pPr>
-            <a:r>
-              <a:rPr lang="en-US" sz="1200" b="1" dirty="0">
-                <a:solidFill>
-                  <a:srgbClr val="1C2833"/>
-                </a:solidFill>
-                <a:latin typeface="Arial" pitchFamily="34" charset="0"/>
-                <a:ea typeface="Arial" pitchFamily="34" charset="-122"/>
-                <a:cs typeface="Arial" pitchFamily="34" charset="-120"/>
-              </a:rPr>
-              <a:t>right</a:t>
-            </a:r>
-            <a:pPr algn="l" indent="0" marL="0">
-              <a:lnSpc>
-                <a:spcPts val="1680"/>
-              </a:lnSpc>
-              <a:spcBef>
-                <a:spcPts val="300"/>
-              </a:spcBef>
-              <a:spcAft>
-                <a:spcPts val="300"/>
-              </a:spcAft>
-              <a:buNone/>
-            </a:pPr>
-            <a:r>
-              <a:rPr lang="en-US" sz="1200" dirty="0">
-                <a:solidFill>
-                  <a:srgbClr val="1C2833"/>
-                </a:solidFill>
-                <a:latin typeface="Arial" pitchFamily="34" charset="0"/>
-                <a:ea typeface="Arial" pitchFamily="34" charset="-122"/>
-                <a:cs typeface="Arial" pitchFamily="34" charset="-120"/>
-              </a:rPr>
-              <a:t> of vertical (same direction in all four). – Mark which position is summer in the Northern Hemisphere, which is winter, which are the two equinoxes. – Label each: June / September / December / March. – Bonus: mark the Indian subcontinent on each Earth and shade where it's day.</a:t>
-            </a:r>
-            <a:endParaRPr lang="en-US" sz="1200" dirty="0"/>
-          </a:p>
-        </p:txBody>
-      </p:sp>
-      <p:sp>
-        <p:nvSpPr>
-          <p:cNvPr id="6" name="Text 4"/>
           <p:cNvSpPr/>
           <p:nvPr/>
         </p:nvSpPr>
@@ -4334,7 +7982,7 @@
                 <a:ea typeface="Georgia" pitchFamily="34" charset="-122"/>
                 <a:cs typeface="Georgia" pitchFamily="34" charset="-120"/>
               </a:rPr>
-              <a:t>Wrap-up (5 min)</a:t>
+              <a:t>Core (20 min)</a:t>
             </a:r>
             <a:endParaRPr lang="en-US" sz="1800" dirty="0"/>
           </a:p>
@@ -4349,7 +7997,7 @@
         <p:spPr>
           <a:xfrm>
             <a:off x="634901" y="883593"/>
-            <a:ext cx="8102798" cy="487561"/>
+            <a:ext cx="8102798" cy="281880"/>
           </a:xfrm>
           <a:prstGeom prst="rect">
             <a:avLst/>
@@ -4380,7 +8028,7 @@
                 <a:ea typeface="Arial" pitchFamily="34" charset="-122"/>
                 <a:cs typeface="Arial" pitchFamily="34" charset="-120"/>
               </a:rPr>
-              <a:t>Exit ticket on a slip of paper:</a:t>
+              <a:t>The torch-and-globe demo.</a:t>
             </a:r>
             <a:pPr algn="l" indent="0" marL="0">
               <a:lnSpc>
@@ -4400,87 +8048,7 @@
                 <a:ea typeface="Arial" pitchFamily="34" charset="-122"/>
                 <a:cs typeface="Arial" pitchFamily="34" charset="-120"/>
               </a:rPr>
-              <a:t> "Which is hotter in India in June: the </a:t>
-            </a:r>
-            <a:pPr algn="l" indent="0" marL="0">
-              <a:lnSpc>
-                <a:spcPts val="1620"/>
-              </a:lnSpc>
-              <a:spcAft>
-                <a:spcPts val="300"/>
-              </a:spcAft>
-              <a:buNone/>
-            </a:pPr>
-            <a:r>
-              <a:rPr lang="en-US" sz="1200" i="1" dirty="0">
-                <a:solidFill>
-                  <a:srgbClr val="1C2833"/>
-                </a:solidFill>
-                <a:latin typeface="Arial" pitchFamily="34" charset="0"/>
-                <a:ea typeface="Arial" pitchFamily="34" charset="-122"/>
-                <a:cs typeface="Arial" pitchFamily="34" charset="-120"/>
-              </a:rPr>
-              <a:t>day length</a:t>
-            </a:r>
-            <a:pPr algn="l" indent="0" marL="0">
-              <a:lnSpc>
-                <a:spcPts val="1620"/>
-              </a:lnSpc>
-              <a:spcAft>
-                <a:spcPts val="300"/>
-              </a:spcAft>
-              <a:buNone/>
-            </a:pPr>
-            <a:r>
-              <a:rPr lang="en-US" sz="1200" dirty="0">
-                <a:solidFill>
-                  <a:srgbClr val="1C2833"/>
-                </a:solidFill>
-                <a:latin typeface="Arial" pitchFamily="34" charset="0"/>
-                <a:ea typeface="Arial" pitchFamily="34" charset="-122"/>
-                <a:cs typeface="Arial" pitchFamily="34" charset="-120"/>
-              </a:rPr>
-              <a:t> or the </a:t>
-            </a:r>
-            <a:pPr algn="l" indent="0" marL="0">
-              <a:lnSpc>
-                <a:spcPts val="1620"/>
-              </a:lnSpc>
-              <a:spcAft>
-                <a:spcPts val="300"/>
-              </a:spcAft>
-              <a:buNone/>
-            </a:pPr>
-            <a:r>
-              <a:rPr lang="en-US" sz="1200" i="1" dirty="0">
-                <a:solidFill>
-                  <a:srgbClr val="1C2833"/>
-                </a:solidFill>
-                <a:latin typeface="Arial" pitchFamily="34" charset="0"/>
-                <a:ea typeface="Arial" pitchFamily="34" charset="-122"/>
-                <a:cs typeface="Arial" pitchFamily="34" charset="-120"/>
-              </a:rPr>
-              <a:t>angle of sunlight</a:t>
-            </a:r>
-            <a:pPr algn="l" indent="0" marL="0">
-              <a:lnSpc>
-                <a:spcPts val="1620"/>
-              </a:lnSpc>
-              <a:spcAft>
-                <a:spcPts val="300"/>
-              </a:spcAft>
-              <a:buNone/>
-            </a:pPr>
-            <a:r>
-              <a:rPr lang="en-US" sz="1200" dirty="0">
-                <a:solidFill>
-                  <a:srgbClr val="1C2833"/>
-                </a:solidFill>
-                <a:latin typeface="Arial" pitchFamily="34" charset="0"/>
-                <a:ea typeface="Arial" pitchFamily="34" charset="-122"/>
-                <a:cs typeface="Arial" pitchFamily="34" charset="-120"/>
-              </a:rPr>
-              <a:t> on your skin? Or both? In one sentence."</a:t>
+              <a:t> Set up:</a:t>
             </a:r>
             <a:endParaRPr lang="en-US" sz="1200" dirty="0"/>
           </a:p>
@@ -4494,8 +8062,8 @@
         </p:nvSpPr>
         <p:spPr>
           <a:xfrm>
-            <a:off x="406301" y="1460004"/>
-            <a:ext cx="8498026" cy="426541"/>
+            <a:off x="634901" y="1266974"/>
+            <a:ext cx="8102798" cy="731341"/>
           </a:xfrm>
           <a:prstGeom prst="rect">
             <a:avLst/>
@@ -4507,17 +8075,15 @@
           <a:bodyPr wrap="square" lIns="0" tIns="0" rIns="0" bIns="0" rtlCol="0" anchor="t"/>
           <a:lstStyle/>
           <a:p>
-            <a:pPr algn="l" indent="0" marL="0">
-              <a:lnSpc>
-                <a:spcPts val="1680"/>
-              </a:lnSpc>
-              <a:spcBef>
-                <a:spcPts val="300"/>
-              </a:spcBef>
-              <a:spcAft>
-                <a:spcPts val="300"/>
-              </a:spcAft>
-              <a:buNone/>
+            <a:pPr algn="l" marL="342900" indent="-342900">
+              <a:lnSpc>
+                <a:spcPts val="1620"/>
+              </a:lnSpc>
+              <a:spcAft>
+                <a:spcPts val="300"/>
+              </a:spcAft>
+              <a:buSzPct val="100000"/>
+              <a:buChar char="•"/>
             </a:pPr>
             <a:r>
               <a:rPr lang="en-US" sz="1200" dirty="0">
@@ -4528,7 +8094,31 @@
                 <a:ea typeface="Arial" pitchFamily="34" charset="-122"/>
                 <a:cs typeface="Arial" pitchFamily="34" charset="-120"/>
               </a:rPr>
-              <a:t>– Acceptable answer: BOTH — longer days mean more total hours of sunlight, AND the steeper angle means each minute of sunlight delivers more heat per square metre.</a:t>
+              <a:t>Place the torch on a desk pointing horizontally.</a:t>
+            </a:r>
+            <a:endParaRPr lang="en-US" sz="1200" dirty="0"/>
+          </a:p>
+          <a:p>
+            <a:pPr algn="l" marL="342900" indent="-342900">
+              <a:lnSpc>
+                <a:spcPts val="1620"/>
+              </a:lnSpc>
+              <a:spcAft>
+                <a:spcPts val="300"/>
+              </a:spcAft>
+              <a:buSzPct val="100000"/>
+              <a:buChar char="•"/>
+            </a:pPr>
+            <a:r>
+              <a:rPr lang="en-US" sz="1200" dirty="0">
+                <a:solidFill>
+                  <a:srgbClr val="1C2833"/>
+                </a:solidFill>
+                <a:latin typeface="Arial" pitchFamily="34" charset="0"/>
+                <a:ea typeface="Arial" pitchFamily="34" charset="-122"/>
+                <a:cs typeface="Arial" pitchFamily="34" charset="-120"/>
+              </a:rPr>
+              <a:t>Hold the globe at arm's length, with its axis tilted ~23.5° (use the protractor to check). The N pole should lean either toward or away from the torch.</a:t>
             </a:r>
             <a:endParaRPr lang="en-US" sz="1200" dirty="0"/>
           </a:p>
@@ -4686,7 +8276,7 @@
                 <a:ea typeface="Georgia" pitchFamily="34" charset="-122"/>
                 <a:cs typeface="Georgia" pitchFamily="34" charset="-120"/>
               </a:rPr>
-              <a:t>Homework</a:t>
+              <a:t>Core (20 min) (cont.)</a:t>
             </a:r>
             <a:endParaRPr lang="en-US" sz="1800" dirty="0"/>
           </a:p>
@@ -4734,7 +8324,7 @@
                 <a:ea typeface="Arial" pitchFamily="34" charset="-122"/>
                 <a:cs typeface="Arial" pitchFamily="34" charset="-120"/>
               </a:rPr>
-              <a:t>– On the calendar printout, mark the four dates: </a:t>
+              <a:t>Move the globe through four positions, each ~90° around the torch, keeping the axis tilt </a:t>
             </a:r>
             <a:pPr algn="l" indent="0" marL="0">
               <a:lnSpc>
@@ -4757,7 +8347,7 @@
                 <a:ea typeface="Arial" pitchFamily="34" charset="-122"/>
                 <a:cs typeface="Arial" pitchFamily="34" charset="-120"/>
               </a:rPr>
-              <a:t>~21 March (March equinox), ~21 June (June solstice), ~23 September (September equinox), ~21 December (December solstice).</a:t>
+              <a:t>fixed in space</a:t>
             </a:r>
             <a:pPr algn="l" indent="0" marL="0">
               <a:lnSpc>
@@ -4780,7 +8370,7 @@
                 <a:ea typeface="Arial" pitchFamily="34" charset="-122"/>
                 <a:cs typeface="Arial" pitchFamily="34" charset="-120"/>
               </a:rPr>
-              <a:t> – Bring the marked calendar to Day 3.</a:t>
+              <a:t> (the N pole always points the same direction):</a:t>
             </a:r>
             <a:endParaRPr lang="en-US" sz="1200" dirty="0"/>
           </a:p>
@@ -4789,6 +8379,54 @@
       <p:sp>
         <p:nvSpPr>
           <p:cNvPr id="5" name="Text 3"/>
+          <p:cNvSpPr/>
+          <p:nvPr/>
+        </p:nvSpPr>
+        <p:spPr>
+          <a:xfrm>
+            <a:off x="406301" y="1373684"/>
+            <a:ext cx="8498026" cy="213271"/>
+          </a:xfrm>
+          <a:prstGeom prst="rect">
+            <a:avLst/>
+          </a:prstGeom>
+          <a:noFill/>
+          <a:ln/>
+        </p:spPr>
+        <p:txBody>
+          <a:bodyPr wrap="square" lIns="0" tIns="0" rIns="0" bIns="0" rtlCol="0" anchor="t"/>
+          <a:lstStyle/>
+          <a:p>
+            <a:pPr algn="l" indent="0" marL="0">
+              <a:lnSpc>
+                <a:spcPts val="1680"/>
+              </a:lnSpc>
+              <a:spcBef>
+                <a:spcPts val="300"/>
+              </a:spcBef>
+              <a:spcAft>
+                <a:spcPts val="300"/>
+              </a:spcAft>
+              <a:buNone/>
+            </a:pPr>
+            <a:r>
+              <a:rPr lang="en-US" sz="1200" i="1" dirty="0">
+                <a:solidFill>
+                  <a:srgbClr val="1C2833"/>
+                </a:solidFill>
+                <a:latin typeface="Arial" pitchFamily="34" charset="0"/>
+                <a:ea typeface="Arial" pitchFamily="34" charset="-122"/>
+                <a:cs typeface="Arial" pitchFamily="34" charset="-120"/>
+              </a:rPr>
+              <a:t>Each row: Position · What it represents · Northern Hemisphere · Southern Hemisphere.</a:t>
+            </a:r>
+            <a:endParaRPr lang="en-US" sz="1200" dirty="0"/>
+          </a:p>
+        </p:txBody>
+      </p:sp>
+      <p:sp>
+        <p:nvSpPr>
+          <p:cNvPr id="6" name="Text 4"/>
           <p:cNvSpPr/>
           <p:nvPr/>
         </p:nvSpPr>
@@ -4938,7 +8576,7 @@
                 <a:ea typeface="Georgia" pitchFamily="34" charset="-122"/>
                 <a:cs typeface="Georgia" pitchFamily="34" charset="-120"/>
               </a:rPr>
-              <a:t>Differentiation</a:t>
+              <a:t>Core (20 min) (cont.)</a:t>
             </a:r>
             <a:endParaRPr lang="en-US" sz="1800" dirty="0"/>
           </a:p>
@@ -4953,7 +8591,7 @@
         <p:spPr>
           <a:xfrm>
             <a:off x="634901" y="883593"/>
-            <a:ext cx="8102798" cy="937022"/>
+            <a:ext cx="8102798" cy="1013222"/>
           </a:xfrm>
           <a:prstGeom prst="rect">
             <a:avLst/>
@@ -4984,7 +8622,7 @@
                 <a:ea typeface="Arial" pitchFamily="34" charset="-122"/>
                 <a:cs typeface="Arial" pitchFamily="34" charset="-120"/>
               </a:rPr>
-              <a:t>One tier up:</a:t>
+              <a:t>N pole tilted TOWARD torch</a:t>
             </a:r>
             <a:pPr algn="l" indent="0" marL="0">
               <a:lnSpc>
@@ -5004,7 +8642,7 @@
                 <a:ea typeface="Arial" pitchFamily="34" charset="-122"/>
                 <a:cs typeface="Arial" pitchFamily="34" charset="-120"/>
               </a:rPr>
-              <a:t> What would the seasons be like if Earth's tilt were 0°? (No seasons; equal day/night everywhere all year; equatorial regions hot, polar regions cold permanently.) What if it were 45°? (Extreme seasons — the Arctic Circle would extend down to Delhi's latitude in summer.)</a:t>
+              <a:t> — June solstice · Summer (long days) · Winter (short days)</a:t>
             </a:r>
             <a:endParaRPr lang="en-US" sz="1200" dirty="0"/>
           </a:p>
@@ -5028,7 +8666,7 @@
                 <a:ea typeface="Arial" pitchFamily="34" charset="-122"/>
                 <a:cs typeface="Arial" pitchFamily="34" charset="-120"/>
               </a:rPr>
-              <a:t>One tier down:</a:t>
+              <a:t>N pole tilted SIDEWAYS (1)</a:t>
             </a:r>
             <a:pPr algn="l" indent="0" marL="0">
               <a:lnSpc>
@@ -5048,7 +8686,95 @@
                 <a:ea typeface="Arial" pitchFamily="34" charset="-122"/>
                 <a:cs typeface="Arial" pitchFamily="34" charset="-120"/>
               </a:rPr>
-              <a:t> Focus on the demo. Just remember: "tilted toward = summer, tilted away = winter, sideways = equinox."</a:t>
+              <a:t> — September equinox · Day = night · Day = night</a:t>
+            </a:r>
+            <a:endParaRPr lang="en-US" sz="1200" dirty="0"/>
+          </a:p>
+          <a:p>
+            <a:pPr algn="l" marL="342900" indent="-342900">
+              <a:lnSpc>
+                <a:spcPts val="1620"/>
+              </a:lnSpc>
+              <a:spcAft>
+                <a:spcPts val="300"/>
+              </a:spcAft>
+              <a:buSzPct val="100000"/>
+              <a:buChar char="•"/>
+            </a:pPr>
+            <a:r>
+              <a:rPr lang="en-US" sz="1200" b="1" dirty="0">
+                <a:solidFill>
+                  <a:srgbClr val="1C2833"/>
+                </a:solidFill>
+                <a:latin typeface="Arial" pitchFamily="34" charset="0"/>
+                <a:ea typeface="Arial" pitchFamily="34" charset="-122"/>
+                <a:cs typeface="Arial" pitchFamily="34" charset="-120"/>
+              </a:rPr>
+              <a:t>N pole tilted AWAY from torch</a:t>
+            </a:r>
+            <a:pPr algn="l" indent="0" marL="0">
+              <a:lnSpc>
+                <a:spcPts val="1620"/>
+              </a:lnSpc>
+              <a:spcAft>
+                <a:spcPts val="300"/>
+              </a:spcAft>
+              <a:buNone/>
+            </a:pPr>
+            <a:r>
+              <a:rPr lang="en-US" sz="1200" dirty="0">
+                <a:solidFill>
+                  <a:srgbClr val="1C2833"/>
+                </a:solidFill>
+                <a:latin typeface="Arial" pitchFamily="34" charset="0"/>
+                <a:ea typeface="Arial" pitchFamily="34" charset="-122"/>
+                <a:cs typeface="Arial" pitchFamily="34" charset="-120"/>
+              </a:rPr>
+              <a:t> — December solstice · Winter (short days) · Summer (long days)</a:t>
+            </a:r>
+            <a:endParaRPr lang="en-US" sz="1200" dirty="0"/>
+          </a:p>
+          <a:p>
+            <a:pPr algn="l" marL="342900" indent="-342900">
+              <a:lnSpc>
+                <a:spcPts val="1620"/>
+              </a:lnSpc>
+              <a:spcAft>
+                <a:spcPts val="300"/>
+              </a:spcAft>
+              <a:buSzPct val="100000"/>
+              <a:buChar char="•"/>
+            </a:pPr>
+            <a:r>
+              <a:rPr lang="en-US" sz="1200" b="1" dirty="0">
+                <a:solidFill>
+                  <a:srgbClr val="1C2833"/>
+                </a:solidFill>
+                <a:latin typeface="Arial" pitchFamily="34" charset="0"/>
+                <a:ea typeface="Arial" pitchFamily="34" charset="-122"/>
+                <a:cs typeface="Arial" pitchFamily="34" charset="-120"/>
+              </a:rPr>
+              <a:t>N pole tilted SIDEWAYS (2)</a:t>
+            </a:r>
+            <a:pPr algn="l" indent="0" marL="0">
+              <a:lnSpc>
+                <a:spcPts val="1620"/>
+              </a:lnSpc>
+              <a:spcAft>
+                <a:spcPts val="300"/>
+              </a:spcAft>
+              <a:buNone/>
+            </a:pPr>
+            <a:r>
+              <a:rPr lang="en-US" sz="1200" dirty="0">
+                <a:solidFill>
+                  <a:srgbClr val="1C2833"/>
+                </a:solidFill>
+                <a:latin typeface="Arial" pitchFamily="34" charset="0"/>
+                <a:ea typeface="Arial" pitchFamily="34" charset="-122"/>
+                <a:cs typeface="Arial" pitchFamily="34" charset="-120"/>
+              </a:rPr>
+              <a:t> — March equinox · Day = night · Day = night</a:t>
             </a:r>
             <a:endParaRPr lang="en-US" sz="1200" dirty="0"/>
           </a:p>
